--- a/output/wordlabs-participate-3day.pptx
+++ b/output/wordlabs-participate-3day.pptx
@@ -5622,7 +5622,7 @@
                 <a:ea typeface="Trebuchet MS" pitchFamily="34" charset="-122"/>
                 <a:cs typeface="Trebuchet MS" pitchFamily="34" charset="-120"/>
               </a:rPr>
-              <a:t>1</a:t>
+              <a:t>0</a:t>
             </a:r>
             <a:pPr algn="ctr" indent="0" marL="0">
               <a:buNone/>
@@ -6040,7 +6040,7 @@
                 <a:ea typeface="Calibri" pitchFamily="34" charset="-122"/>
                 <a:cs typeface="Calibri" pitchFamily="34" charset="-120"/>
               </a:rPr>
-              <a:t>Active </a:t>
+              <a:t>The enthusiastic </a:t>
             </a:r>
             <a:pPr algn="l" indent="0" marL="0">
               <a:buNone/>
@@ -6057,7 +6057,7 @@
                 <a:ea typeface="Calibri" pitchFamily="34" charset="-122"/>
                 <a:cs typeface="Calibri" pitchFamily="34" charset="-120"/>
               </a:rPr>
-              <a:t>participation</a:t>
+              <a:t>participant</a:t>
             </a:r>
             <a:pPr algn="l" indent="0" marL="0">
               <a:buNone/>
@@ -6071,7 +6071,7 @@
                 <a:ea typeface="Calibri" pitchFamily="34" charset="-122"/>
                 <a:cs typeface="Calibri" pitchFamily="34" charset="-120"/>
               </a:rPr>
-              <a:t> from every </a:t>
+              <a:t> smiled as she finished </a:t>
             </a:r>
             <a:pPr algn="l" indent="0" marL="0">
               <a:buNone/>
@@ -6088,7 +6088,7 @@
                 <a:ea typeface="Calibri" pitchFamily="34" charset="-122"/>
                 <a:cs typeface="Calibri" pitchFamily="34" charset="-120"/>
               </a:rPr>
-              <a:t>participant</a:t>
+              <a:t>participating</a:t>
             </a:r>
             <a:pPr algn="l" indent="0" marL="0">
               <a:buNone/>
@@ -6102,7 +6102,7 @@
                 <a:ea typeface="Calibri" pitchFamily="34" charset="-122"/>
                 <a:cs typeface="Calibri" pitchFamily="34" charset="-120"/>
               </a:rPr>
-              <a:t> made the excursion a great success!</a:t>
+              <a:t> in the relay race.</a:t>
             </a:r>
             <a:endParaRPr lang="en-US" sz="1800" dirty="0"/>
           </a:p>
@@ -6257,7 +6257,7 @@
                 <a:ea typeface="Trebuchet MS" pitchFamily="34" charset="-122"/>
                 <a:cs typeface="Trebuchet MS" pitchFamily="34" charset="-120"/>
               </a:rPr>
-              <a:t>participation</a:t>
+              <a:t>participant</a:t>
             </a:r>
             <a:endParaRPr lang="en-US" sz="1400" dirty="0"/>
           </a:p>
@@ -6385,7 +6385,7 @@
                 <a:ea typeface="Trebuchet MS" pitchFamily="34" charset="-122"/>
                 <a:cs typeface="Trebuchet MS" pitchFamily="34" charset="-120"/>
               </a:rPr>
-              <a:t>participant</a:t>
+              <a:t>participating</a:t>
             </a:r>
             <a:endParaRPr lang="en-US" sz="1400" dirty="0"/>
           </a:p>
@@ -6855,7 +6855,7 @@
                 <a:ea typeface="Trebuchet MS" pitchFamily="34" charset="-122"/>
                 <a:cs typeface="Trebuchet MS" pitchFamily="34" charset="-120"/>
               </a:rPr>
-              <a:t>participation</a:t>
+              <a:t>participant</a:t>
             </a:r>
             <a:endParaRPr lang="en-US" sz="2800" dirty="0"/>
           </a:p>
@@ -7682,7 +7682,7 @@
                 <a:ea typeface="Trebuchet MS" pitchFamily="34" charset="-122"/>
                 <a:cs typeface="Trebuchet MS" pitchFamily="34" charset="-120"/>
               </a:rPr>
-              <a:t>participation</a:t>
+              <a:t>participant</a:t>
             </a:r>
             <a:endParaRPr lang="en-US" sz="2800" dirty="0"/>
           </a:p>
@@ -7972,7 +7972,7 @@
                 <a:ea typeface="Trebuchet MS" pitchFamily="34" charset="-122"/>
                 <a:cs typeface="Trebuchet MS" pitchFamily="34" charset="-120"/>
               </a:rPr>
-              <a:t>ion</a:t>
+              <a:t>ant</a:t>
             </a:r>
             <a:endParaRPr lang="en-US" sz="1300" dirty="0"/>
           </a:p>
@@ -8011,7 +8011,7 @@
                 <a:ea typeface="Calibri" pitchFamily="34" charset="-122"/>
                 <a:cs typeface="Calibri" pitchFamily="34" charset="-120"/>
               </a:rPr>
-              <a:t>act or process of</a:t>
+              <a:t>a person who does</a:t>
             </a:r>
             <a:endParaRPr lang="en-US" sz="850" dirty="0"/>
           </a:p>
@@ -8706,7 +8706,7 @@
                 <a:ea typeface="Trebuchet MS" pitchFamily="34" charset="-122"/>
                 <a:cs typeface="Trebuchet MS" pitchFamily="34" charset="-120"/>
               </a:rPr>
-              <a:t>participation</a:t>
+              <a:t>participant</a:t>
             </a:r>
             <a:endParaRPr lang="en-US" sz="2800" dirty="0"/>
           </a:p>
@@ -8996,7 +8996,7 @@
                 <a:ea typeface="Trebuchet MS" pitchFamily="34" charset="-122"/>
                 <a:cs typeface="Trebuchet MS" pitchFamily="34" charset="-120"/>
               </a:rPr>
-              <a:t>ion</a:t>
+              <a:t>ant</a:t>
             </a:r>
             <a:endParaRPr lang="en-US" sz="1300" dirty="0"/>
           </a:p>
@@ -9035,7 +9035,7 @@
                 <a:ea typeface="Calibri" pitchFamily="34" charset="-122"/>
                 <a:cs typeface="Calibri" pitchFamily="34" charset="-120"/>
               </a:rPr>
-              <a:t>act or process of</a:t>
+              <a:t>a person who does</a:t>
             </a:r>
             <a:endParaRPr lang="en-US" sz="850" dirty="0"/>
           </a:p>
@@ -9142,8 +9142,8 @@
         </p:nvSpPr>
         <p:spPr>
           <a:xfrm>
-            <a:off x="1978152" y="3364992"/>
-            <a:ext cx="1225296" cy="475488"/>
+            <a:off x="1975104" y="3364992"/>
+            <a:ext cx="1554480" cy="475488"/>
           </a:xfrm>
           <a:prstGeom prst="rect">
             <a:avLst>
@@ -9169,8 +9169,8 @@
         </p:nvSpPr>
         <p:spPr>
           <a:xfrm>
-            <a:off x="1978152" y="3364992"/>
-            <a:ext cx="1225296" cy="475488"/>
+            <a:off x="1975104" y="3364992"/>
+            <a:ext cx="1554480" cy="475488"/>
           </a:xfrm>
           <a:prstGeom prst="rect">
             <a:avLst/>
@@ -9208,8 +9208,8 @@
         </p:nvSpPr>
         <p:spPr>
           <a:xfrm>
-            <a:off x="3203448" y="3364992"/>
-            <a:ext cx="76200" cy="475488"/>
+            <a:off x="3529584" y="3364992"/>
+            <a:ext cx="73152" cy="475488"/>
           </a:xfrm>
           <a:prstGeom prst="rect">
             <a:avLst/>
@@ -9247,8 +9247,8 @@
         </p:nvSpPr>
         <p:spPr>
           <a:xfrm>
-            <a:off x="3279648" y="3364992"/>
-            <a:ext cx="1225296" cy="475488"/>
+            <a:off x="3602736" y="3364992"/>
+            <a:ext cx="1554480" cy="475488"/>
           </a:xfrm>
           <a:prstGeom prst="rect">
             <a:avLst>
@@ -9274,8 +9274,8 @@
         </p:nvSpPr>
         <p:spPr>
           <a:xfrm>
-            <a:off x="3279648" y="3364992"/>
-            <a:ext cx="1225296" cy="475488"/>
+            <a:off x="3602736" y="3364992"/>
+            <a:ext cx="1554480" cy="475488"/>
           </a:xfrm>
           <a:prstGeom prst="rect">
             <a:avLst/>
@@ -9313,8 +9313,8 @@
         </p:nvSpPr>
         <p:spPr>
           <a:xfrm>
-            <a:off x="4504944" y="3364992"/>
-            <a:ext cx="76200" cy="475488"/>
+            <a:off x="5157216" y="3364992"/>
+            <a:ext cx="73152" cy="475488"/>
           </a:xfrm>
           <a:prstGeom prst="rect">
             <a:avLst/>
@@ -9352,8 +9352,8 @@
         </p:nvSpPr>
         <p:spPr>
           <a:xfrm>
-            <a:off x="4581144" y="3364992"/>
-            <a:ext cx="1225296" cy="475488"/>
+            <a:off x="5230368" y="3364992"/>
+            <a:ext cx="1554480" cy="475488"/>
           </a:xfrm>
           <a:prstGeom prst="rect">
             <a:avLst>
@@ -9379,8 +9379,8 @@
         </p:nvSpPr>
         <p:spPr>
           <a:xfrm>
-            <a:off x="4581144" y="3364992"/>
-            <a:ext cx="1225296" cy="475488"/>
+            <a:off x="5230368" y="3364992"/>
+            <a:ext cx="1554480" cy="475488"/>
           </a:xfrm>
           <a:prstGeom prst="rect">
             <a:avLst/>
@@ -9418,8 +9418,8 @@
         </p:nvSpPr>
         <p:spPr>
           <a:xfrm>
-            <a:off x="5806440" y="3364992"/>
-            <a:ext cx="76200" cy="475488"/>
+            <a:off x="6784848" y="3364992"/>
+            <a:ext cx="73152" cy="475488"/>
           </a:xfrm>
           <a:prstGeom prst="rect">
             <a:avLst/>
@@ -9457,8 +9457,8 @@
         </p:nvSpPr>
         <p:spPr>
           <a:xfrm>
-            <a:off x="5882640" y="3364992"/>
-            <a:ext cx="1225296" cy="475488"/>
+            <a:off x="6858000" y="3364992"/>
+            <a:ext cx="1554480" cy="475488"/>
           </a:xfrm>
           <a:prstGeom prst="rect">
             <a:avLst>
@@ -9484,8 +9484,8 @@
         </p:nvSpPr>
         <p:spPr>
           <a:xfrm>
-            <a:off x="5882640" y="3364992"/>
-            <a:ext cx="1225296" cy="475488"/>
+            <a:off x="6858000" y="3364992"/>
+            <a:ext cx="1554480" cy="475488"/>
           </a:xfrm>
           <a:prstGeom prst="rect">
             <a:avLst/>
@@ -9509,7 +9509,7 @@
                 <a:ea typeface="Trebuchet MS" pitchFamily="34" charset="-122"/>
                 <a:cs typeface="Trebuchet MS" pitchFamily="34" charset="-120"/>
               </a:rPr>
-              <a:t>pa</a:t>
+              <a:t>pant</a:t>
             </a:r>
             <a:endParaRPr lang="en-US" sz="1400" dirty="0"/>
           </a:p>
@@ -9517,119 +9517,80 @@
       </p:sp>
       <p:sp>
         <p:nvSpPr>
-          <p:cNvPr id="37" name="Text 35"/>
-          <p:cNvSpPr/>
-          <p:nvPr/>
-        </p:nvSpPr>
-        <p:spPr>
-          <a:xfrm>
-            <a:off x="7107936" y="3364992"/>
-            <a:ext cx="76200" cy="475488"/>
-          </a:xfrm>
-          <a:prstGeom prst="rect">
-            <a:avLst/>
-          </a:prstGeom>
-          <a:noFill/>
-          <a:ln/>
-        </p:spPr>
-        <p:txBody>
-          <a:bodyPr wrap="square" lIns="0" tIns="0" rIns="0" bIns="0" rtlCol="0" anchor="ctr"/>
-          <a:lstStyle/>
-          <a:p>
-            <a:pPr algn="ctr" indent="0" marL="0">
-              <a:buNone/>
-            </a:pPr>
-            <a:r>
-              <a:rPr lang="en-US" sz="1600" b="1" dirty="0">
-                <a:solidFill>
-                  <a:srgbClr val="0D9488"/>
+          <p:cNvPr id="37" name="Shape 35"/>
+          <p:cNvSpPr/>
+          <p:nvPr/>
+        </p:nvSpPr>
+        <p:spPr>
+          <a:xfrm>
+            <a:off x="365760" y="4096512"/>
+            <a:ext cx="1371600" cy="804672"/>
+          </a:xfrm>
+          <a:prstGeom prst="rect">
+            <a:avLst>
+              <a:gd name="adj" fmla="val 6818"/>
+            </a:avLst>
+          </a:prstGeom>
+          <a:solidFill>
+            <a:srgbClr val="E2E8F0"/>
+          </a:solidFill>
+          <a:ln w="12700">
+            <a:solidFill>
+              <a:srgbClr val="E2E8F0"/>
+            </a:solidFill>
+            <a:prstDash val="solid"/>
+          </a:ln>
+        </p:spPr>
+      </p:sp>
+      <p:sp>
+        <p:nvSpPr>
+          <p:cNvPr id="38" name="Text 36"/>
+          <p:cNvSpPr/>
+          <p:nvPr/>
+        </p:nvSpPr>
+        <p:spPr>
+          <a:xfrm>
+            <a:off x="365760" y="4096512"/>
+            <a:ext cx="1371600" cy="804672"/>
+          </a:xfrm>
+          <a:prstGeom prst="rect">
+            <a:avLst/>
+          </a:prstGeom>
+          <a:noFill/>
+          <a:ln/>
+        </p:spPr>
+        <p:txBody>
+          <a:bodyPr wrap="square" lIns="0" tIns="0" rIns="0" bIns="0" rtlCol="0" anchor="ctr"/>
+          <a:lstStyle/>
+          <a:p>
+            <a:pPr algn="ctr" indent="0" marL="0">
+              <a:buNone/>
+            </a:pPr>
+            <a:r>
+              <a:rPr lang="en-US" sz="1100" b="1" dirty="0">
+                <a:solidFill>
+                  <a:srgbClr val="475569"/>
                 </a:solidFill>
                 <a:latin typeface="Trebuchet MS" pitchFamily="34" charset="0"/>
                 <a:ea typeface="Trebuchet MS" pitchFamily="34" charset="-122"/>
                 <a:cs typeface="Trebuchet MS" pitchFamily="34" charset="-120"/>
               </a:rPr>
-              <a:t>·</a:t>
-            </a:r>
-            <a:endParaRPr lang="en-US" sz="1600" dirty="0"/>
-          </a:p>
-        </p:txBody>
-      </p:sp>
-      <p:sp>
-        <p:nvSpPr>
-          <p:cNvPr id="38" name="Shape 36"/>
-          <p:cNvSpPr/>
-          <p:nvPr/>
-        </p:nvSpPr>
-        <p:spPr>
-          <a:xfrm>
-            <a:off x="7184136" y="3364992"/>
-            <a:ext cx="1225296" cy="475488"/>
-          </a:xfrm>
-          <a:prstGeom prst="rect">
-            <a:avLst>
-              <a:gd name="adj" fmla="val 9615"/>
-            </a:avLst>
-          </a:prstGeom>
-          <a:solidFill>
-            <a:srgbClr val="FFFFFF"/>
-          </a:solidFill>
-          <a:ln w="12700">
-            <a:solidFill>
-              <a:srgbClr val="0D9488"/>
-            </a:solidFill>
-            <a:prstDash val="solid"/>
-          </a:ln>
-        </p:spPr>
-      </p:sp>
-      <p:sp>
-        <p:nvSpPr>
-          <p:cNvPr id="39" name="Text 37"/>
-          <p:cNvSpPr/>
-          <p:nvPr/>
-        </p:nvSpPr>
-        <p:spPr>
-          <a:xfrm>
-            <a:off x="7184136" y="3364992"/>
-            <a:ext cx="1225296" cy="475488"/>
-          </a:xfrm>
-          <a:prstGeom prst="rect">
-            <a:avLst/>
-          </a:prstGeom>
-          <a:noFill/>
-          <a:ln/>
-        </p:spPr>
-        <p:txBody>
-          <a:bodyPr wrap="square" lIns="0" tIns="0" rIns="0" bIns="0" rtlCol="0" anchor="ctr"/>
-          <a:lstStyle/>
-          <a:p>
-            <a:pPr algn="ctr" indent="0" marL="0">
-              <a:buNone/>
-            </a:pPr>
-            <a:r>
-              <a:rPr lang="en-US" sz="1400" b="1" dirty="0">
-                <a:solidFill>
-                  <a:srgbClr val="0D9488"/>
-                </a:solidFill>
-                <a:latin typeface="Trebuchet MS" pitchFamily="34" charset="0"/>
-                <a:ea typeface="Trebuchet MS" pitchFamily="34" charset="-122"/>
-                <a:cs typeface="Trebuchet MS" pitchFamily="34" charset="-120"/>
-              </a:rPr>
-              <a:t>tion</a:t>
-            </a:r>
-            <a:endParaRPr lang="en-US" sz="1400" dirty="0"/>
-          </a:p>
-        </p:txBody>
-      </p:sp>
-      <p:sp>
-        <p:nvSpPr>
-          <p:cNvPr id="40" name="Shape 38"/>
-          <p:cNvSpPr/>
-          <p:nvPr/>
-        </p:nvSpPr>
-        <p:spPr>
-          <a:xfrm>
-            <a:off x="365760" y="4096512"/>
-            <a:ext cx="1371600" cy="804672"/>
+              <a:t>Phonemes</a:t>
+            </a:r>
+            <a:endParaRPr lang="en-US" sz="1100" dirty="0"/>
+          </a:p>
+        </p:txBody>
+      </p:sp>
+      <p:sp>
+        <p:nvSpPr>
+          <p:cNvPr id="39" name="Shape 37"/>
+          <p:cNvSpPr/>
+          <p:nvPr/>
+        </p:nvSpPr>
+        <p:spPr>
+          <a:xfrm>
+            <a:off x="1874520" y="4096512"/>
+            <a:ext cx="6903720" cy="804672"/>
           </a:xfrm>
           <a:prstGeom prst="rect">
             <a:avLst>
@@ -9637,85 +9598,19 @@
             </a:avLst>
           </a:prstGeom>
           <a:solidFill>
-            <a:srgbClr val="E2E8F0"/>
+            <a:srgbClr val="F8FAFC"/>
           </a:solidFill>
           <a:ln w="12700">
             <a:solidFill>
               <a:srgbClr val="E2E8F0"/>
             </a:solidFill>
-            <a:prstDash val="solid"/>
-          </a:ln>
-        </p:spPr>
-      </p:sp>
-      <p:sp>
-        <p:nvSpPr>
-          <p:cNvPr id="41" name="Text 39"/>
-          <p:cNvSpPr/>
-          <p:nvPr/>
-        </p:nvSpPr>
-        <p:spPr>
-          <a:xfrm>
-            <a:off x="365760" y="4096512"/>
-            <a:ext cx="1371600" cy="804672"/>
-          </a:xfrm>
-          <a:prstGeom prst="rect">
-            <a:avLst/>
-          </a:prstGeom>
-          <a:noFill/>
-          <a:ln/>
-        </p:spPr>
-        <p:txBody>
-          <a:bodyPr wrap="square" lIns="0" tIns="0" rIns="0" bIns="0" rtlCol="0" anchor="ctr"/>
-          <a:lstStyle/>
-          <a:p>
-            <a:pPr algn="ctr" indent="0" marL="0">
-              <a:buNone/>
-            </a:pPr>
-            <a:r>
-              <a:rPr lang="en-US" sz="1100" b="1" dirty="0">
-                <a:solidFill>
-                  <a:srgbClr val="475569"/>
-                </a:solidFill>
-                <a:latin typeface="Trebuchet MS" pitchFamily="34" charset="0"/>
-                <a:ea typeface="Trebuchet MS" pitchFamily="34" charset="-122"/>
-                <a:cs typeface="Trebuchet MS" pitchFamily="34" charset="-120"/>
-              </a:rPr>
-              <a:t>Phonemes</a:t>
-            </a:r>
-            <a:endParaRPr lang="en-US" sz="1100" dirty="0"/>
-          </a:p>
-        </p:txBody>
-      </p:sp>
-      <p:sp>
-        <p:nvSpPr>
-          <p:cNvPr id="42" name="Shape 40"/>
-          <p:cNvSpPr/>
-          <p:nvPr/>
-        </p:nvSpPr>
-        <p:spPr>
-          <a:xfrm>
-            <a:off x="1874520" y="4096512"/>
-            <a:ext cx="6903720" cy="804672"/>
-          </a:xfrm>
-          <a:prstGeom prst="rect">
-            <a:avLst>
-              <a:gd name="adj" fmla="val 6818"/>
-            </a:avLst>
-          </a:prstGeom>
-          <a:solidFill>
-            <a:srgbClr val="F8FAFC"/>
-          </a:solidFill>
-          <a:ln w="12700">
-            <a:solidFill>
-              <a:srgbClr val="E2E8F0"/>
-            </a:solidFill>
             <a:prstDash val="dash"/>
           </a:ln>
         </p:spPr>
       </p:sp>
       <p:sp>
         <p:nvSpPr>
-          <p:cNvPr id="43" name="Text 41"/>
+          <p:cNvPr id="40" name="Text 38"/>
           <p:cNvSpPr/>
           <p:nvPr/>
         </p:nvSpPr>
@@ -10177,7 +10072,7 @@
                 <a:ea typeface="Trebuchet MS" pitchFamily="34" charset="-122"/>
                 <a:cs typeface="Trebuchet MS" pitchFamily="34" charset="-120"/>
               </a:rPr>
-              <a:t>participation</a:t>
+              <a:t>participant</a:t>
             </a:r>
             <a:endParaRPr lang="en-US" sz="2800" dirty="0"/>
           </a:p>
@@ -10467,7 +10362,7 @@
                 <a:ea typeface="Trebuchet MS" pitchFamily="34" charset="-122"/>
                 <a:cs typeface="Trebuchet MS" pitchFamily="34" charset="-120"/>
               </a:rPr>
-              <a:t>ion</a:t>
+              <a:t>ant</a:t>
             </a:r>
             <a:endParaRPr lang="en-US" sz="1300" dirty="0"/>
           </a:p>
@@ -10506,7 +10401,7 @@
                 <a:ea typeface="Calibri" pitchFamily="34" charset="-122"/>
                 <a:cs typeface="Calibri" pitchFamily="34" charset="-120"/>
               </a:rPr>
-              <a:t>act or process of</a:t>
+              <a:t>a person who does</a:t>
             </a:r>
             <a:endParaRPr lang="en-US" sz="850" dirty="0"/>
           </a:p>
@@ -10613,8 +10508,8 @@
         </p:nvSpPr>
         <p:spPr>
           <a:xfrm>
-            <a:off x="1978152" y="3364992"/>
-            <a:ext cx="1225296" cy="475488"/>
+            <a:off x="1975104" y="3364992"/>
+            <a:ext cx="1554480" cy="475488"/>
           </a:xfrm>
           <a:prstGeom prst="rect">
             <a:avLst>
@@ -10640,8 +10535,8 @@
         </p:nvSpPr>
         <p:spPr>
           <a:xfrm>
-            <a:off x="1978152" y="3364992"/>
-            <a:ext cx="1225296" cy="475488"/>
+            <a:off x="1975104" y="3364992"/>
+            <a:ext cx="1554480" cy="475488"/>
           </a:xfrm>
           <a:prstGeom prst="rect">
             <a:avLst/>
@@ -10679,8 +10574,8 @@
         </p:nvSpPr>
         <p:spPr>
           <a:xfrm>
-            <a:off x="3203448" y="3364992"/>
-            <a:ext cx="76200" cy="475488"/>
+            <a:off x="3529584" y="3364992"/>
+            <a:ext cx="73152" cy="475488"/>
           </a:xfrm>
           <a:prstGeom prst="rect">
             <a:avLst/>
@@ -10718,8 +10613,8 @@
         </p:nvSpPr>
         <p:spPr>
           <a:xfrm>
-            <a:off x="3279648" y="3364992"/>
-            <a:ext cx="1225296" cy="475488"/>
+            <a:off x="3602736" y="3364992"/>
+            <a:ext cx="1554480" cy="475488"/>
           </a:xfrm>
           <a:prstGeom prst="rect">
             <a:avLst>
@@ -10745,8 +10640,8 @@
         </p:nvSpPr>
         <p:spPr>
           <a:xfrm>
-            <a:off x="3279648" y="3364992"/>
-            <a:ext cx="1225296" cy="475488"/>
+            <a:off x="3602736" y="3364992"/>
+            <a:ext cx="1554480" cy="475488"/>
           </a:xfrm>
           <a:prstGeom prst="rect">
             <a:avLst/>
@@ -10784,8 +10679,8 @@
         </p:nvSpPr>
         <p:spPr>
           <a:xfrm>
-            <a:off x="4504944" y="3364992"/>
-            <a:ext cx="76200" cy="475488"/>
+            <a:off x="5157216" y="3364992"/>
+            <a:ext cx="73152" cy="475488"/>
           </a:xfrm>
           <a:prstGeom prst="rect">
             <a:avLst/>
@@ -10823,8 +10718,8 @@
         </p:nvSpPr>
         <p:spPr>
           <a:xfrm>
-            <a:off x="4581144" y="3364992"/>
-            <a:ext cx="1225296" cy="475488"/>
+            <a:off x="5230368" y="3364992"/>
+            <a:ext cx="1554480" cy="475488"/>
           </a:xfrm>
           <a:prstGeom prst="rect">
             <a:avLst>
@@ -10850,8 +10745,8 @@
         </p:nvSpPr>
         <p:spPr>
           <a:xfrm>
-            <a:off x="4581144" y="3364992"/>
-            <a:ext cx="1225296" cy="475488"/>
+            <a:off x="5230368" y="3364992"/>
+            <a:ext cx="1554480" cy="475488"/>
           </a:xfrm>
           <a:prstGeom prst="rect">
             <a:avLst/>
@@ -10889,8 +10784,8 @@
         </p:nvSpPr>
         <p:spPr>
           <a:xfrm>
-            <a:off x="5806440" y="3364992"/>
-            <a:ext cx="76200" cy="475488"/>
+            <a:off x="6784848" y="3364992"/>
+            <a:ext cx="73152" cy="475488"/>
           </a:xfrm>
           <a:prstGeom prst="rect">
             <a:avLst/>
@@ -10928,8 +10823,8 @@
         </p:nvSpPr>
         <p:spPr>
           <a:xfrm>
-            <a:off x="5882640" y="3364992"/>
-            <a:ext cx="1225296" cy="475488"/>
+            <a:off x="6858000" y="3364992"/>
+            <a:ext cx="1554480" cy="475488"/>
           </a:xfrm>
           <a:prstGeom prst="rect">
             <a:avLst>
@@ -10955,8 +10850,8 @@
         </p:nvSpPr>
         <p:spPr>
           <a:xfrm>
-            <a:off x="5882640" y="3364992"/>
-            <a:ext cx="1225296" cy="475488"/>
+            <a:off x="6858000" y="3364992"/>
+            <a:ext cx="1554480" cy="475488"/>
           </a:xfrm>
           <a:prstGeom prst="rect">
             <a:avLst/>
@@ -10980,7 +10875,7 @@
                 <a:ea typeface="Trebuchet MS" pitchFamily="34" charset="-122"/>
                 <a:cs typeface="Trebuchet MS" pitchFamily="34" charset="-120"/>
               </a:rPr>
-              <a:t>pa</a:t>
+              <a:t>pant</a:t>
             </a:r>
             <a:endParaRPr lang="en-US" sz="1400" dirty="0"/>
           </a:p>
@@ -10988,212 +10883,239 @@
       </p:sp>
       <p:sp>
         <p:nvSpPr>
-          <p:cNvPr id="37" name="Text 35"/>
-          <p:cNvSpPr/>
-          <p:nvPr/>
-        </p:nvSpPr>
-        <p:spPr>
-          <a:xfrm>
-            <a:off x="7107936" y="3364992"/>
-            <a:ext cx="76200" cy="475488"/>
-          </a:xfrm>
-          <a:prstGeom prst="rect">
-            <a:avLst/>
-          </a:prstGeom>
-          <a:noFill/>
-          <a:ln/>
-        </p:spPr>
-        <p:txBody>
-          <a:bodyPr wrap="square" lIns="0" tIns="0" rIns="0" bIns="0" rtlCol="0" anchor="ctr"/>
-          <a:lstStyle/>
-          <a:p>
-            <a:pPr algn="ctr" indent="0" marL="0">
-              <a:buNone/>
-            </a:pPr>
-            <a:r>
-              <a:rPr lang="en-US" sz="1600" b="1" dirty="0">
-                <a:solidFill>
-                  <a:srgbClr val="0D9488"/>
+          <p:cNvPr id="37" name="Shape 35"/>
+          <p:cNvSpPr/>
+          <p:nvPr/>
+        </p:nvSpPr>
+        <p:spPr>
+          <a:xfrm>
+            <a:off x="365760" y="4096512"/>
+            <a:ext cx="1371600" cy="804672"/>
+          </a:xfrm>
+          <a:prstGeom prst="rect">
+            <a:avLst>
+              <a:gd name="adj" fmla="val 6818"/>
+            </a:avLst>
+          </a:prstGeom>
+          <a:solidFill>
+            <a:srgbClr val="E2E8F0"/>
+          </a:solidFill>
+          <a:ln w="12700">
+            <a:solidFill>
+              <a:srgbClr val="E2E8F0"/>
+            </a:solidFill>
+            <a:prstDash val="solid"/>
+          </a:ln>
+        </p:spPr>
+      </p:sp>
+      <p:sp>
+        <p:nvSpPr>
+          <p:cNvPr id="38" name="Text 36"/>
+          <p:cNvSpPr/>
+          <p:nvPr/>
+        </p:nvSpPr>
+        <p:spPr>
+          <a:xfrm>
+            <a:off x="365760" y="4096512"/>
+            <a:ext cx="1371600" cy="804672"/>
+          </a:xfrm>
+          <a:prstGeom prst="rect">
+            <a:avLst/>
+          </a:prstGeom>
+          <a:noFill/>
+          <a:ln/>
+        </p:spPr>
+        <p:txBody>
+          <a:bodyPr wrap="square" lIns="0" tIns="0" rIns="0" bIns="0" rtlCol="0" anchor="ctr"/>
+          <a:lstStyle/>
+          <a:p>
+            <a:pPr algn="ctr" indent="0" marL="0">
+              <a:buNone/>
+            </a:pPr>
+            <a:r>
+              <a:rPr lang="en-US" sz="1100" b="1" dirty="0">
+                <a:solidFill>
+                  <a:srgbClr val="475569"/>
                 </a:solidFill>
                 <a:latin typeface="Trebuchet MS" pitchFamily="34" charset="0"/>
                 <a:ea typeface="Trebuchet MS" pitchFamily="34" charset="-122"/>
                 <a:cs typeface="Trebuchet MS" pitchFamily="34" charset="-120"/>
               </a:rPr>
-              <a:t>·</a:t>
-            </a:r>
-            <a:endParaRPr lang="en-US" sz="1600" dirty="0"/>
-          </a:p>
-        </p:txBody>
-      </p:sp>
-      <p:sp>
-        <p:nvSpPr>
-          <p:cNvPr id="38" name="Shape 36"/>
-          <p:cNvSpPr/>
-          <p:nvPr/>
-        </p:nvSpPr>
-        <p:spPr>
-          <a:xfrm>
-            <a:off x="7184136" y="3364992"/>
-            <a:ext cx="1225296" cy="475488"/>
+              <a:t>Phonemes</a:t>
+            </a:r>
+            <a:endParaRPr lang="en-US" sz="1100" dirty="0"/>
+          </a:p>
+        </p:txBody>
+      </p:sp>
+      <p:sp>
+        <p:nvSpPr>
+          <p:cNvPr id="39" name="Shape 37"/>
+          <p:cNvSpPr/>
+          <p:nvPr/>
+        </p:nvSpPr>
+        <p:spPr>
+          <a:xfrm>
+            <a:off x="1874520" y="4096512"/>
+            <a:ext cx="6903720" cy="804672"/>
           </a:xfrm>
           <a:prstGeom prst="rect">
             <a:avLst>
-              <a:gd name="adj" fmla="val 9615"/>
+              <a:gd name="adj" fmla="val 6818"/>
             </a:avLst>
           </a:prstGeom>
           <a:solidFill>
+            <a:srgbClr val="FCE7F3"/>
+          </a:solidFill>
+          <a:ln w="12700">
+            <a:solidFill>
+              <a:srgbClr val="DB2777"/>
+            </a:solidFill>
+            <a:prstDash val="solid"/>
+          </a:ln>
+        </p:spPr>
+      </p:sp>
+      <p:sp>
+        <p:nvSpPr>
+          <p:cNvPr id="40" name="Shape 38"/>
+          <p:cNvSpPr/>
+          <p:nvPr/>
+        </p:nvSpPr>
+        <p:spPr>
+          <a:xfrm>
+            <a:off x="1951828" y="4169664"/>
+            <a:ext cx="603504" cy="384048"/>
+          </a:xfrm>
+          <a:prstGeom prst="rect">
+            <a:avLst>
+              <a:gd name="adj" fmla="val 9524"/>
+            </a:avLst>
+          </a:prstGeom>
+          <a:solidFill>
             <a:srgbClr val="FFFFFF"/>
           </a:solidFill>
           <a:ln w="12700">
             <a:solidFill>
-              <a:srgbClr val="0D9488"/>
-            </a:solidFill>
-            <a:prstDash val="solid"/>
-          </a:ln>
-        </p:spPr>
-      </p:sp>
-      <p:sp>
-        <p:nvSpPr>
-          <p:cNvPr id="39" name="Text 37"/>
-          <p:cNvSpPr/>
-          <p:nvPr/>
-        </p:nvSpPr>
-        <p:spPr>
-          <a:xfrm>
-            <a:off x="7184136" y="3364992"/>
-            <a:ext cx="1225296" cy="475488"/>
-          </a:xfrm>
-          <a:prstGeom prst="rect">
-            <a:avLst/>
-          </a:prstGeom>
-          <a:noFill/>
-          <a:ln/>
-        </p:spPr>
-        <p:txBody>
-          <a:bodyPr wrap="square" lIns="0" tIns="0" rIns="0" bIns="0" rtlCol="0" anchor="ctr"/>
-          <a:lstStyle/>
-          <a:p>
-            <a:pPr algn="ctr" indent="0" marL="0">
-              <a:buNone/>
-            </a:pPr>
-            <a:r>
-              <a:rPr lang="en-US" sz="1400" b="1" dirty="0">
-                <a:solidFill>
-                  <a:srgbClr val="0D9488"/>
+              <a:srgbClr val="DB2777"/>
+            </a:solidFill>
+            <a:prstDash val="solid"/>
+          </a:ln>
+        </p:spPr>
+      </p:sp>
+      <p:sp>
+        <p:nvSpPr>
+          <p:cNvPr id="41" name="Text 39"/>
+          <p:cNvSpPr/>
+          <p:nvPr/>
+        </p:nvSpPr>
+        <p:spPr>
+          <a:xfrm>
+            <a:off x="1951828" y="4169664"/>
+            <a:ext cx="603504" cy="384048"/>
+          </a:xfrm>
+          <a:prstGeom prst="rect">
+            <a:avLst/>
+          </a:prstGeom>
+          <a:noFill/>
+          <a:ln/>
+        </p:spPr>
+        <p:txBody>
+          <a:bodyPr wrap="square" lIns="0" tIns="0" rIns="0" bIns="0" rtlCol="0" anchor="ctr"/>
+          <a:lstStyle/>
+          <a:p>
+            <a:pPr algn="ctr" indent="0" marL="0">
+              <a:buNone/>
+            </a:pPr>
+            <a:r>
+              <a:rPr lang="en-US" sz="900" b="1" dirty="0">
+                <a:solidFill>
+                  <a:srgbClr val="9D174D"/>
                 </a:solidFill>
                 <a:latin typeface="Trebuchet MS" pitchFamily="34" charset="0"/>
                 <a:ea typeface="Trebuchet MS" pitchFamily="34" charset="-122"/>
                 <a:cs typeface="Trebuchet MS" pitchFamily="34" charset="-120"/>
               </a:rPr>
-              <a:t>tion</a:t>
-            </a:r>
-            <a:endParaRPr lang="en-US" sz="1400" dirty="0"/>
-          </a:p>
-        </p:txBody>
-      </p:sp>
-      <p:sp>
-        <p:nvSpPr>
-          <p:cNvPr id="40" name="Shape 38"/>
-          <p:cNvSpPr/>
-          <p:nvPr/>
-        </p:nvSpPr>
-        <p:spPr>
-          <a:xfrm>
-            <a:off x="365760" y="4096512"/>
-            <a:ext cx="1371600" cy="804672"/>
+              <a:t>p</a:t>
+            </a:r>
+            <a:endParaRPr lang="en-US" sz="900" dirty="0"/>
+          </a:p>
+        </p:txBody>
+      </p:sp>
+      <p:sp>
+        <p:nvSpPr>
+          <p:cNvPr id="42" name="Shape 40"/>
+          <p:cNvSpPr/>
+          <p:nvPr/>
+        </p:nvSpPr>
+        <p:spPr>
+          <a:xfrm>
+            <a:off x="2605209" y="4169664"/>
+            <a:ext cx="603504" cy="384048"/>
           </a:xfrm>
           <a:prstGeom prst="rect">
             <a:avLst>
-              <a:gd name="adj" fmla="val 6818"/>
+              <a:gd name="adj" fmla="val 9524"/>
             </a:avLst>
           </a:prstGeom>
           <a:solidFill>
-            <a:srgbClr val="E2E8F0"/>
-          </a:solidFill>
-          <a:ln w="12700">
-            <a:solidFill>
-              <a:srgbClr val="E2E8F0"/>
-            </a:solidFill>
-            <a:prstDash val="solid"/>
-          </a:ln>
-        </p:spPr>
-      </p:sp>
-      <p:sp>
-        <p:nvSpPr>
-          <p:cNvPr id="41" name="Text 39"/>
-          <p:cNvSpPr/>
-          <p:nvPr/>
-        </p:nvSpPr>
-        <p:spPr>
-          <a:xfrm>
-            <a:off x="365760" y="4096512"/>
-            <a:ext cx="1371600" cy="804672"/>
-          </a:xfrm>
-          <a:prstGeom prst="rect">
-            <a:avLst/>
-          </a:prstGeom>
-          <a:noFill/>
-          <a:ln/>
-        </p:spPr>
-        <p:txBody>
-          <a:bodyPr wrap="square" lIns="0" tIns="0" rIns="0" bIns="0" rtlCol="0" anchor="ctr"/>
-          <a:lstStyle/>
-          <a:p>
-            <a:pPr algn="ctr" indent="0" marL="0">
-              <a:buNone/>
-            </a:pPr>
-            <a:r>
-              <a:rPr lang="en-US" sz="1100" b="1" dirty="0">
-                <a:solidFill>
-                  <a:srgbClr val="475569"/>
+            <a:srgbClr val="FFFFFF"/>
+          </a:solidFill>
+          <a:ln w="12700">
+            <a:solidFill>
+              <a:srgbClr val="DB2777"/>
+            </a:solidFill>
+            <a:prstDash val="solid"/>
+          </a:ln>
+        </p:spPr>
+      </p:sp>
+      <p:sp>
+        <p:nvSpPr>
+          <p:cNvPr id="43" name="Text 41"/>
+          <p:cNvSpPr/>
+          <p:nvPr/>
+        </p:nvSpPr>
+        <p:spPr>
+          <a:xfrm>
+            <a:off x="2605209" y="4169664"/>
+            <a:ext cx="603504" cy="384048"/>
+          </a:xfrm>
+          <a:prstGeom prst="rect">
+            <a:avLst/>
+          </a:prstGeom>
+          <a:noFill/>
+          <a:ln/>
+        </p:spPr>
+        <p:txBody>
+          <a:bodyPr wrap="square" lIns="0" tIns="0" rIns="0" bIns="0" rtlCol="0" anchor="ctr"/>
+          <a:lstStyle/>
+          <a:p>
+            <a:pPr algn="ctr" indent="0" marL="0">
+              <a:buNone/>
+            </a:pPr>
+            <a:r>
+              <a:rPr lang="en-US" sz="900" b="1" dirty="0">
+                <a:solidFill>
+                  <a:srgbClr val="9D174D"/>
                 </a:solidFill>
                 <a:latin typeface="Trebuchet MS" pitchFamily="34" charset="0"/>
                 <a:ea typeface="Trebuchet MS" pitchFamily="34" charset="-122"/>
                 <a:cs typeface="Trebuchet MS" pitchFamily="34" charset="-120"/>
               </a:rPr>
-              <a:t>Phonemes</a:t>
-            </a:r>
-            <a:endParaRPr lang="en-US" sz="1100" dirty="0"/>
-          </a:p>
-        </p:txBody>
-      </p:sp>
-      <p:sp>
-        <p:nvSpPr>
-          <p:cNvPr id="42" name="Shape 40"/>
-          <p:cNvSpPr/>
-          <p:nvPr/>
-        </p:nvSpPr>
-        <p:spPr>
-          <a:xfrm>
-            <a:off x="1874520" y="4096512"/>
-            <a:ext cx="6903720" cy="804672"/>
-          </a:xfrm>
-          <a:prstGeom prst="rect">
-            <a:avLst>
-              <a:gd name="adj" fmla="val 6818"/>
-            </a:avLst>
-          </a:prstGeom>
-          <a:solidFill>
-            <a:srgbClr val="FCE7F3"/>
-          </a:solidFill>
-          <a:ln w="12700">
-            <a:solidFill>
-              <a:srgbClr val="DB2777"/>
-            </a:solidFill>
-            <a:prstDash val="solid"/>
-          </a:ln>
-        </p:spPr>
-      </p:sp>
-      <p:sp>
-        <p:nvSpPr>
-          <p:cNvPr id="43" name="Shape 41"/>
-          <p:cNvSpPr/>
-          <p:nvPr/>
-        </p:nvSpPr>
-        <p:spPr>
-          <a:xfrm>
-            <a:off x="1952244" y="4169664"/>
-            <a:ext cx="543652" cy="384048"/>
+              <a:t>ar</a:t>
+            </a:r>
+            <a:endParaRPr lang="en-US" sz="900" dirty="0"/>
+          </a:p>
+        </p:txBody>
+      </p:sp>
+      <p:sp>
+        <p:nvSpPr>
+          <p:cNvPr id="44" name="Shape 42"/>
+          <p:cNvSpPr/>
+          <p:nvPr/>
+        </p:nvSpPr>
+        <p:spPr>
+          <a:xfrm>
+            <a:off x="3258589" y="4169664"/>
+            <a:ext cx="603504" cy="384048"/>
           </a:xfrm>
           <a:prstGeom prst="rect">
             <a:avLst>
@@ -11213,14 +11135,14 @@
       </p:sp>
       <p:sp>
         <p:nvSpPr>
-          <p:cNvPr id="44" name="Text 42"/>
-          <p:cNvSpPr/>
-          <p:nvPr/>
-        </p:nvSpPr>
-        <p:spPr>
-          <a:xfrm>
-            <a:off x="1952244" y="4169664"/>
-            <a:ext cx="543652" cy="384048"/>
+          <p:cNvPr id="45" name="Text 43"/>
+          <p:cNvSpPr/>
+          <p:nvPr/>
+        </p:nvSpPr>
+        <p:spPr>
+          <a:xfrm>
+            <a:off x="3258589" y="4169664"/>
+            <a:ext cx="603504" cy="384048"/>
           </a:xfrm>
           <a:prstGeom prst="rect">
             <a:avLst/>
@@ -11244,7 +11166,7 @@
                 <a:ea typeface="Trebuchet MS" pitchFamily="34" charset="-122"/>
                 <a:cs typeface="Trebuchet MS" pitchFamily="34" charset="-120"/>
               </a:rPr>
-              <a:t>p</a:t>
+              <a:t>t</a:t>
             </a:r>
             <a:endParaRPr lang="en-US" sz="900" dirty="0"/>
           </a:p>
@@ -11252,14 +11174,14 @@
       </p:sp>
       <p:sp>
         <p:nvSpPr>
-          <p:cNvPr id="45" name="Shape 43"/>
-          <p:cNvSpPr/>
-          <p:nvPr/>
-        </p:nvSpPr>
-        <p:spPr>
-          <a:xfrm>
-            <a:off x="2546188" y="4169664"/>
-            <a:ext cx="543652" cy="384048"/>
+          <p:cNvPr id="46" name="Shape 44"/>
+          <p:cNvSpPr/>
+          <p:nvPr/>
+        </p:nvSpPr>
+        <p:spPr>
+          <a:xfrm>
+            <a:off x="3911969" y="4169664"/>
+            <a:ext cx="603504" cy="384048"/>
           </a:xfrm>
           <a:prstGeom prst="rect">
             <a:avLst>
@@ -11279,14 +11201,14 @@
       </p:sp>
       <p:sp>
         <p:nvSpPr>
-          <p:cNvPr id="46" name="Text 44"/>
-          <p:cNvSpPr/>
-          <p:nvPr/>
-        </p:nvSpPr>
-        <p:spPr>
-          <a:xfrm>
-            <a:off x="2546188" y="4169664"/>
-            <a:ext cx="543652" cy="384048"/>
+          <p:cNvPr id="47" name="Text 45"/>
+          <p:cNvSpPr/>
+          <p:nvPr/>
+        </p:nvSpPr>
+        <p:spPr>
+          <a:xfrm>
+            <a:off x="3911969" y="4169664"/>
+            <a:ext cx="603504" cy="384048"/>
           </a:xfrm>
           <a:prstGeom prst="rect">
             <a:avLst/>
@@ -11310,7 +11232,7 @@
                 <a:ea typeface="Trebuchet MS" pitchFamily="34" charset="-122"/>
                 <a:cs typeface="Trebuchet MS" pitchFamily="34" charset="-120"/>
               </a:rPr>
-              <a:t>ar</a:t>
+              <a:t>i</a:t>
             </a:r>
             <a:endParaRPr lang="en-US" sz="900" dirty="0"/>
           </a:p>
@@ -11318,14 +11240,14 @@
       </p:sp>
       <p:sp>
         <p:nvSpPr>
-          <p:cNvPr id="47" name="Shape 45"/>
-          <p:cNvSpPr/>
-          <p:nvPr/>
-        </p:nvSpPr>
-        <p:spPr>
-          <a:xfrm>
-            <a:off x="3140133" y="4169664"/>
-            <a:ext cx="543652" cy="384048"/>
+          <p:cNvPr id="48" name="Shape 46"/>
+          <p:cNvSpPr/>
+          <p:nvPr/>
+        </p:nvSpPr>
+        <p:spPr>
+          <a:xfrm>
+            <a:off x="4565350" y="4169664"/>
+            <a:ext cx="603504" cy="384048"/>
           </a:xfrm>
           <a:prstGeom prst="rect">
             <a:avLst>
@@ -11345,14 +11267,14 @@
       </p:sp>
       <p:sp>
         <p:nvSpPr>
-          <p:cNvPr id="48" name="Text 46"/>
-          <p:cNvSpPr/>
-          <p:nvPr/>
-        </p:nvSpPr>
-        <p:spPr>
-          <a:xfrm>
-            <a:off x="3140133" y="4169664"/>
-            <a:ext cx="543652" cy="384048"/>
+          <p:cNvPr id="49" name="Text 47"/>
+          <p:cNvSpPr/>
+          <p:nvPr/>
+        </p:nvSpPr>
+        <p:spPr>
+          <a:xfrm>
+            <a:off x="4565350" y="4169664"/>
+            <a:ext cx="603504" cy="384048"/>
           </a:xfrm>
           <a:prstGeom prst="rect">
             <a:avLst/>
@@ -11376,7 +11298,7 @@
                 <a:ea typeface="Trebuchet MS" pitchFamily="34" charset="-122"/>
                 <a:cs typeface="Trebuchet MS" pitchFamily="34" charset="-120"/>
               </a:rPr>
-              <a:t>t</a:t>
+              <a:t>c</a:t>
             </a:r>
             <a:endParaRPr lang="en-US" sz="900" dirty="0"/>
           </a:p>
@@ -11384,14 +11306,53 @@
       </p:sp>
       <p:sp>
         <p:nvSpPr>
-          <p:cNvPr id="49" name="Shape 47"/>
-          <p:cNvSpPr/>
-          <p:nvPr/>
-        </p:nvSpPr>
-        <p:spPr>
-          <a:xfrm>
-            <a:off x="3734077" y="4169664"/>
-            <a:ext cx="543652" cy="384048"/>
+          <p:cNvPr id="50" name="Text 48"/>
+          <p:cNvSpPr/>
+          <p:nvPr/>
+        </p:nvSpPr>
+        <p:spPr>
+          <a:xfrm>
+            <a:off x="4565350" y="4572000"/>
+            <a:ext cx="603504" cy="219456"/>
+          </a:xfrm>
+          <a:prstGeom prst="rect">
+            <a:avLst/>
+          </a:prstGeom>
+          <a:noFill/>
+          <a:ln/>
+        </p:spPr>
+        <p:txBody>
+          <a:bodyPr wrap="square" lIns="0" tIns="0" rIns="0" bIns="0" rtlCol="0" anchor="t"/>
+          <a:lstStyle/>
+          <a:p>
+            <a:pPr algn="ctr" indent="0" marL="0">
+              <a:buNone/>
+            </a:pPr>
+            <a:r>
+              <a:rPr lang="en-US" sz="750" i="1" dirty="0">
+                <a:solidFill>
+                  <a:srgbClr val="94A3B8"/>
+                </a:solidFill>
+                <a:latin typeface="Calibri" pitchFamily="34" charset="0"/>
+                <a:ea typeface="Calibri" pitchFamily="34" charset="-122"/>
+                <a:cs typeface="Calibri" pitchFamily="34" charset="-120"/>
+              </a:rPr>
+              <a:t>/s/</a:t>
+            </a:r>
+            <a:endParaRPr lang="en-US" sz="750" dirty="0"/>
+          </a:p>
+        </p:txBody>
+      </p:sp>
+      <p:sp>
+        <p:nvSpPr>
+          <p:cNvPr id="51" name="Shape 49"/>
+          <p:cNvSpPr/>
+          <p:nvPr/>
+        </p:nvSpPr>
+        <p:spPr>
+          <a:xfrm>
+            <a:off x="5218730" y="4169664"/>
+            <a:ext cx="603504" cy="384048"/>
           </a:xfrm>
           <a:prstGeom prst="rect">
             <a:avLst>
@@ -11411,14 +11372,14 @@
       </p:sp>
       <p:sp>
         <p:nvSpPr>
-          <p:cNvPr id="50" name="Text 48"/>
-          <p:cNvSpPr/>
-          <p:nvPr/>
-        </p:nvSpPr>
-        <p:spPr>
-          <a:xfrm>
-            <a:off x="3734077" y="4169664"/>
-            <a:ext cx="543652" cy="384048"/>
+          <p:cNvPr id="52" name="Text 50"/>
+          <p:cNvSpPr/>
+          <p:nvPr/>
+        </p:nvSpPr>
+        <p:spPr>
+          <a:xfrm>
+            <a:off x="5218730" y="4169664"/>
+            <a:ext cx="603504" cy="384048"/>
           </a:xfrm>
           <a:prstGeom prst="rect">
             <a:avLst/>
@@ -11450,14 +11411,14 @@
       </p:sp>
       <p:sp>
         <p:nvSpPr>
-          <p:cNvPr id="51" name="Shape 49"/>
-          <p:cNvSpPr/>
-          <p:nvPr/>
-        </p:nvSpPr>
-        <p:spPr>
-          <a:xfrm>
-            <a:off x="4328021" y="4169664"/>
-            <a:ext cx="543652" cy="384048"/>
+          <p:cNvPr id="53" name="Shape 51"/>
+          <p:cNvSpPr/>
+          <p:nvPr/>
+        </p:nvSpPr>
+        <p:spPr>
+          <a:xfrm>
+            <a:off x="5872111" y="4169664"/>
+            <a:ext cx="603504" cy="384048"/>
           </a:xfrm>
           <a:prstGeom prst="rect">
             <a:avLst>
@@ -11477,14 +11438,14 @@
       </p:sp>
       <p:sp>
         <p:nvSpPr>
-          <p:cNvPr id="52" name="Text 50"/>
-          <p:cNvSpPr/>
-          <p:nvPr/>
-        </p:nvSpPr>
-        <p:spPr>
-          <a:xfrm>
-            <a:off x="4328021" y="4169664"/>
-            <a:ext cx="543652" cy="384048"/>
+          <p:cNvPr id="54" name="Text 52"/>
+          <p:cNvSpPr/>
+          <p:nvPr/>
+        </p:nvSpPr>
+        <p:spPr>
+          <a:xfrm>
+            <a:off x="5872111" y="4169664"/>
+            <a:ext cx="603504" cy="384048"/>
           </a:xfrm>
           <a:prstGeom prst="rect">
             <a:avLst/>
@@ -11508,7 +11469,7 @@
                 <a:ea typeface="Trebuchet MS" pitchFamily="34" charset="-122"/>
                 <a:cs typeface="Trebuchet MS" pitchFamily="34" charset="-120"/>
               </a:rPr>
-              <a:t>c</a:t>
+              <a:t>p</a:t>
             </a:r>
             <a:endParaRPr lang="en-US" sz="900" dirty="0"/>
           </a:p>
@@ -11516,53 +11477,14 @@
       </p:sp>
       <p:sp>
         <p:nvSpPr>
-          <p:cNvPr id="53" name="Text 51"/>
-          <p:cNvSpPr/>
-          <p:nvPr/>
-        </p:nvSpPr>
-        <p:spPr>
-          <a:xfrm>
-            <a:off x="4328021" y="4572000"/>
-            <a:ext cx="543652" cy="219456"/>
-          </a:xfrm>
-          <a:prstGeom prst="rect">
-            <a:avLst/>
-          </a:prstGeom>
-          <a:noFill/>
-          <a:ln/>
-        </p:spPr>
-        <p:txBody>
-          <a:bodyPr wrap="square" lIns="0" tIns="0" rIns="0" bIns="0" rtlCol="0" anchor="t"/>
-          <a:lstStyle/>
-          <a:p>
-            <a:pPr algn="ctr" indent="0" marL="0">
-              <a:buNone/>
-            </a:pPr>
-            <a:r>
-              <a:rPr lang="en-US" sz="750" i="1" dirty="0">
-                <a:solidFill>
-                  <a:srgbClr val="94A3B8"/>
-                </a:solidFill>
-                <a:latin typeface="Calibri" pitchFamily="34" charset="0"/>
-                <a:ea typeface="Calibri" pitchFamily="34" charset="-122"/>
-                <a:cs typeface="Calibri" pitchFamily="34" charset="-120"/>
-              </a:rPr>
-              <a:t>/s/</a:t>
-            </a:r>
-            <a:endParaRPr lang="en-US" sz="750" dirty="0"/>
-          </a:p>
-        </p:txBody>
-      </p:sp>
-      <p:sp>
-        <p:nvSpPr>
-          <p:cNvPr id="54" name="Shape 52"/>
-          <p:cNvSpPr/>
-          <p:nvPr/>
-        </p:nvSpPr>
-        <p:spPr>
-          <a:xfrm>
-            <a:off x="4921966" y="4169664"/>
-            <a:ext cx="543652" cy="384048"/>
+          <p:cNvPr id="55" name="Shape 53"/>
+          <p:cNvSpPr/>
+          <p:nvPr/>
+        </p:nvSpPr>
+        <p:spPr>
+          <a:xfrm>
+            <a:off x="6525491" y="4169664"/>
+            <a:ext cx="603504" cy="384048"/>
           </a:xfrm>
           <a:prstGeom prst="rect">
             <a:avLst>
@@ -11582,14 +11504,14 @@
       </p:sp>
       <p:sp>
         <p:nvSpPr>
-          <p:cNvPr id="55" name="Text 53"/>
-          <p:cNvSpPr/>
-          <p:nvPr/>
-        </p:nvSpPr>
-        <p:spPr>
-          <a:xfrm>
-            <a:off x="4921966" y="4169664"/>
-            <a:ext cx="543652" cy="384048"/>
+          <p:cNvPr id="56" name="Text 54"/>
+          <p:cNvSpPr/>
+          <p:nvPr/>
+        </p:nvSpPr>
+        <p:spPr>
+          <a:xfrm>
+            <a:off x="6525491" y="4169664"/>
+            <a:ext cx="603504" cy="384048"/>
           </a:xfrm>
           <a:prstGeom prst="rect">
             <a:avLst/>
@@ -11613,7 +11535,7 @@
                 <a:ea typeface="Trebuchet MS" pitchFamily="34" charset="-122"/>
                 <a:cs typeface="Trebuchet MS" pitchFamily="34" charset="-120"/>
               </a:rPr>
-              <a:t>i</a:t>
+              <a:t>a</a:t>
             </a:r>
             <a:endParaRPr lang="en-US" sz="900" dirty="0"/>
           </a:p>
@@ -11621,14 +11543,14 @@
       </p:sp>
       <p:sp>
         <p:nvSpPr>
-          <p:cNvPr id="56" name="Shape 54"/>
-          <p:cNvSpPr/>
-          <p:nvPr/>
-        </p:nvSpPr>
-        <p:spPr>
-          <a:xfrm>
-            <a:off x="5515910" y="4169664"/>
-            <a:ext cx="543652" cy="384048"/>
+          <p:cNvPr id="57" name="Shape 55"/>
+          <p:cNvSpPr/>
+          <p:nvPr/>
+        </p:nvSpPr>
+        <p:spPr>
+          <a:xfrm>
+            <a:off x="7178871" y="4169664"/>
+            <a:ext cx="603504" cy="384048"/>
           </a:xfrm>
           <a:prstGeom prst="rect">
             <a:avLst>
@@ -11648,14 +11570,14 @@
       </p:sp>
       <p:sp>
         <p:nvSpPr>
-          <p:cNvPr id="57" name="Text 55"/>
-          <p:cNvSpPr/>
-          <p:nvPr/>
-        </p:nvSpPr>
-        <p:spPr>
-          <a:xfrm>
-            <a:off x="5515910" y="4169664"/>
-            <a:ext cx="543652" cy="384048"/>
+          <p:cNvPr id="58" name="Text 56"/>
+          <p:cNvSpPr/>
+          <p:nvPr/>
+        </p:nvSpPr>
+        <p:spPr>
+          <a:xfrm>
+            <a:off x="7178871" y="4169664"/>
+            <a:ext cx="603504" cy="384048"/>
           </a:xfrm>
           <a:prstGeom prst="rect">
             <a:avLst/>
@@ -11679,7 +11601,7 @@
                 <a:ea typeface="Trebuchet MS" pitchFamily="34" charset="-122"/>
                 <a:cs typeface="Trebuchet MS" pitchFamily="34" charset="-120"/>
               </a:rPr>
-              <a:t>p</a:t>
+              <a:t>n</a:t>
             </a:r>
             <a:endParaRPr lang="en-US" sz="900" dirty="0"/>
           </a:p>
@@ -11687,14 +11609,14 @@
       </p:sp>
       <p:sp>
         <p:nvSpPr>
-          <p:cNvPr id="58" name="Shape 56"/>
-          <p:cNvSpPr/>
-          <p:nvPr/>
-        </p:nvSpPr>
-        <p:spPr>
-          <a:xfrm>
-            <a:off x="6109855" y="4169664"/>
-            <a:ext cx="543652" cy="384048"/>
+          <p:cNvPr id="59" name="Shape 57"/>
+          <p:cNvSpPr/>
+          <p:nvPr/>
+        </p:nvSpPr>
+        <p:spPr>
+          <a:xfrm>
+            <a:off x="7832252" y="4169664"/>
+            <a:ext cx="603504" cy="384048"/>
           </a:xfrm>
           <a:prstGeom prst="rect">
             <a:avLst>
@@ -11714,14 +11636,14 @@
       </p:sp>
       <p:sp>
         <p:nvSpPr>
-          <p:cNvPr id="59" name="Text 57"/>
-          <p:cNvSpPr/>
-          <p:nvPr/>
-        </p:nvSpPr>
-        <p:spPr>
-          <a:xfrm>
-            <a:off x="6109855" y="4169664"/>
-            <a:ext cx="543652" cy="384048"/>
+          <p:cNvPr id="60" name="Text 58"/>
+          <p:cNvSpPr/>
+          <p:nvPr/>
+        </p:nvSpPr>
+        <p:spPr>
+          <a:xfrm>
+            <a:off x="7832252" y="4169664"/>
+            <a:ext cx="603504" cy="384048"/>
           </a:xfrm>
           <a:prstGeom prst="rect">
             <a:avLst/>
@@ -11745,244 +11667,7 @@
                 <a:ea typeface="Trebuchet MS" pitchFamily="34" charset="-122"/>
                 <a:cs typeface="Trebuchet MS" pitchFamily="34" charset="-120"/>
               </a:rPr>
-              <a:t>a</a:t>
-            </a:r>
-            <a:endParaRPr lang="en-US" sz="900" dirty="0"/>
-          </a:p>
-        </p:txBody>
-      </p:sp>
-      <p:sp>
-        <p:nvSpPr>
-          <p:cNvPr id="60" name="Shape 58"/>
-          <p:cNvSpPr/>
-          <p:nvPr/>
-        </p:nvSpPr>
-        <p:spPr>
-          <a:xfrm>
-            <a:off x="6703799" y="4169664"/>
-            <a:ext cx="543652" cy="384048"/>
-          </a:xfrm>
-          <a:prstGeom prst="rect">
-            <a:avLst>
-              <a:gd name="adj" fmla="val 9524"/>
-            </a:avLst>
-          </a:prstGeom>
-          <a:solidFill>
-            <a:srgbClr val="FFFFFF"/>
-          </a:solidFill>
-          <a:ln w="12700">
-            <a:solidFill>
-              <a:srgbClr val="DB2777"/>
-            </a:solidFill>
-            <a:prstDash val="solid"/>
-          </a:ln>
-        </p:spPr>
-      </p:sp>
-      <p:sp>
-        <p:nvSpPr>
-          <p:cNvPr id="61" name="Text 59"/>
-          <p:cNvSpPr/>
-          <p:nvPr/>
-        </p:nvSpPr>
-        <p:spPr>
-          <a:xfrm>
-            <a:off x="6703799" y="4169664"/>
-            <a:ext cx="543652" cy="384048"/>
-          </a:xfrm>
-          <a:prstGeom prst="rect">
-            <a:avLst/>
-          </a:prstGeom>
-          <a:noFill/>
-          <a:ln/>
-        </p:spPr>
-        <p:txBody>
-          <a:bodyPr wrap="square" lIns="0" tIns="0" rIns="0" bIns="0" rtlCol="0" anchor="ctr"/>
-          <a:lstStyle/>
-          <a:p>
-            <a:pPr algn="ctr" indent="0" marL="0">
-              <a:buNone/>
-            </a:pPr>
-            <a:r>
-              <a:rPr lang="en-US" sz="900" b="1" dirty="0">
-                <a:solidFill>
-                  <a:srgbClr val="9D174D"/>
-                </a:solidFill>
-                <a:latin typeface="Trebuchet MS" pitchFamily="34" charset="0"/>
-                <a:ea typeface="Trebuchet MS" pitchFamily="34" charset="-122"/>
-                <a:cs typeface="Trebuchet MS" pitchFamily="34" charset="-120"/>
-              </a:rPr>
               <a:t>t</a:t>
-            </a:r>
-            <a:endParaRPr lang="en-US" sz="900" dirty="0"/>
-          </a:p>
-        </p:txBody>
-      </p:sp>
-      <p:sp>
-        <p:nvSpPr>
-          <p:cNvPr id="62" name="Text 60"/>
-          <p:cNvSpPr/>
-          <p:nvPr/>
-        </p:nvSpPr>
-        <p:spPr>
-          <a:xfrm>
-            <a:off x="6703799" y="4572000"/>
-            <a:ext cx="543652" cy="219456"/>
-          </a:xfrm>
-          <a:prstGeom prst="rect">
-            <a:avLst/>
-          </a:prstGeom>
-          <a:noFill/>
-          <a:ln/>
-        </p:spPr>
-        <p:txBody>
-          <a:bodyPr wrap="square" lIns="0" tIns="0" rIns="0" bIns="0" rtlCol="0" anchor="t"/>
-          <a:lstStyle/>
-          <a:p>
-            <a:pPr algn="ctr" indent="0" marL="0">
-              <a:buNone/>
-            </a:pPr>
-            <a:r>
-              <a:rPr lang="en-US" sz="750" i="1" dirty="0">
-                <a:solidFill>
-                  <a:srgbClr val="94A3B8"/>
-                </a:solidFill>
-                <a:latin typeface="Calibri" pitchFamily="34" charset="0"/>
-                <a:ea typeface="Calibri" pitchFamily="34" charset="-122"/>
-                <a:cs typeface="Calibri" pitchFamily="34" charset="-120"/>
-              </a:rPr>
-              <a:t>/sh/</a:t>
-            </a:r>
-            <a:endParaRPr lang="en-US" sz="750" dirty="0"/>
-          </a:p>
-        </p:txBody>
-      </p:sp>
-      <p:sp>
-        <p:nvSpPr>
-          <p:cNvPr id="63" name="Shape 61"/>
-          <p:cNvSpPr/>
-          <p:nvPr/>
-        </p:nvSpPr>
-        <p:spPr>
-          <a:xfrm>
-            <a:off x="7297743" y="4169664"/>
-            <a:ext cx="543652" cy="384048"/>
-          </a:xfrm>
-          <a:prstGeom prst="rect">
-            <a:avLst>
-              <a:gd name="adj" fmla="val 9524"/>
-            </a:avLst>
-          </a:prstGeom>
-          <a:solidFill>
-            <a:srgbClr val="FFFFFF"/>
-          </a:solidFill>
-          <a:ln w="12700">
-            <a:solidFill>
-              <a:srgbClr val="DB2777"/>
-            </a:solidFill>
-            <a:prstDash val="solid"/>
-          </a:ln>
-        </p:spPr>
-      </p:sp>
-      <p:sp>
-        <p:nvSpPr>
-          <p:cNvPr id="64" name="Text 62"/>
-          <p:cNvSpPr/>
-          <p:nvPr/>
-        </p:nvSpPr>
-        <p:spPr>
-          <a:xfrm>
-            <a:off x="7297743" y="4169664"/>
-            <a:ext cx="543652" cy="384048"/>
-          </a:xfrm>
-          <a:prstGeom prst="rect">
-            <a:avLst/>
-          </a:prstGeom>
-          <a:noFill/>
-          <a:ln/>
-        </p:spPr>
-        <p:txBody>
-          <a:bodyPr wrap="square" lIns="0" tIns="0" rIns="0" bIns="0" rtlCol="0" anchor="ctr"/>
-          <a:lstStyle/>
-          <a:p>
-            <a:pPr algn="ctr" indent="0" marL="0">
-              <a:buNone/>
-            </a:pPr>
-            <a:r>
-              <a:rPr lang="en-US" sz="900" b="1" dirty="0">
-                <a:solidFill>
-                  <a:srgbClr val="9D174D"/>
-                </a:solidFill>
-                <a:latin typeface="Trebuchet MS" pitchFamily="34" charset="0"/>
-                <a:ea typeface="Trebuchet MS" pitchFamily="34" charset="-122"/>
-                <a:cs typeface="Trebuchet MS" pitchFamily="34" charset="-120"/>
-              </a:rPr>
-              <a:t>io</a:t>
-            </a:r>
-            <a:endParaRPr lang="en-US" sz="900" dirty="0"/>
-          </a:p>
-        </p:txBody>
-      </p:sp>
-      <p:sp>
-        <p:nvSpPr>
-          <p:cNvPr id="65" name="Shape 63"/>
-          <p:cNvSpPr/>
-          <p:nvPr/>
-        </p:nvSpPr>
-        <p:spPr>
-          <a:xfrm>
-            <a:off x="7891688" y="4169664"/>
-            <a:ext cx="543652" cy="384048"/>
-          </a:xfrm>
-          <a:prstGeom prst="rect">
-            <a:avLst>
-              <a:gd name="adj" fmla="val 9524"/>
-            </a:avLst>
-          </a:prstGeom>
-          <a:solidFill>
-            <a:srgbClr val="FFFFFF"/>
-          </a:solidFill>
-          <a:ln w="12700">
-            <a:solidFill>
-              <a:srgbClr val="DB2777"/>
-            </a:solidFill>
-            <a:prstDash val="solid"/>
-          </a:ln>
-        </p:spPr>
-      </p:sp>
-      <p:sp>
-        <p:nvSpPr>
-          <p:cNvPr id="66" name="Text 64"/>
-          <p:cNvSpPr/>
-          <p:nvPr/>
-        </p:nvSpPr>
-        <p:spPr>
-          <a:xfrm>
-            <a:off x="7891688" y="4169664"/>
-            <a:ext cx="543652" cy="384048"/>
-          </a:xfrm>
-          <a:prstGeom prst="rect">
-            <a:avLst/>
-          </a:prstGeom>
-          <a:noFill/>
-          <a:ln/>
-        </p:spPr>
-        <p:txBody>
-          <a:bodyPr wrap="square" lIns="0" tIns="0" rIns="0" bIns="0" rtlCol="0" anchor="ctr"/>
-          <a:lstStyle/>
-          <a:p>
-            <a:pPr algn="ctr" indent="0" marL="0">
-              <a:buNone/>
-            </a:pPr>
-            <a:r>
-              <a:rPr lang="en-US" sz="900" b="1" dirty="0">
-                <a:solidFill>
-                  <a:srgbClr val="9D174D"/>
-                </a:solidFill>
-                <a:latin typeface="Trebuchet MS" pitchFamily="34" charset="0"/>
-                <a:ea typeface="Trebuchet MS" pitchFamily="34" charset="-122"/>
-                <a:cs typeface="Trebuchet MS" pitchFamily="34" charset="-120"/>
-              </a:rPr>
-              <a:t>n</a:t>
             </a:r>
             <a:endParaRPr lang="en-US" sz="900" dirty="0"/>
           </a:p>
@@ -12413,7 +12098,7 @@
                 <a:ea typeface="Trebuchet MS" pitchFamily="34" charset="-122"/>
                 <a:cs typeface="Trebuchet MS" pitchFamily="34" charset="-120"/>
               </a:rPr>
-              <a:t>participant</a:t>
+              <a:t>participating</a:t>
             </a:r>
             <a:endParaRPr lang="en-US" sz="2800" dirty="0"/>
           </a:p>
@@ -13240,7 +12925,7 @@
                 <a:ea typeface="Trebuchet MS" pitchFamily="34" charset="-122"/>
                 <a:cs typeface="Trebuchet MS" pitchFamily="34" charset="-120"/>
               </a:rPr>
-              <a:t>participant</a:t>
+              <a:t>participating</a:t>
             </a:r>
             <a:endParaRPr lang="en-US" sz="2800" dirty="0"/>
           </a:p>
@@ -13530,7 +13215,7 @@
                 <a:ea typeface="Trebuchet MS" pitchFamily="34" charset="-122"/>
                 <a:cs typeface="Trebuchet MS" pitchFamily="34" charset="-120"/>
               </a:rPr>
-              <a:t>ant</a:t>
+              <a:t>ing</a:t>
             </a:r>
             <a:endParaRPr lang="en-US" sz="1300" dirty="0"/>
           </a:p>
@@ -13569,7 +13254,7 @@
                 <a:ea typeface="Calibri" pitchFamily="34" charset="-122"/>
                 <a:cs typeface="Calibri" pitchFamily="34" charset="-120"/>
               </a:rPr>
-              <a:t>a person who does something</a:t>
+              <a:t>in the middle of doing</a:t>
             </a:r>
             <a:endParaRPr lang="en-US" sz="850" dirty="0"/>
           </a:p>
@@ -14264,7 +13949,7 @@
                 <a:ea typeface="Trebuchet MS" pitchFamily="34" charset="-122"/>
                 <a:cs typeface="Trebuchet MS" pitchFamily="34" charset="-120"/>
               </a:rPr>
-              <a:t>participant</a:t>
+              <a:t>participating</a:t>
             </a:r>
             <a:endParaRPr lang="en-US" sz="2800" dirty="0"/>
           </a:p>
@@ -14554,7 +14239,7 @@
                 <a:ea typeface="Trebuchet MS" pitchFamily="34" charset="-122"/>
                 <a:cs typeface="Trebuchet MS" pitchFamily="34" charset="-120"/>
               </a:rPr>
-              <a:t>ant</a:t>
+              <a:t>ing</a:t>
             </a:r>
             <a:endParaRPr lang="en-US" sz="1300" dirty="0"/>
           </a:p>
@@ -14593,7 +14278,7 @@
                 <a:ea typeface="Calibri" pitchFamily="34" charset="-122"/>
                 <a:cs typeface="Calibri" pitchFamily="34" charset="-120"/>
               </a:rPr>
-              <a:t>a person who does something</a:t>
+              <a:t>in the middle of doing</a:t>
             </a:r>
             <a:endParaRPr lang="en-US" sz="850" dirty="0"/>
           </a:p>
@@ -14700,8 +14385,8 @@
         </p:nvSpPr>
         <p:spPr>
           <a:xfrm>
-            <a:off x="1975104" y="3364992"/>
-            <a:ext cx="1554480" cy="475488"/>
+            <a:off x="1978152" y="3364992"/>
+            <a:ext cx="1225296" cy="475488"/>
           </a:xfrm>
           <a:prstGeom prst="rect">
             <a:avLst>
@@ -14727,8 +14412,8 @@
         </p:nvSpPr>
         <p:spPr>
           <a:xfrm>
-            <a:off x="1975104" y="3364992"/>
-            <a:ext cx="1554480" cy="475488"/>
+            <a:off x="1978152" y="3364992"/>
+            <a:ext cx="1225296" cy="475488"/>
           </a:xfrm>
           <a:prstGeom prst="rect">
             <a:avLst/>
@@ -14766,8 +14451,8 @@
         </p:nvSpPr>
         <p:spPr>
           <a:xfrm>
-            <a:off x="3529584" y="3364992"/>
-            <a:ext cx="73152" cy="475488"/>
+            <a:off x="3203448" y="3364992"/>
+            <a:ext cx="76200" cy="475488"/>
           </a:xfrm>
           <a:prstGeom prst="rect">
             <a:avLst/>
@@ -14805,8 +14490,8 @@
         </p:nvSpPr>
         <p:spPr>
           <a:xfrm>
-            <a:off x="3602736" y="3364992"/>
-            <a:ext cx="1554480" cy="475488"/>
+            <a:off x="3279648" y="3364992"/>
+            <a:ext cx="1225296" cy="475488"/>
           </a:xfrm>
           <a:prstGeom prst="rect">
             <a:avLst>
@@ -14832,8 +14517,8 @@
         </p:nvSpPr>
         <p:spPr>
           <a:xfrm>
-            <a:off x="3602736" y="3364992"/>
-            <a:ext cx="1554480" cy="475488"/>
+            <a:off x="3279648" y="3364992"/>
+            <a:ext cx="1225296" cy="475488"/>
           </a:xfrm>
           <a:prstGeom prst="rect">
             <a:avLst/>
@@ -14871,8 +14556,8 @@
         </p:nvSpPr>
         <p:spPr>
           <a:xfrm>
-            <a:off x="5157216" y="3364992"/>
-            <a:ext cx="73152" cy="475488"/>
+            <a:off x="4504944" y="3364992"/>
+            <a:ext cx="76200" cy="475488"/>
           </a:xfrm>
           <a:prstGeom prst="rect">
             <a:avLst/>
@@ -14910,8 +14595,8 @@
         </p:nvSpPr>
         <p:spPr>
           <a:xfrm>
-            <a:off x="5230368" y="3364992"/>
-            <a:ext cx="1554480" cy="475488"/>
+            <a:off x="4581144" y="3364992"/>
+            <a:ext cx="1225296" cy="475488"/>
           </a:xfrm>
           <a:prstGeom prst="rect">
             <a:avLst>
@@ -14937,8 +14622,8 @@
         </p:nvSpPr>
         <p:spPr>
           <a:xfrm>
-            <a:off x="5230368" y="3364992"/>
-            <a:ext cx="1554480" cy="475488"/>
+            <a:off x="4581144" y="3364992"/>
+            <a:ext cx="1225296" cy="475488"/>
           </a:xfrm>
           <a:prstGeom prst="rect">
             <a:avLst/>
@@ -14976,8 +14661,8 @@
         </p:nvSpPr>
         <p:spPr>
           <a:xfrm>
-            <a:off x="6784848" y="3364992"/>
-            <a:ext cx="73152" cy="475488"/>
+            <a:off x="5806440" y="3364992"/>
+            <a:ext cx="76200" cy="475488"/>
           </a:xfrm>
           <a:prstGeom prst="rect">
             <a:avLst/>
@@ -15015,8 +14700,8 @@
         </p:nvSpPr>
         <p:spPr>
           <a:xfrm>
-            <a:off x="6858000" y="3364992"/>
-            <a:ext cx="1554480" cy="475488"/>
+            <a:off x="5882640" y="3364992"/>
+            <a:ext cx="1225296" cy="475488"/>
           </a:xfrm>
           <a:prstGeom prst="rect">
             <a:avLst>
@@ -15042,8 +14727,8 @@
         </p:nvSpPr>
         <p:spPr>
           <a:xfrm>
-            <a:off x="6858000" y="3364992"/>
-            <a:ext cx="1554480" cy="475488"/>
+            <a:off x="5882640" y="3364992"/>
+            <a:ext cx="1225296" cy="475488"/>
           </a:xfrm>
           <a:prstGeom prst="rect">
             <a:avLst/>
@@ -15067,7 +14752,7 @@
                 <a:ea typeface="Trebuchet MS" pitchFamily="34" charset="-122"/>
                 <a:cs typeface="Trebuchet MS" pitchFamily="34" charset="-120"/>
               </a:rPr>
-              <a:t>pant</a:t>
+              <a:t>pa</a:t>
             </a:r>
             <a:endParaRPr lang="en-US" sz="1400" dirty="0"/>
           </a:p>
@@ -15075,7 +14760,112 @@
       </p:sp>
       <p:sp>
         <p:nvSpPr>
-          <p:cNvPr id="37" name="Shape 35"/>
+          <p:cNvPr id="37" name="Text 35"/>
+          <p:cNvSpPr/>
+          <p:nvPr/>
+        </p:nvSpPr>
+        <p:spPr>
+          <a:xfrm>
+            <a:off x="7107936" y="3364992"/>
+            <a:ext cx="76200" cy="475488"/>
+          </a:xfrm>
+          <a:prstGeom prst="rect">
+            <a:avLst/>
+          </a:prstGeom>
+          <a:noFill/>
+          <a:ln/>
+        </p:spPr>
+        <p:txBody>
+          <a:bodyPr wrap="square" lIns="0" tIns="0" rIns="0" bIns="0" rtlCol="0" anchor="ctr"/>
+          <a:lstStyle/>
+          <a:p>
+            <a:pPr algn="ctr" indent="0" marL="0">
+              <a:buNone/>
+            </a:pPr>
+            <a:r>
+              <a:rPr lang="en-US" sz="1600" b="1" dirty="0">
+                <a:solidFill>
+                  <a:srgbClr val="0D9488"/>
+                </a:solidFill>
+                <a:latin typeface="Trebuchet MS" pitchFamily="34" charset="0"/>
+                <a:ea typeface="Trebuchet MS" pitchFamily="34" charset="-122"/>
+                <a:cs typeface="Trebuchet MS" pitchFamily="34" charset="-120"/>
+              </a:rPr>
+              <a:t>·</a:t>
+            </a:r>
+            <a:endParaRPr lang="en-US" sz="1600" dirty="0"/>
+          </a:p>
+        </p:txBody>
+      </p:sp>
+      <p:sp>
+        <p:nvSpPr>
+          <p:cNvPr id="38" name="Shape 36"/>
+          <p:cNvSpPr/>
+          <p:nvPr/>
+        </p:nvSpPr>
+        <p:spPr>
+          <a:xfrm>
+            <a:off x="7184136" y="3364992"/>
+            <a:ext cx="1225296" cy="475488"/>
+          </a:xfrm>
+          <a:prstGeom prst="rect">
+            <a:avLst>
+              <a:gd name="adj" fmla="val 9615"/>
+            </a:avLst>
+          </a:prstGeom>
+          <a:solidFill>
+            <a:srgbClr val="FFFFFF"/>
+          </a:solidFill>
+          <a:ln w="12700">
+            <a:solidFill>
+              <a:srgbClr val="0D9488"/>
+            </a:solidFill>
+            <a:prstDash val="solid"/>
+          </a:ln>
+        </p:spPr>
+      </p:sp>
+      <p:sp>
+        <p:nvSpPr>
+          <p:cNvPr id="39" name="Text 37"/>
+          <p:cNvSpPr/>
+          <p:nvPr/>
+        </p:nvSpPr>
+        <p:spPr>
+          <a:xfrm>
+            <a:off x="7184136" y="3364992"/>
+            <a:ext cx="1225296" cy="475488"/>
+          </a:xfrm>
+          <a:prstGeom prst="rect">
+            <a:avLst/>
+          </a:prstGeom>
+          <a:noFill/>
+          <a:ln/>
+        </p:spPr>
+        <p:txBody>
+          <a:bodyPr wrap="square" lIns="0" tIns="0" rIns="0" bIns="0" rtlCol="0" anchor="ctr"/>
+          <a:lstStyle/>
+          <a:p>
+            <a:pPr algn="ctr" indent="0" marL="0">
+              <a:buNone/>
+            </a:pPr>
+            <a:r>
+              <a:rPr lang="en-US" sz="1400" b="1" dirty="0">
+                <a:solidFill>
+                  <a:srgbClr val="0D9488"/>
+                </a:solidFill>
+                <a:latin typeface="Trebuchet MS" pitchFamily="34" charset="0"/>
+                <a:ea typeface="Trebuchet MS" pitchFamily="34" charset="-122"/>
+                <a:cs typeface="Trebuchet MS" pitchFamily="34" charset="-120"/>
+              </a:rPr>
+              <a:t>ting</a:t>
+            </a:r>
+            <a:endParaRPr lang="en-US" sz="1400" dirty="0"/>
+          </a:p>
+        </p:txBody>
+      </p:sp>
+      <p:sp>
+        <p:nvSpPr>
+          <p:cNvPr id="40" name="Shape 38"/>
           <p:cNvSpPr/>
           <p:nvPr/>
         </p:nvSpPr>
@@ -15102,7 +14892,7 @@
       </p:sp>
       <p:sp>
         <p:nvSpPr>
-          <p:cNvPr id="38" name="Text 36"/>
+          <p:cNvPr id="41" name="Text 39"/>
           <p:cNvSpPr/>
           <p:nvPr/>
         </p:nvSpPr>
@@ -15141,7 +14931,7 @@
       </p:sp>
       <p:sp>
         <p:nvSpPr>
-          <p:cNvPr id="39" name="Shape 37"/>
+          <p:cNvPr id="42" name="Shape 40"/>
           <p:cNvSpPr/>
           <p:nvPr/>
         </p:nvSpPr>
@@ -15168,7 +14958,7 @@
       </p:sp>
       <p:sp>
         <p:nvSpPr>
-          <p:cNvPr id="40" name="Text 38"/>
+          <p:cNvPr id="43" name="Text 41"/>
           <p:cNvSpPr/>
           <p:nvPr/>
         </p:nvSpPr>
@@ -15895,7 +15685,7 @@
                 <a:ea typeface="Trebuchet MS" pitchFamily="34" charset="-122"/>
                 <a:cs typeface="Trebuchet MS" pitchFamily="34" charset="-120"/>
               </a:rPr>
-              <a:t>participant</a:t>
+              <a:t>participating</a:t>
             </a:r>
             <a:endParaRPr lang="en-US" sz="2800" dirty="0"/>
           </a:p>
@@ -16185,7 +15975,7 @@
                 <a:ea typeface="Trebuchet MS" pitchFamily="34" charset="-122"/>
                 <a:cs typeface="Trebuchet MS" pitchFamily="34" charset="-120"/>
               </a:rPr>
-              <a:t>ant</a:t>
+              <a:t>ing</a:t>
             </a:r>
             <a:endParaRPr lang="en-US" sz="1300" dirty="0"/>
           </a:p>
@@ -16224,7 +16014,7 @@
                 <a:ea typeface="Calibri" pitchFamily="34" charset="-122"/>
                 <a:cs typeface="Calibri" pitchFamily="34" charset="-120"/>
               </a:rPr>
-              <a:t>a person who does something</a:t>
+              <a:t>in the middle of doing</a:t>
             </a:r>
             <a:endParaRPr lang="en-US" sz="850" dirty="0"/>
           </a:p>
@@ -16331,8 +16121,8 @@
         </p:nvSpPr>
         <p:spPr>
           <a:xfrm>
-            <a:off x="1975104" y="3364992"/>
-            <a:ext cx="1554480" cy="475488"/>
+            <a:off x="1978152" y="3364992"/>
+            <a:ext cx="1225296" cy="475488"/>
           </a:xfrm>
           <a:prstGeom prst="rect">
             <a:avLst>
@@ -16358,8 +16148,8 @@
         </p:nvSpPr>
         <p:spPr>
           <a:xfrm>
-            <a:off x="1975104" y="3364992"/>
-            <a:ext cx="1554480" cy="475488"/>
+            <a:off x="1978152" y="3364992"/>
+            <a:ext cx="1225296" cy="475488"/>
           </a:xfrm>
           <a:prstGeom prst="rect">
             <a:avLst/>
@@ -16397,8 +16187,8 @@
         </p:nvSpPr>
         <p:spPr>
           <a:xfrm>
-            <a:off x="3529584" y="3364992"/>
-            <a:ext cx="73152" cy="475488"/>
+            <a:off x="3203448" y="3364992"/>
+            <a:ext cx="76200" cy="475488"/>
           </a:xfrm>
           <a:prstGeom prst="rect">
             <a:avLst/>
@@ -16436,8 +16226,8 @@
         </p:nvSpPr>
         <p:spPr>
           <a:xfrm>
-            <a:off x="3602736" y="3364992"/>
-            <a:ext cx="1554480" cy="475488"/>
+            <a:off x="3279648" y="3364992"/>
+            <a:ext cx="1225296" cy="475488"/>
           </a:xfrm>
           <a:prstGeom prst="rect">
             <a:avLst>
@@ -16463,8 +16253,8 @@
         </p:nvSpPr>
         <p:spPr>
           <a:xfrm>
-            <a:off x="3602736" y="3364992"/>
-            <a:ext cx="1554480" cy="475488"/>
+            <a:off x="3279648" y="3364992"/>
+            <a:ext cx="1225296" cy="475488"/>
           </a:xfrm>
           <a:prstGeom prst="rect">
             <a:avLst/>
@@ -16502,8 +16292,8 @@
         </p:nvSpPr>
         <p:spPr>
           <a:xfrm>
-            <a:off x="5157216" y="3364992"/>
-            <a:ext cx="73152" cy="475488"/>
+            <a:off x="4504944" y="3364992"/>
+            <a:ext cx="76200" cy="475488"/>
           </a:xfrm>
           <a:prstGeom prst="rect">
             <a:avLst/>
@@ -16541,8 +16331,8 @@
         </p:nvSpPr>
         <p:spPr>
           <a:xfrm>
-            <a:off x="5230368" y="3364992"/>
-            <a:ext cx="1554480" cy="475488"/>
+            <a:off x="4581144" y="3364992"/>
+            <a:ext cx="1225296" cy="475488"/>
           </a:xfrm>
           <a:prstGeom prst="rect">
             <a:avLst>
@@ -16568,8 +16358,8 @@
         </p:nvSpPr>
         <p:spPr>
           <a:xfrm>
-            <a:off x="5230368" y="3364992"/>
-            <a:ext cx="1554480" cy="475488"/>
+            <a:off x="4581144" y="3364992"/>
+            <a:ext cx="1225296" cy="475488"/>
           </a:xfrm>
           <a:prstGeom prst="rect">
             <a:avLst/>
@@ -16607,8 +16397,8 @@
         </p:nvSpPr>
         <p:spPr>
           <a:xfrm>
-            <a:off x="6784848" y="3364992"/>
-            <a:ext cx="73152" cy="475488"/>
+            <a:off x="5806440" y="3364992"/>
+            <a:ext cx="76200" cy="475488"/>
           </a:xfrm>
           <a:prstGeom prst="rect">
             <a:avLst/>
@@ -16646,8 +16436,8 @@
         </p:nvSpPr>
         <p:spPr>
           <a:xfrm>
-            <a:off x="6858000" y="3364992"/>
-            <a:ext cx="1554480" cy="475488"/>
+            <a:off x="5882640" y="3364992"/>
+            <a:ext cx="1225296" cy="475488"/>
           </a:xfrm>
           <a:prstGeom prst="rect">
             <a:avLst>
@@ -16673,8 +16463,8 @@
         </p:nvSpPr>
         <p:spPr>
           <a:xfrm>
-            <a:off x="6858000" y="3364992"/>
-            <a:ext cx="1554480" cy="475488"/>
+            <a:off x="5882640" y="3364992"/>
+            <a:ext cx="1225296" cy="475488"/>
           </a:xfrm>
           <a:prstGeom prst="rect">
             <a:avLst/>
@@ -16698,7 +16488,7 @@
                 <a:ea typeface="Trebuchet MS" pitchFamily="34" charset="-122"/>
                 <a:cs typeface="Trebuchet MS" pitchFamily="34" charset="-120"/>
               </a:rPr>
-              <a:t>pant</a:t>
+              <a:t>pa</a:t>
             </a:r>
             <a:endParaRPr lang="en-US" sz="1400" dirty="0"/>
           </a:p>
@@ -16706,7 +16496,112 @@
       </p:sp>
       <p:sp>
         <p:nvSpPr>
-          <p:cNvPr id="37" name="Shape 35"/>
+          <p:cNvPr id="37" name="Text 35"/>
+          <p:cNvSpPr/>
+          <p:nvPr/>
+        </p:nvSpPr>
+        <p:spPr>
+          <a:xfrm>
+            <a:off x="7107936" y="3364992"/>
+            <a:ext cx="76200" cy="475488"/>
+          </a:xfrm>
+          <a:prstGeom prst="rect">
+            <a:avLst/>
+          </a:prstGeom>
+          <a:noFill/>
+          <a:ln/>
+        </p:spPr>
+        <p:txBody>
+          <a:bodyPr wrap="square" lIns="0" tIns="0" rIns="0" bIns="0" rtlCol="0" anchor="ctr"/>
+          <a:lstStyle/>
+          <a:p>
+            <a:pPr algn="ctr" indent="0" marL="0">
+              <a:buNone/>
+            </a:pPr>
+            <a:r>
+              <a:rPr lang="en-US" sz="1600" b="1" dirty="0">
+                <a:solidFill>
+                  <a:srgbClr val="0D9488"/>
+                </a:solidFill>
+                <a:latin typeface="Trebuchet MS" pitchFamily="34" charset="0"/>
+                <a:ea typeface="Trebuchet MS" pitchFamily="34" charset="-122"/>
+                <a:cs typeface="Trebuchet MS" pitchFamily="34" charset="-120"/>
+              </a:rPr>
+              <a:t>·</a:t>
+            </a:r>
+            <a:endParaRPr lang="en-US" sz="1600" dirty="0"/>
+          </a:p>
+        </p:txBody>
+      </p:sp>
+      <p:sp>
+        <p:nvSpPr>
+          <p:cNvPr id="38" name="Shape 36"/>
+          <p:cNvSpPr/>
+          <p:nvPr/>
+        </p:nvSpPr>
+        <p:spPr>
+          <a:xfrm>
+            <a:off x="7184136" y="3364992"/>
+            <a:ext cx="1225296" cy="475488"/>
+          </a:xfrm>
+          <a:prstGeom prst="rect">
+            <a:avLst>
+              <a:gd name="adj" fmla="val 9615"/>
+            </a:avLst>
+          </a:prstGeom>
+          <a:solidFill>
+            <a:srgbClr val="FFFFFF"/>
+          </a:solidFill>
+          <a:ln w="12700">
+            <a:solidFill>
+              <a:srgbClr val="0D9488"/>
+            </a:solidFill>
+            <a:prstDash val="solid"/>
+          </a:ln>
+        </p:spPr>
+      </p:sp>
+      <p:sp>
+        <p:nvSpPr>
+          <p:cNvPr id="39" name="Text 37"/>
+          <p:cNvSpPr/>
+          <p:nvPr/>
+        </p:nvSpPr>
+        <p:spPr>
+          <a:xfrm>
+            <a:off x="7184136" y="3364992"/>
+            <a:ext cx="1225296" cy="475488"/>
+          </a:xfrm>
+          <a:prstGeom prst="rect">
+            <a:avLst/>
+          </a:prstGeom>
+          <a:noFill/>
+          <a:ln/>
+        </p:spPr>
+        <p:txBody>
+          <a:bodyPr wrap="square" lIns="0" tIns="0" rIns="0" bIns="0" rtlCol="0" anchor="ctr"/>
+          <a:lstStyle/>
+          <a:p>
+            <a:pPr algn="ctr" indent="0" marL="0">
+              <a:buNone/>
+            </a:pPr>
+            <a:r>
+              <a:rPr lang="en-US" sz="1400" b="1" dirty="0">
+                <a:solidFill>
+                  <a:srgbClr val="0D9488"/>
+                </a:solidFill>
+                <a:latin typeface="Trebuchet MS" pitchFamily="34" charset="0"/>
+                <a:ea typeface="Trebuchet MS" pitchFamily="34" charset="-122"/>
+                <a:cs typeface="Trebuchet MS" pitchFamily="34" charset="-120"/>
+              </a:rPr>
+              <a:t>ting</a:t>
+            </a:r>
+            <a:endParaRPr lang="en-US" sz="1400" dirty="0"/>
+          </a:p>
+        </p:txBody>
+      </p:sp>
+      <p:sp>
+        <p:nvSpPr>
+          <p:cNvPr id="40" name="Shape 38"/>
           <p:cNvSpPr/>
           <p:nvPr/>
         </p:nvSpPr>
@@ -16733,7 +16628,7 @@
       </p:sp>
       <p:sp>
         <p:nvSpPr>
-          <p:cNvPr id="38" name="Text 36"/>
+          <p:cNvPr id="41" name="Text 39"/>
           <p:cNvSpPr/>
           <p:nvPr/>
         </p:nvSpPr>
@@ -16772,7 +16667,7 @@
       </p:sp>
       <p:sp>
         <p:nvSpPr>
-          <p:cNvPr id="39" name="Shape 37"/>
+          <p:cNvPr id="42" name="Shape 40"/>
           <p:cNvSpPr/>
           <p:nvPr/>
         </p:nvSpPr>
@@ -16799,7 +16694,7 @@
       </p:sp>
       <p:sp>
         <p:nvSpPr>
-          <p:cNvPr id="40" name="Shape 38"/>
+          <p:cNvPr id="43" name="Shape 41"/>
           <p:cNvSpPr/>
           <p:nvPr/>
         </p:nvSpPr>
@@ -16826,7 +16721,7 @@
       </p:sp>
       <p:sp>
         <p:nvSpPr>
-          <p:cNvPr id="41" name="Text 39"/>
+          <p:cNvPr id="44" name="Text 42"/>
           <p:cNvSpPr/>
           <p:nvPr/>
         </p:nvSpPr>
@@ -16865,7 +16760,7 @@
       </p:sp>
       <p:sp>
         <p:nvSpPr>
-          <p:cNvPr id="42" name="Shape 40"/>
+          <p:cNvPr id="45" name="Shape 43"/>
           <p:cNvSpPr/>
           <p:nvPr/>
         </p:nvSpPr>
@@ -16892,7 +16787,7 @@
       </p:sp>
       <p:sp>
         <p:nvSpPr>
-          <p:cNvPr id="43" name="Text 41"/>
+          <p:cNvPr id="46" name="Text 44"/>
           <p:cNvSpPr/>
           <p:nvPr/>
         </p:nvSpPr>
@@ -16931,7 +16826,7 @@
       </p:sp>
       <p:sp>
         <p:nvSpPr>
-          <p:cNvPr id="44" name="Shape 42"/>
+          <p:cNvPr id="47" name="Shape 45"/>
           <p:cNvSpPr/>
           <p:nvPr/>
         </p:nvSpPr>
@@ -16958,7 +16853,7 @@
       </p:sp>
       <p:sp>
         <p:nvSpPr>
-          <p:cNvPr id="45" name="Text 43"/>
+          <p:cNvPr id="48" name="Text 46"/>
           <p:cNvSpPr/>
           <p:nvPr/>
         </p:nvSpPr>
@@ -16997,7 +16892,7 @@
       </p:sp>
       <p:sp>
         <p:nvSpPr>
-          <p:cNvPr id="46" name="Shape 44"/>
+          <p:cNvPr id="49" name="Shape 47"/>
           <p:cNvSpPr/>
           <p:nvPr/>
         </p:nvSpPr>
@@ -17024,7 +16919,7 @@
       </p:sp>
       <p:sp>
         <p:nvSpPr>
-          <p:cNvPr id="47" name="Text 45"/>
+          <p:cNvPr id="50" name="Text 48"/>
           <p:cNvSpPr/>
           <p:nvPr/>
         </p:nvSpPr>
@@ -17063,7 +16958,7 @@
       </p:sp>
       <p:sp>
         <p:nvSpPr>
-          <p:cNvPr id="48" name="Shape 46"/>
+          <p:cNvPr id="51" name="Shape 49"/>
           <p:cNvSpPr/>
           <p:nvPr/>
         </p:nvSpPr>
@@ -17090,7 +16985,7 @@
       </p:sp>
       <p:sp>
         <p:nvSpPr>
-          <p:cNvPr id="49" name="Text 47"/>
+          <p:cNvPr id="52" name="Text 50"/>
           <p:cNvSpPr/>
           <p:nvPr/>
         </p:nvSpPr>
@@ -17129,7 +17024,7 @@
       </p:sp>
       <p:sp>
         <p:nvSpPr>
-          <p:cNvPr id="50" name="Text 48"/>
+          <p:cNvPr id="53" name="Text 51"/>
           <p:cNvSpPr/>
           <p:nvPr/>
         </p:nvSpPr>
@@ -17168,7 +17063,7 @@
       </p:sp>
       <p:sp>
         <p:nvSpPr>
-          <p:cNvPr id="51" name="Shape 49"/>
+          <p:cNvPr id="54" name="Shape 52"/>
           <p:cNvSpPr/>
           <p:nvPr/>
         </p:nvSpPr>
@@ -17195,7 +17090,7 @@
       </p:sp>
       <p:sp>
         <p:nvSpPr>
-          <p:cNvPr id="52" name="Text 50"/>
+          <p:cNvPr id="55" name="Text 53"/>
           <p:cNvSpPr/>
           <p:nvPr/>
         </p:nvSpPr>
@@ -17234,7 +17129,7 @@
       </p:sp>
       <p:sp>
         <p:nvSpPr>
-          <p:cNvPr id="53" name="Shape 51"/>
+          <p:cNvPr id="56" name="Shape 54"/>
           <p:cNvSpPr/>
           <p:nvPr/>
         </p:nvSpPr>
@@ -17261,7 +17156,7 @@
       </p:sp>
       <p:sp>
         <p:nvSpPr>
-          <p:cNvPr id="54" name="Text 52"/>
+          <p:cNvPr id="57" name="Text 55"/>
           <p:cNvSpPr/>
           <p:nvPr/>
         </p:nvSpPr>
@@ -17300,7 +17195,7 @@
       </p:sp>
       <p:sp>
         <p:nvSpPr>
-          <p:cNvPr id="55" name="Shape 53"/>
+          <p:cNvPr id="58" name="Shape 56"/>
           <p:cNvSpPr/>
           <p:nvPr/>
         </p:nvSpPr>
@@ -17327,7 +17222,7 @@
       </p:sp>
       <p:sp>
         <p:nvSpPr>
-          <p:cNvPr id="56" name="Text 54"/>
+          <p:cNvPr id="59" name="Text 57"/>
           <p:cNvSpPr/>
           <p:nvPr/>
         </p:nvSpPr>
@@ -17366,7 +17261,7 @@
       </p:sp>
       <p:sp>
         <p:nvSpPr>
-          <p:cNvPr id="57" name="Shape 55"/>
+          <p:cNvPr id="60" name="Shape 58"/>
           <p:cNvSpPr/>
           <p:nvPr/>
         </p:nvSpPr>
@@ -17393,7 +17288,7 @@
       </p:sp>
       <p:sp>
         <p:nvSpPr>
-          <p:cNvPr id="58" name="Text 56"/>
+          <p:cNvPr id="61" name="Text 59"/>
           <p:cNvSpPr/>
           <p:nvPr/>
         </p:nvSpPr>
@@ -17424,7 +17319,7 @@
                 <a:ea typeface="Trebuchet MS" pitchFamily="34" charset="-122"/>
                 <a:cs typeface="Trebuchet MS" pitchFamily="34" charset="-120"/>
               </a:rPr>
-              <a:t>n</a:t>
+              <a:t>t</a:t>
             </a:r>
             <a:endParaRPr lang="en-US" sz="900" dirty="0"/>
           </a:p>
@@ -17432,7 +17327,7 @@
       </p:sp>
       <p:sp>
         <p:nvSpPr>
-          <p:cNvPr id="59" name="Shape 57"/>
+          <p:cNvPr id="62" name="Shape 60"/>
           <p:cNvSpPr/>
           <p:nvPr/>
         </p:nvSpPr>
@@ -17459,7 +17354,7 @@
       </p:sp>
       <p:sp>
         <p:nvSpPr>
-          <p:cNvPr id="60" name="Text 58"/>
+          <p:cNvPr id="63" name="Text 61"/>
           <p:cNvSpPr/>
           <p:nvPr/>
         </p:nvSpPr>
@@ -17490,7 +17385,7 @@
                 <a:ea typeface="Trebuchet MS" pitchFamily="34" charset="-122"/>
                 <a:cs typeface="Trebuchet MS" pitchFamily="34" charset="-120"/>
               </a:rPr>
-              <a:t>t</a:t>
+              <a:t>ing</a:t>
             </a:r>
             <a:endParaRPr lang="en-US" sz="900" dirty="0"/>
           </a:p>
@@ -18816,7 +18711,7 @@
                 <a:ea typeface="Calibri" pitchFamily="34" charset="-122"/>
                 <a:cs typeface="Calibri" pitchFamily="34" charset="-120"/>
               </a:rPr>
-              <a:t>All </a:t>
+              <a:t>Active </a:t>
             </a:r>
             <a:pPr algn="l" indent="0" marL="0">
               <a:buNone/>
@@ -18833,7 +18728,7 @@
                 <a:ea typeface="Calibri" pitchFamily="34" charset="-122"/>
                 <a:cs typeface="Calibri" pitchFamily="34" charset="-120"/>
               </a:rPr>
-              <a:t>participants</a:t>
+              <a:t>participation</a:t>
             </a:r>
             <a:pPr algn="l" indent="0" marL="0">
               <a:buNone/>
@@ -18847,7 +18742,7 @@
                 <a:ea typeface="Calibri" pitchFamily="34" charset="-122"/>
                 <a:cs typeface="Calibri" pitchFamily="34" charset="-120"/>
               </a:rPr>
-              <a:t> agreed that </a:t>
+              <a:t> is important; the students </a:t>
             </a:r>
             <a:pPr algn="l" indent="0" marL="0">
               <a:buNone/>
@@ -18864,7 +18759,7 @@
                 <a:ea typeface="Calibri" pitchFamily="34" charset="-122"/>
                 <a:cs typeface="Calibri" pitchFamily="34" charset="-120"/>
               </a:rPr>
-              <a:t>participating</a:t>
+              <a:t>participated</a:t>
             </a:r>
             <a:pPr algn="l" indent="0" marL="0">
               <a:buNone/>
@@ -18878,7 +18773,7 @@
                 <a:ea typeface="Calibri" pitchFamily="34" charset="-122"/>
                 <a:cs typeface="Calibri" pitchFamily="34" charset="-120"/>
               </a:rPr>
-              <a:t> in the event boosted their </a:t>
+              <a:t> eagerly, making the event truly </a:t>
             </a:r>
             <a:pPr algn="l" indent="0" marL="0">
               <a:buNone/>
@@ -18895,7 +18790,7 @@
                 <a:ea typeface="Calibri" pitchFamily="34" charset="-122"/>
                 <a:cs typeface="Calibri" pitchFamily="34" charset="-120"/>
               </a:rPr>
-              <a:t>participation</a:t>
+              <a:t>participatory</a:t>
             </a:r>
             <a:pPr algn="l" indent="0" marL="0">
               <a:buNone/>
@@ -18909,7 +18804,7 @@
                 <a:ea typeface="Calibri" pitchFamily="34" charset="-122"/>
                 <a:cs typeface="Calibri" pitchFamily="34" charset="-120"/>
               </a:rPr>
-              <a:t> skills, didn't they?</a:t>
+              <a:t>.</a:t>
             </a:r>
             <a:endParaRPr lang="en-US" sz="1800" dirty="0"/>
           </a:p>
@@ -19064,7 +18959,7 @@
                 <a:ea typeface="Trebuchet MS" pitchFamily="34" charset="-122"/>
                 <a:cs typeface="Trebuchet MS" pitchFamily="34" charset="-120"/>
               </a:rPr>
-              <a:t>participants</a:t>
+              <a:t>participation</a:t>
             </a:r>
             <a:endParaRPr lang="en-US" sz="1400" dirty="0"/>
           </a:p>
@@ -19192,7 +19087,7 @@
                 <a:ea typeface="Trebuchet MS" pitchFamily="34" charset="-122"/>
                 <a:cs typeface="Trebuchet MS" pitchFamily="34" charset="-120"/>
               </a:rPr>
-              <a:t>participating</a:t>
+              <a:t>participated</a:t>
             </a:r>
             <a:endParaRPr lang="en-US" sz="1400" dirty="0"/>
           </a:p>
@@ -19320,7 +19215,7 @@
                 <a:ea typeface="Trebuchet MS" pitchFamily="34" charset="-122"/>
                 <a:cs typeface="Trebuchet MS" pitchFamily="34" charset="-120"/>
               </a:rPr>
-              <a:t>participation</a:t>
+              <a:t>participatory</a:t>
             </a:r>
             <a:endParaRPr lang="en-US" sz="1400" dirty="0"/>
           </a:p>
@@ -19790,7 +19685,7 @@
                 <a:ea typeface="Trebuchet MS" pitchFamily="34" charset="-122"/>
                 <a:cs typeface="Trebuchet MS" pitchFamily="34" charset="-120"/>
               </a:rPr>
-              <a:t>participants</a:t>
+              <a:t>participation</a:t>
             </a:r>
             <a:endParaRPr lang="en-US" sz="2800" dirty="0"/>
           </a:p>
@@ -20617,7 +20512,7 @@
                 <a:ea typeface="Trebuchet MS" pitchFamily="34" charset="-122"/>
                 <a:cs typeface="Trebuchet MS" pitchFamily="34" charset="-120"/>
               </a:rPr>
-              <a:t>participants</a:t>
+              <a:t>participation</a:t>
             </a:r>
             <a:endParaRPr lang="en-US" sz="2800" dirty="0"/>
           </a:p>
@@ -20697,7 +20592,7 @@
         </p:nvSpPr>
         <p:spPr>
           <a:xfrm>
-            <a:off x="2221992" y="2258568"/>
+            <a:off x="2938272" y="2258568"/>
             <a:ext cx="1828800" cy="292608"/>
           </a:xfrm>
           <a:prstGeom prst="rect">
@@ -20731,7 +20626,7 @@
         </p:nvSpPr>
         <p:spPr>
           <a:xfrm>
-            <a:off x="2221992" y="2258568"/>
+            <a:off x="2938272" y="2258568"/>
             <a:ext cx="1828800" cy="292608"/>
           </a:xfrm>
           <a:prstGeom prst="rect">
@@ -20770,7 +20665,7 @@
         </p:nvSpPr>
         <p:spPr>
           <a:xfrm>
-            <a:off x="2221992" y="2569464"/>
+            <a:off x="2938272" y="2569464"/>
             <a:ext cx="1828800" cy="201168"/>
           </a:xfrm>
           <a:prstGeom prst="rect">
@@ -20809,7 +20704,7 @@
         </p:nvSpPr>
         <p:spPr>
           <a:xfrm>
-            <a:off x="2221992" y="2752344"/>
+            <a:off x="2938272" y="2752344"/>
             <a:ext cx="1828800" cy="182880"/>
           </a:xfrm>
           <a:prstGeom prst="rect">
@@ -20848,7 +20743,7 @@
         </p:nvSpPr>
         <p:spPr>
           <a:xfrm>
-            <a:off x="4370832" y="2258568"/>
+            <a:off x="5803392" y="2258568"/>
             <a:ext cx="1828800" cy="292608"/>
           </a:xfrm>
           <a:prstGeom prst="rect">
@@ -20882,7 +20777,7 @@
         </p:nvSpPr>
         <p:spPr>
           <a:xfrm>
-            <a:off x="4370832" y="2258568"/>
+            <a:off x="5803392" y="2258568"/>
             <a:ext cx="1828800" cy="292608"/>
           </a:xfrm>
           <a:prstGeom prst="rect">
@@ -20907,7 +20802,7 @@
                 <a:ea typeface="Trebuchet MS" pitchFamily="34" charset="-122"/>
                 <a:cs typeface="Trebuchet MS" pitchFamily="34" charset="-120"/>
               </a:rPr>
-              <a:t>ant</a:t>
+              <a:t>ion</a:t>
             </a:r>
             <a:endParaRPr lang="en-US" sz="1300" dirty="0"/>
           </a:p>
@@ -20921,7 +20816,7 @@
         </p:nvSpPr>
         <p:spPr>
           <a:xfrm>
-            <a:off x="4370832" y="2569464"/>
+            <a:off x="5803392" y="2569464"/>
             <a:ext cx="1828800" cy="201168"/>
           </a:xfrm>
           <a:prstGeom prst="rect">
@@ -20946,7 +20841,7 @@
                 <a:ea typeface="Calibri" pitchFamily="34" charset="-122"/>
                 <a:cs typeface="Calibri" pitchFamily="34" charset="-120"/>
               </a:rPr>
-              <a:t>a person who does something</a:t>
+              <a:t>the act or result of</a:t>
             </a:r>
             <a:endParaRPr lang="en-US" sz="850" dirty="0"/>
           </a:p>
@@ -20960,30 +20855,23 @@
         </p:nvSpPr>
         <p:spPr>
           <a:xfrm>
-            <a:off x="6519672" y="2258568"/>
-            <a:ext cx="1828800" cy="292608"/>
+            <a:off x="365760" y="3273552"/>
+            <a:ext cx="1371600" cy="658368"/>
           </a:xfrm>
           <a:prstGeom prst="rect">
             <a:avLst>
-              <a:gd name="adj" fmla="val 25000"/>
+              <a:gd name="adj" fmla="val 8333"/>
             </a:avLst>
           </a:prstGeom>
           <a:solidFill>
-            <a:srgbClr val="FCE7F3"/>
-          </a:solidFill>
-          <a:ln w="19050">
-            <a:solidFill>
-              <a:srgbClr val="DB2777"/>
-            </a:solidFill>
-            <a:prstDash val="solid"/>
-          </a:ln>
-          <a:effectLst>
-            <a:outerShdw sx="100000" sy="100000" kx="0" ky="0" algn="bl" rotWithShape="0" blurRad="101600" dist="38100" dir="8100000">
-              <a:srgbClr val="000000">
-                <a:alpha val="12000"/>
-              </a:srgbClr>
-            </a:outerShdw>
-          </a:effectLst>
+            <a:srgbClr val="E2E8F0"/>
+          </a:solidFill>
+          <a:ln w="12700">
+            <a:solidFill>
+              <a:srgbClr val="E2E8F0"/>
+            </a:solidFill>
+            <a:prstDash val="solid"/>
+          </a:ln>
         </p:spPr>
       </p:sp>
       <p:sp>
@@ -20994,90 +20882,117 @@
         </p:nvSpPr>
         <p:spPr>
           <a:xfrm>
-            <a:off x="6519672" y="2258568"/>
-            <a:ext cx="1828800" cy="292608"/>
-          </a:xfrm>
-          <a:prstGeom prst="rect">
-            <a:avLst/>
-          </a:prstGeom>
-          <a:noFill/>
-          <a:ln/>
-        </p:spPr>
-        <p:txBody>
-          <a:bodyPr wrap="square" lIns="0" tIns="0" rIns="0" bIns="0" rtlCol="0" anchor="ctr"/>
-          <a:lstStyle/>
-          <a:p>
-            <a:pPr algn="ctr" indent="0" marL="0">
-              <a:buNone/>
-            </a:pPr>
-            <a:r>
-              <a:rPr lang="en-US" sz="1300" b="1" dirty="0">
-                <a:solidFill>
-                  <a:srgbClr val="9D174D"/>
+            <a:off x="365760" y="3273552"/>
+            <a:ext cx="1371600" cy="658368"/>
+          </a:xfrm>
+          <a:prstGeom prst="rect">
+            <a:avLst/>
+          </a:prstGeom>
+          <a:noFill/>
+          <a:ln/>
+        </p:spPr>
+        <p:txBody>
+          <a:bodyPr wrap="square" lIns="0" tIns="0" rIns="0" bIns="0" rtlCol="0" anchor="ctr"/>
+          <a:lstStyle/>
+          <a:p>
+            <a:pPr algn="ctr" indent="0" marL="0">
+              <a:buNone/>
+            </a:pPr>
+            <a:r>
+              <a:rPr lang="en-US" sz="1100" b="1" dirty="0">
+                <a:solidFill>
+                  <a:srgbClr val="475569"/>
                 </a:solidFill>
                 <a:latin typeface="Trebuchet MS" pitchFamily="34" charset="0"/>
                 <a:ea typeface="Trebuchet MS" pitchFamily="34" charset="-122"/>
                 <a:cs typeface="Trebuchet MS" pitchFamily="34" charset="-120"/>
               </a:rPr>
-              <a:t>s</a:t>
-            </a:r>
-            <a:endParaRPr lang="en-US" sz="1300" dirty="0"/>
-          </a:p>
-        </p:txBody>
-      </p:sp>
-      <p:sp>
-        <p:nvSpPr>
-          <p:cNvPr id="25" name="Text 23"/>
-          <p:cNvSpPr/>
-          <p:nvPr/>
-        </p:nvSpPr>
-        <p:spPr>
-          <a:xfrm>
-            <a:off x="6519672" y="2569464"/>
-            <a:ext cx="1828800" cy="201168"/>
-          </a:xfrm>
-          <a:prstGeom prst="rect">
-            <a:avLst/>
-          </a:prstGeom>
-          <a:noFill/>
-          <a:ln/>
-        </p:spPr>
-        <p:txBody>
-          <a:bodyPr wrap="square" lIns="0" tIns="0" rIns="0" bIns="0" rtlCol="0" anchor="t"/>
-          <a:lstStyle/>
-          <a:p>
-            <a:pPr algn="ctr" indent="0" marL="0">
-              <a:buNone/>
-            </a:pPr>
-            <a:r>
-              <a:rPr lang="en-US" sz="850" dirty="0">
-                <a:solidFill>
-                  <a:srgbClr val="475569"/>
+              <a:t>Syllables</a:t>
+            </a:r>
+            <a:endParaRPr lang="en-US" sz="1100" dirty="0"/>
+          </a:p>
+        </p:txBody>
+      </p:sp>
+      <p:sp>
+        <p:nvSpPr>
+          <p:cNvPr id="25" name="Shape 23"/>
+          <p:cNvSpPr/>
+          <p:nvPr/>
+        </p:nvSpPr>
+        <p:spPr>
+          <a:xfrm>
+            <a:off x="1874520" y="3273552"/>
+            <a:ext cx="6903720" cy="658368"/>
+          </a:xfrm>
+          <a:prstGeom prst="rect">
+            <a:avLst>
+              <a:gd name="adj" fmla="val 8333"/>
+            </a:avLst>
+          </a:prstGeom>
+          <a:solidFill>
+            <a:srgbClr val="F8FAFC"/>
+          </a:solidFill>
+          <a:ln w="12700">
+            <a:solidFill>
+              <a:srgbClr val="E2E8F0"/>
+            </a:solidFill>
+            <a:prstDash val="dash"/>
+          </a:ln>
+        </p:spPr>
+      </p:sp>
+      <p:sp>
+        <p:nvSpPr>
+          <p:cNvPr id="26" name="Text 24"/>
+          <p:cNvSpPr/>
+          <p:nvPr/>
+        </p:nvSpPr>
+        <p:spPr>
+          <a:xfrm>
+            <a:off x="1874520" y="3273552"/>
+            <a:ext cx="6903720" cy="658368"/>
+          </a:xfrm>
+          <a:prstGeom prst="rect">
+            <a:avLst/>
+          </a:prstGeom>
+          <a:noFill/>
+          <a:ln/>
+        </p:spPr>
+        <p:txBody>
+          <a:bodyPr wrap="square" rtlCol="0" anchor="ctr"/>
+          <a:lstStyle/>
+          <a:p>
+            <a:pPr algn="ctr" indent="0" marL="0">
+              <a:buNone/>
+            </a:pPr>
+            <a:r>
+              <a:rPr lang="en-US" sz="1100" i="1" dirty="0">
+                <a:solidFill>
+                  <a:srgbClr val="CBD5E1"/>
                 </a:solidFill>
                 <a:latin typeface="Calibri" pitchFamily="34" charset="0"/>
                 <a:ea typeface="Calibri" pitchFamily="34" charset="-122"/>
                 <a:cs typeface="Calibri" pitchFamily="34" charset="-120"/>
               </a:rPr>
-              <a:t>more than one (plural)</a:t>
-            </a:r>
-            <a:endParaRPr lang="en-US" sz="850" dirty="0"/>
-          </a:p>
-        </p:txBody>
-      </p:sp>
-      <p:sp>
-        <p:nvSpPr>
-          <p:cNvPr id="26" name="Shape 24"/>
-          <p:cNvSpPr/>
-          <p:nvPr/>
-        </p:nvSpPr>
-        <p:spPr>
-          <a:xfrm>
-            <a:off x="365760" y="3273552"/>
-            <a:ext cx="1371600" cy="658368"/>
+              <a:t>Write here...</a:t>
+            </a:r>
+            <a:endParaRPr lang="en-US" sz="1100" dirty="0"/>
+          </a:p>
+        </p:txBody>
+      </p:sp>
+      <p:sp>
+        <p:nvSpPr>
+          <p:cNvPr id="27" name="Shape 25"/>
+          <p:cNvSpPr/>
+          <p:nvPr/>
+        </p:nvSpPr>
+        <p:spPr>
+          <a:xfrm>
+            <a:off x="365760" y="4096512"/>
+            <a:ext cx="1371600" cy="804672"/>
           </a:xfrm>
           <a:prstGeom prst="rect">
             <a:avLst>
-              <a:gd name="adj" fmla="val 8333"/>
+              <a:gd name="adj" fmla="val 6818"/>
             </a:avLst>
           </a:prstGeom>
           <a:solidFill>
@@ -21093,14 +21008,14 @@
       </p:sp>
       <p:sp>
         <p:nvSpPr>
-          <p:cNvPr id="27" name="Text 25"/>
-          <p:cNvSpPr/>
-          <p:nvPr/>
-        </p:nvSpPr>
-        <p:spPr>
-          <a:xfrm>
-            <a:off x="365760" y="3273552"/>
-            <a:ext cx="1371600" cy="658368"/>
+          <p:cNvPr id="28" name="Text 26"/>
+          <p:cNvSpPr/>
+          <p:nvPr/>
+        </p:nvSpPr>
+        <p:spPr>
+          <a:xfrm>
+            <a:off x="365760" y="4096512"/>
+            <a:ext cx="1371600" cy="804672"/>
           </a:xfrm>
           <a:prstGeom prst="rect">
             <a:avLst/>
@@ -21124,7 +21039,7 @@
                 <a:ea typeface="Trebuchet MS" pitchFamily="34" charset="-122"/>
                 <a:cs typeface="Trebuchet MS" pitchFamily="34" charset="-120"/>
               </a:rPr>
-              <a:t>Syllables</a:t>
+              <a:t>Phonemes</a:t>
             </a:r>
             <a:endParaRPr lang="en-US" sz="1100" dirty="0"/>
           </a:p>
@@ -21132,80 +21047,14 @@
       </p:sp>
       <p:sp>
         <p:nvSpPr>
-          <p:cNvPr id="28" name="Shape 26"/>
-          <p:cNvSpPr/>
-          <p:nvPr/>
-        </p:nvSpPr>
-        <p:spPr>
-          <a:xfrm>
-            <a:off x="1874520" y="3273552"/>
-            <a:ext cx="6903720" cy="658368"/>
-          </a:xfrm>
-          <a:prstGeom prst="rect">
-            <a:avLst>
-              <a:gd name="adj" fmla="val 8333"/>
-            </a:avLst>
-          </a:prstGeom>
-          <a:solidFill>
-            <a:srgbClr val="F8FAFC"/>
-          </a:solidFill>
-          <a:ln w="12700">
-            <a:solidFill>
-              <a:srgbClr val="E2E8F0"/>
-            </a:solidFill>
-            <a:prstDash val="dash"/>
-          </a:ln>
-        </p:spPr>
-      </p:sp>
-      <p:sp>
-        <p:nvSpPr>
-          <p:cNvPr id="29" name="Text 27"/>
-          <p:cNvSpPr/>
-          <p:nvPr/>
-        </p:nvSpPr>
-        <p:spPr>
-          <a:xfrm>
-            <a:off x="1874520" y="3273552"/>
-            <a:ext cx="6903720" cy="658368"/>
-          </a:xfrm>
-          <a:prstGeom prst="rect">
-            <a:avLst/>
-          </a:prstGeom>
-          <a:noFill/>
-          <a:ln/>
-        </p:spPr>
-        <p:txBody>
-          <a:bodyPr wrap="square" rtlCol="0" anchor="ctr"/>
-          <a:lstStyle/>
-          <a:p>
-            <a:pPr algn="ctr" indent="0" marL="0">
-              <a:buNone/>
-            </a:pPr>
-            <a:r>
-              <a:rPr lang="en-US" sz="1100" i="1" dirty="0">
-                <a:solidFill>
-                  <a:srgbClr val="CBD5E1"/>
-                </a:solidFill>
-                <a:latin typeface="Calibri" pitchFamily="34" charset="0"/>
-                <a:ea typeface="Calibri" pitchFamily="34" charset="-122"/>
-                <a:cs typeface="Calibri" pitchFamily="34" charset="-120"/>
-              </a:rPr>
-              <a:t>Write here...</a:t>
-            </a:r>
-            <a:endParaRPr lang="en-US" sz="1100" dirty="0"/>
-          </a:p>
-        </p:txBody>
-      </p:sp>
-      <p:sp>
-        <p:nvSpPr>
-          <p:cNvPr id="30" name="Shape 28"/>
-          <p:cNvSpPr/>
-          <p:nvPr/>
-        </p:nvSpPr>
-        <p:spPr>
-          <a:xfrm>
-            <a:off x="365760" y="4096512"/>
-            <a:ext cx="1371600" cy="804672"/>
+          <p:cNvPr id="29" name="Shape 27"/>
+          <p:cNvSpPr/>
+          <p:nvPr/>
+        </p:nvSpPr>
+        <p:spPr>
+          <a:xfrm>
+            <a:off x="1874520" y="4096512"/>
+            <a:ext cx="6903720" cy="804672"/>
           </a:xfrm>
           <a:prstGeom prst="rect">
             <a:avLst>
@@ -21213,85 +21062,19 @@
             </a:avLst>
           </a:prstGeom>
           <a:solidFill>
-            <a:srgbClr val="E2E8F0"/>
+            <a:srgbClr val="F8FAFC"/>
           </a:solidFill>
           <a:ln w="12700">
             <a:solidFill>
               <a:srgbClr val="E2E8F0"/>
             </a:solidFill>
-            <a:prstDash val="solid"/>
-          </a:ln>
-        </p:spPr>
-      </p:sp>
-      <p:sp>
-        <p:nvSpPr>
-          <p:cNvPr id="31" name="Text 29"/>
-          <p:cNvSpPr/>
-          <p:nvPr/>
-        </p:nvSpPr>
-        <p:spPr>
-          <a:xfrm>
-            <a:off x="365760" y="4096512"/>
-            <a:ext cx="1371600" cy="804672"/>
-          </a:xfrm>
-          <a:prstGeom prst="rect">
-            <a:avLst/>
-          </a:prstGeom>
-          <a:noFill/>
-          <a:ln/>
-        </p:spPr>
-        <p:txBody>
-          <a:bodyPr wrap="square" lIns="0" tIns="0" rIns="0" bIns="0" rtlCol="0" anchor="ctr"/>
-          <a:lstStyle/>
-          <a:p>
-            <a:pPr algn="ctr" indent="0" marL="0">
-              <a:buNone/>
-            </a:pPr>
-            <a:r>
-              <a:rPr lang="en-US" sz="1100" b="1" dirty="0">
-                <a:solidFill>
-                  <a:srgbClr val="475569"/>
-                </a:solidFill>
-                <a:latin typeface="Trebuchet MS" pitchFamily="34" charset="0"/>
-                <a:ea typeface="Trebuchet MS" pitchFamily="34" charset="-122"/>
-                <a:cs typeface="Trebuchet MS" pitchFamily="34" charset="-120"/>
-              </a:rPr>
-              <a:t>Phonemes</a:t>
-            </a:r>
-            <a:endParaRPr lang="en-US" sz="1100" dirty="0"/>
-          </a:p>
-        </p:txBody>
-      </p:sp>
-      <p:sp>
-        <p:nvSpPr>
-          <p:cNvPr id="32" name="Shape 30"/>
-          <p:cNvSpPr/>
-          <p:nvPr/>
-        </p:nvSpPr>
-        <p:spPr>
-          <a:xfrm>
-            <a:off x="1874520" y="4096512"/>
-            <a:ext cx="6903720" cy="804672"/>
-          </a:xfrm>
-          <a:prstGeom prst="rect">
-            <a:avLst>
-              <a:gd name="adj" fmla="val 6818"/>
-            </a:avLst>
-          </a:prstGeom>
-          <a:solidFill>
-            <a:srgbClr val="F8FAFC"/>
-          </a:solidFill>
-          <a:ln w="12700">
-            <a:solidFill>
-              <a:srgbClr val="E2E8F0"/>
-            </a:solidFill>
             <a:prstDash val="dash"/>
           </a:ln>
         </p:spPr>
       </p:sp>
       <p:sp>
         <p:nvSpPr>
-          <p:cNvPr id="33" name="Text 31"/>
+          <p:cNvPr id="30" name="Text 28"/>
           <p:cNvSpPr/>
           <p:nvPr/>
         </p:nvSpPr>
@@ -21753,7 +21536,7 @@
                 <a:ea typeface="Trebuchet MS" pitchFamily="34" charset="-122"/>
                 <a:cs typeface="Trebuchet MS" pitchFamily="34" charset="-120"/>
               </a:rPr>
-              <a:t>participants</a:t>
+              <a:t>participation</a:t>
             </a:r>
             <a:endParaRPr lang="en-US" sz="2800" dirty="0"/>
           </a:p>
@@ -21833,7 +21616,7 @@
         </p:nvSpPr>
         <p:spPr>
           <a:xfrm>
-            <a:off x="2221992" y="2258568"/>
+            <a:off x="2938272" y="2258568"/>
             <a:ext cx="1828800" cy="292608"/>
           </a:xfrm>
           <a:prstGeom prst="rect">
@@ -21867,7 +21650,7 @@
         </p:nvSpPr>
         <p:spPr>
           <a:xfrm>
-            <a:off x="2221992" y="2258568"/>
+            <a:off x="2938272" y="2258568"/>
             <a:ext cx="1828800" cy="292608"/>
           </a:xfrm>
           <a:prstGeom prst="rect">
@@ -21906,7 +21689,7 @@
         </p:nvSpPr>
         <p:spPr>
           <a:xfrm>
-            <a:off x="2221992" y="2569464"/>
+            <a:off x="2938272" y="2569464"/>
             <a:ext cx="1828800" cy="201168"/>
           </a:xfrm>
           <a:prstGeom prst="rect">
@@ -21945,7 +21728,7 @@
         </p:nvSpPr>
         <p:spPr>
           <a:xfrm>
-            <a:off x="2221992" y="2752344"/>
+            <a:off x="2938272" y="2752344"/>
             <a:ext cx="1828800" cy="182880"/>
           </a:xfrm>
           <a:prstGeom prst="rect">
@@ -21984,7 +21767,7 @@
         </p:nvSpPr>
         <p:spPr>
           <a:xfrm>
-            <a:off x="4370832" y="2258568"/>
+            <a:off x="5803392" y="2258568"/>
             <a:ext cx="1828800" cy="292608"/>
           </a:xfrm>
           <a:prstGeom prst="rect">
@@ -22018,7 +21801,7 @@
         </p:nvSpPr>
         <p:spPr>
           <a:xfrm>
-            <a:off x="4370832" y="2258568"/>
+            <a:off x="5803392" y="2258568"/>
             <a:ext cx="1828800" cy="292608"/>
           </a:xfrm>
           <a:prstGeom prst="rect">
@@ -22043,7 +21826,7 @@
                 <a:ea typeface="Trebuchet MS" pitchFamily="34" charset="-122"/>
                 <a:cs typeface="Trebuchet MS" pitchFamily="34" charset="-120"/>
               </a:rPr>
-              <a:t>ant</a:t>
+              <a:t>ion</a:t>
             </a:r>
             <a:endParaRPr lang="en-US" sz="1300" dirty="0"/>
           </a:p>
@@ -22057,7 +21840,7 @@
         </p:nvSpPr>
         <p:spPr>
           <a:xfrm>
-            <a:off x="4370832" y="2569464"/>
+            <a:off x="5803392" y="2569464"/>
             <a:ext cx="1828800" cy="201168"/>
           </a:xfrm>
           <a:prstGeom prst="rect">
@@ -22082,7 +21865,7 @@
                 <a:ea typeface="Calibri" pitchFamily="34" charset="-122"/>
                 <a:cs typeface="Calibri" pitchFamily="34" charset="-120"/>
               </a:rPr>
-              <a:t>a person who does something</a:t>
+              <a:t>the act or result of</a:t>
             </a:r>
             <a:endParaRPr lang="en-US" sz="850" dirty="0"/>
           </a:p>
@@ -22096,30 +21879,23 @@
         </p:nvSpPr>
         <p:spPr>
           <a:xfrm>
-            <a:off x="6519672" y="2258568"/>
-            <a:ext cx="1828800" cy="292608"/>
+            <a:off x="365760" y="3273552"/>
+            <a:ext cx="1371600" cy="658368"/>
           </a:xfrm>
           <a:prstGeom prst="rect">
             <a:avLst>
-              <a:gd name="adj" fmla="val 25000"/>
+              <a:gd name="adj" fmla="val 8333"/>
             </a:avLst>
           </a:prstGeom>
           <a:solidFill>
-            <a:srgbClr val="FCE7F3"/>
-          </a:solidFill>
-          <a:ln w="19050">
-            <a:solidFill>
-              <a:srgbClr val="DB2777"/>
-            </a:solidFill>
-            <a:prstDash val="solid"/>
-          </a:ln>
-          <a:effectLst>
-            <a:outerShdw sx="100000" sy="100000" kx="0" ky="0" algn="bl" rotWithShape="0" blurRad="101600" dist="38100" dir="8100000">
-              <a:srgbClr val="000000">
-                <a:alpha val="12000"/>
-              </a:srgbClr>
-            </a:outerShdw>
-          </a:effectLst>
+            <a:srgbClr val="E2E8F0"/>
+          </a:solidFill>
+          <a:ln w="12700">
+            <a:solidFill>
+              <a:srgbClr val="E2E8F0"/>
+            </a:solidFill>
+            <a:prstDash val="solid"/>
+          </a:ln>
         </p:spPr>
       </p:sp>
       <p:sp>
@@ -22130,86 +21906,47 @@
         </p:nvSpPr>
         <p:spPr>
           <a:xfrm>
-            <a:off x="6519672" y="2258568"/>
-            <a:ext cx="1828800" cy="292608"/>
-          </a:xfrm>
-          <a:prstGeom prst="rect">
-            <a:avLst/>
-          </a:prstGeom>
-          <a:noFill/>
-          <a:ln/>
-        </p:spPr>
-        <p:txBody>
-          <a:bodyPr wrap="square" lIns="0" tIns="0" rIns="0" bIns="0" rtlCol="0" anchor="ctr"/>
-          <a:lstStyle/>
-          <a:p>
-            <a:pPr algn="ctr" indent="0" marL="0">
-              <a:buNone/>
-            </a:pPr>
-            <a:r>
-              <a:rPr lang="en-US" sz="1300" b="1" dirty="0">
-                <a:solidFill>
-                  <a:srgbClr val="9D174D"/>
+            <a:off x="365760" y="3273552"/>
+            <a:ext cx="1371600" cy="658368"/>
+          </a:xfrm>
+          <a:prstGeom prst="rect">
+            <a:avLst/>
+          </a:prstGeom>
+          <a:noFill/>
+          <a:ln/>
+        </p:spPr>
+        <p:txBody>
+          <a:bodyPr wrap="square" lIns="0" tIns="0" rIns="0" bIns="0" rtlCol="0" anchor="ctr"/>
+          <a:lstStyle/>
+          <a:p>
+            <a:pPr algn="ctr" indent="0" marL="0">
+              <a:buNone/>
+            </a:pPr>
+            <a:r>
+              <a:rPr lang="en-US" sz="1100" b="1" dirty="0">
+                <a:solidFill>
+                  <a:srgbClr val="475569"/>
                 </a:solidFill>
                 <a:latin typeface="Trebuchet MS" pitchFamily="34" charset="0"/>
                 <a:ea typeface="Trebuchet MS" pitchFamily="34" charset="-122"/>
                 <a:cs typeface="Trebuchet MS" pitchFamily="34" charset="-120"/>
               </a:rPr>
-              <a:t>s</a:t>
-            </a:r>
-            <a:endParaRPr lang="en-US" sz="1300" dirty="0"/>
-          </a:p>
-        </p:txBody>
-      </p:sp>
-      <p:sp>
-        <p:nvSpPr>
-          <p:cNvPr id="25" name="Text 23"/>
-          <p:cNvSpPr/>
-          <p:nvPr/>
-        </p:nvSpPr>
-        <p:spPr>
-          <a:xfrm>
-            <a:off x="6519672" y="2569464"/>
-            <a:ext cx="1828800" cy="201168"/>
-          </a:xfrm>
-          <a:prstGeom prst="rect">
-            <a:avLst/>
-          </a:prstGeom>
-          <a:noFill/>
-          <a:ln/>
-        </p:spPr>
-        <p:txBody>
-          <a:bodyPr wrap="square" lIns="0" tIns="0" rIns="0" bIns="0" rtlCol="0" anchor="t"/>
-          <a:lstStyle/>
-          <a:p>
-            <a:pPr algn="ctr" indent="0" marL="0">
-              <a:buNone/>
-            </a:pPr>
-            <a:r>
-              <a:rPr lang="en-US" sz="850" dirty="0">
-                <a:solidFill>
-                  <a:srgbClr val="475569"/>
-                </a:solidFill>
-                <a:latin typeface="Calibri" pitchFamily="34" charset="0"/>
-                <a:ea typeface="Calibri" pitchFamily="34" charset="-122"/>
-                <a:cs typeface="Calibri" pitchFamily="34" charset="-120"/>
-              </a:rPr>
-              <a:t>more than one (plural)</a:t>
-            </a:r>
-            <a:endParaRPr lang="en-US" sz="850" dirty="0"/>
-          </a:p>
-        </p:txBody>
-      </p:sp>
-      <p:sp>
-        <p:nvSpPr>
-          <p:cNvPr id="26" name="Shape 24"/>
-          <p:cNvSpPr/>
-          <p:nvPr/>
-        </p:nvSpPr>
-        <p:spPr>
-          <a:xfrm>
-            <a:off x="365760" y="3273552"/>
-            <a:ext cx="1371600" cy="658368"/>
+              <a:t>Syllables</a:t>
+            </a:r>
+            <a:endParaRPr lang="en-US" sz="1100" dirty="0"/>
+          </a:p>
+        </p:txBody>
+      </p:sp>
+      <p:sp>
+        <p:nvSpPr>
+          <p:cNvPr id="25" name="Shape 23"/>
+          <p:cNvSpPr/>
+          <p:nvPr/>
+        </p:nvSpPr>
+        <p:spPr>
+          <a:xfrm>
+            <a:off x="1874520" y="3273552"/>
+            <a:ext cx="6903720" cy="658368"/>
           </a:xfrm>
           <a:prstGeom prst="rect">
             <a:avLst>
@@ -22217,11 +21954,38 @@
             </a:avLst>
           </a:prstGeom>
           <a:solidFill>
-            <a:srgbClr val="E2E8F0"/>
-          </a:solidFill>
-          <a:ln w="12700">
-            <a:solidFill>
-              <a:srgbClr val="E2E8F0"/>
+            <a:srgbClr val="CCFBF1"/>
+          </a:solidFill>
+          <a:ln w="12700">
+            <a:solidFill>
+              <a:srgbClr val="0D9488"/>
+            </a:solidFill>
+            <a:prstDash val="solid"/>
+          </a:ln>
+        </p:spPr>
+      </p:sp>
+      <p:sp>
+        <p:nvSpPr>
+          <p:cNvPr id="26" name="Shape 24"/>
+          <p:cNvSpPr/>
+          <p:nvPr/>
+        </p:nvSpPr>
+        <p:spPr>
+          <a:xfrm>
+            <a:off x="1978152" y="3364992"/>
+            <a:ext cx="1225296" cy="475488"/>
+          </a:xfrm>
+          <a:prstGeom prst="rect">
+            <a:avLst>
+              <a:gd name="adj" fmla="val 9615"/>
+            </a:avLst>
+          </a:prstGeom>
+          <a:solidFill>
+            <a:srgbClr val="FFFFFF"/>
+          </a:solidFill>
+          <a:ln w="12700">
+            <a:solidFill>
+              <a:srgbClr val="0D9488"/>
             </a:solidFill>
             <a:prstDash val="solid"/>
           </a:ln>
@@ -22235,63 +21999,75 @@
         </p:nvSpPr>
         <p:spPr>
           <a:xfrm>
-            <a:off x="365760" y="3273552"/>
-            <a:ext cx="1371600" cy="658368"/>
-          </a:xfrm>
-          <a:prstGeom prst="rect">
-            <a:avLst/>
-          </a:prstGeom>
-          <a:noFill/>
-          <a:ln/>
-        </p:spPr>
-        <p:txBody>
-          <a:bodyPr wrap="square" lIns="0" tIns="0" rIns="0" bIns="0" rtlCol="0" anchor="ctr"/>
-          <a:lstStyle/>
-          <a:p>
-            <a:pPr algn="ctr" indent="0" marL="0">
-              <a:buNone/>
-            </a:pPr>
-            <a:r>
-              <a:rPr lang="en-US" sz="1100" b="1" dirty="0">
-                <a:solidFill>
-                  <a:srgbClr val="475569"/>
+            <a:off x="1978152" y="3364992"/>
+            <a:ext cx="1225296" cy="475488"/>
+          </a:xfrm>
+          <a:prstGeom prst="rect">
+            <a:avLst/>
+          </a:prstGeom>
+          <a:noFill/>
+          <a:ln/>
+        </p:spPr>
+        <p:txBody>
+          <a:bodyPr wrap="square" lIns="0" tIns="0" rIns="0" bIns="0" rtlCol="0" anchor="ctr"/>
+          <a:lstStyle/>
+          <a:p>
+            <a:pPr algn="ctr" indent="0" marL="0">
+              <a:buNone/>
+            </a:pPr>
+            <a:r>
+              <a:rPr lang="en-US" sz="1400" b="1" dirty="0">
+                <a:solidFill>
+                  <a:srgbClr val="0D9488"/>
                 </a:solidFill>
                 <a:latin typeface="Trebuchet MS" pitchFamily="34" charset="0"/>
                 <a:ea typeface="Trebuchet MS" pitchFamily="34" charset="-122"/>
                 <a:cs typeface="Trebuchet MS" pitchFamily="34" charset="-120"/>
               </a:rPr>
-              <a:t>Syllables</a:t>
-            </a:r>
-            <a:endParaRPr lang="en-US" sz="1100" dirty="0"/>
-          </a:p>
-        </p:txBody>
-      </p:sp>
-      <p:sp>
-        <p:nvSpPr>
-          <p:cNvPr id="28" name="Shape 26"/>
-          <p:cNvSpPr/>
-          <p:nvPr/>
-        </p:nvSpPr>
-        <p:spPr>
-          <a:xfrm>
-            <a:off x="1874520" y="3273552"/>
-            <a:ext cx="6903720" cy="658368"/>
-          </a:xfrm>
-          <a:prstGeom prst="rect">
-            <a:avLst>
-              <a:gd name="adj" fmla="val 8333"/>
-            </a:avLst>
-          </a:prstGeom>
-          <a:solidFill>
-            <a:srgbClr val="CCFBF1"/>
-          </a:solidFill>
-          <a:ln w="12700">
-            <a:solidFill>
-              <a:srgbClr val="0D9488"/>
-            </a:solidFill>
-            <a:prstDash val="solid"/>
-          </a:ln>
-        </p:spPr>
+              <a:t>par</a:t>
+            </a:r>
+            <a:endParaRPr lang="en-US" sz="1400" dirty="0"/>
+          </a:p>
+        </p:txBody>
+      </p:sp>
+      <p:sp>
+        <p:nvSpPr>
+          <p:cNvPr id="28" name="Text 26"/>
+          <p:cNvSpPr/>
+          <p:nvPr/>
+        </p:nvSpPr>
+        <p:spPr>
+          <a:xfrm>
+            <a:off x="3203448" y="3364992"/>
+            <a:ext cx="76200" cy="475488"/>
+          </a:xfrm>
+          <a:prstGeom prst="rect">
+            <a:avLst/>
+          </a:prstGeom>
+          <a:noFill/>
+          <a:ln/>
+        </p:spPr>
+        <p:txBody>
+          <a:bodyPr wrap="square" lIns="0" tIns="0" rIns="0" bIns="0" rtlCol="0" anchor="ctr"/>
+          <a:lstStyle/>
+          <a:p>
+            <a:pPr algn="ctr" indent="0" marL="0">
+              <a:buNone/>
+            </a:pPr>
+            <a:r>
+              <a:rPr lang="en-US" sz="1600" b="1" dirty="0">
+                <a:solidFill>
+                  <a:srgbClr val="0D9488"/>
+                </a:solidFill>
+                <a:latin typeface="Trebuchet MS" pitchFamily="34" charset="0"/>
+                <a:ea typeface="Trebuchet MS" pitchFamily="34" charset="-122"/>
+                <a:cs typeface="Trebuchet MS" pitchFamily="34" charset="-120"/>
+              </a:rPr>
+              <a:t>·</a:t>
+            </a:r>
+            <a:endParaRPr lang="en-US" sz="1600" dirty="0"/>
+          </a:p>
+        </p:txBody>
       </p:sp>
       <p:sp>
         <p:nvSpPr>
@@ -22301,8 +22077,8 @@
         </p:nvSpPr>
         <p:spPr>
           <a:xfrm>
-            <a:off x="1975104" y="3364992"/>
-            <a:ext cx="1554480" cy="475488"/>
+            <a:off x="3279648" y="3364992"/>
+            <a:ext cx="1225296" cy="475488"/>
           </a:xfrm>
           <a:prstGeom prst="rect">
             <a:avLst>
@@ -22328,8 +22104,8 @@
         </p:nvSpPr>
         <p:spPr>
           <a:xfrm>
-            <a:off x="1975104" y="3364992"/>
-            <a:ext cx="1554480" cy="475488"/>
+            <a:off x="3279648" y="3364992"/>
+            <a:ext cx="1225296" cy="475488"/>
           </a:xfrm>
           <a:prstGeom prst="rect">
             <a:avLst/>
@@ -22353,7 +22129,7 @@
                 <a:ea typeface="Trebuchet MS" pitchFamily="34" charset="-122"/>
                 <a:cs typeface="Trebuchet MS" pitchFamily="34" charset="-120"/>
               </a:rPr>
-              <a:t>par</a:t>
+              <a:t>ti</a:t>
             </a:r>
             <a:endParaRPr lang="en-US" sz="1400" dirty="0"/>
           </a:p>
@@ -22367,8 +22143,8 @@
         </p:nvSpPr>
         <p:spPr>
           <a:xfrm>
-            <a:off x="3529584" y="3364992"/>
-            <a:ext cx="73152" cy="475488"/>
+            <a:off x="4504944" y="3364992"/>
+            <a:ext cx="76200" cy="475488"/>
           </a:xfrm>
           <a:prstGeom prst="rect">
             <a:avLst/>
@@ -22406,8 +22182,8 @@
         </p:nvSpPr>
         <p:spPr>
           <a:xfrm>
-            <a:off x="3602736" y="3364992"/>
-            <a:ext cx="1554480" cy="475488"/>
+            <a:off x="4581144" y="3364992"/>
+            <a:ext cx="1225296" cy="475488"/>
           </a:xfrm>
           <a:prstGeom prst="rect">
             <a:avLst>
@@ -22433,8 +22209,8 @@
         </p:nvSpPr>
         <p:spPr>
           <a:xfrm>
-            <a:off x="3602736" y="3364992"/>
-            <a:ext cx="1554480" cy="475488"/>
+            <a:off x="4581144" y="3364992"/>
+            <a:ext cx="1225296" cy="475488"/>
           </a:xfrm>
           <a:prstGeom prst="rect">
             <a:avLst/>
@@ -22458,7 +22234,7 @@
                 <a:ea typeface="Trebuchet MS" pitchFamily="34" charset="-122"/>
                 <a:cs typeface="Trebuchet MS" pitchFamily="34" charset="-120"/>
               </a:rPr>
-              <a:t>ti</a:t>
+              <a:t>ci</a:t>
             </a:r>
             <a:endParaRPr lang="en-US" sz="1400" dirty="0"/>
           </a:p>
@@ -22472,8 +22248,8 @@
         </p:nvSpPr>
         <p:spPr>
           <a:xfrm>
-            <a:off x="5157216" y="3364992"/>
-            <a:ext cx="73152" cy="475488"/>
+            <a:off x="5806440" y="3364992"/>
+            <a:ext cx="76200" cy="475488"/>
           </a:xfrm>
           <a:prstGeom prst="rect">
             <a:avLst/>
@@ -22511,8 +22287,8 @@
         </p:nvSpPr>
         <p:spPr>
           <a:xfrm>
-            <a:off x="5230368" y="3364992"/>
-            <a:ext cx="1554480" cy="475488"/>
+            <a:off x="5882640" y="3364992"/>
+            <a:ext cx="1225296" cy="475488"/>
           </a:xfrm>
           <a:prstGeom prst="rect">
             <a:avLst>
@@ -22538,8 +22314,8 @@
         </p:nvSpPr>
         <p:spPr>
           <a:xfrm>
-            <a:off x="5230368" y="3364992"/>
-            <a:ext cx="1554480" cy="475488"/>
+            <a:off x="5882640" y="3364992"/>
+            <a:ext cx="1225296" cy="475488"/>
           </a:xfrm>
           <a:prstGeom prst="rect">
             <a:avLst/>
@@ -22563,7 +22339,7 @@
                 <a:ea typeface="Trebuchet MS" pitchFamily="34" charset="-122"/>
                 <a:cs typeface="Trebuchet MS" pitchFamily="34" charset="-120"/>
               </a:rPr>
-              <a:t>ci</a:t>
+              <a:t>pa</a:t>
             </a:r>
             <a:endParaRPr lang="en-US" sz="1400" dirty="0"/>
           </a:p>
@@ -22577,8 +22353,8 @@
         </p:nvSpPr>
         <p:spPr>
           <a:xfrm>
-            <a:off x="6784848" y="3364992"/>
-            <a:ext cx="73152" cy="475488"/>
+            <a:off x="7107936" y="3364992"/>
+            <a:ext cx="76200" cy="475488"/>
           </a:xfrm>
           <a:prstGeom prst="rect">
             <a:avLst/>
@@ -22616,8 +22392,8 @@
         </p:nvSpPr>
         <p:spPr>
           <a:xfrm>
-            <a:off x="6858000" y="3364992"/>
-            <a:ext cx="1554480" cy="475488"/>
+            <a:off x="7184136" y="3364992"/>
+            <a:ext cx="1225296" cy="475488"/>
           </a:xfrm>
           <a:prstGeom prst="rect">
             <a:avLst>
@@ -22643,8 +22419,8 @@
         </p:nvSpPr>
         <p:spPr>
           <a:xfrm>
-            <a:off x="6858000" y="3364992"/>
-            <a:ext cx="1554480" cy="475488"/>
+            <a:off x="7184136" y="3364992"/>
+            <a:ext cx="1225296" cy="475488"/>
           </a:xfrm>
           <a:prstGeom prst="rect">
             <a:avLst/>
@@ -22668,7 +22444,7 @@
                 <a:ea typeface="Trebuchet MS" pitchFamily="34" charset="-122"/>
                 <a:cs typeface="Trebuchet MS" pitchFamily="34" charset="-120"/>
               </a:rPr>
-              <a:t>pants</a:t>
+              <a:t>tion</a:t>
             </a:r>
             <a:endParaRPr lang="en-US" sz="1400" dirty="0"/>
           </a:p>
@@ -23231,7 +23007,7 @@
                 <a:ea typeface="Trebuchet MS" pitchFamily="34" charset="-122"/>
                 <a:cs typeface="Trebuchet MS" pitchFamily="34" charset="-120"/>
               </a:rPr>
-              <a:t>participants</a:t>
+              <a:t>participation</a:t>
             </a:r>
             <a:endParaRPr lang="en-US" sz="2800" dirty="0"/>
           </a:p>
@@ -23311,7 +23087,7 @@
         </p:nvSpPr>
         <p:spPr>
           <a:xfrm>
-            <a:off x="2221992" y="2258568"/>
+            <a:off x="2938272" y="2258568"/>
             <a:ext cx="1828800" cy="292608"/>
           </a:xfrm>
           <a:prstGeom prst="rect">
@@ -23345,7 +23121,7 @@
         </p:nvSpPr>
         <p:spPr>
           <a:xfrm>
-            <a:off x="2221992" y="2258568"/>
+            <a:off x="2938272" y="2258568"/>
             <a:ext cx="1828800" cy="292608"/>
           </a:xfrm>
           <a:prstGeom prst="rect">
@@ -23384,7 +23160,7 @@
         </p:nvSpPr>
         <p:spPr>
           <a:xfrm>
-            <a:off x="2221992" y="2569464"/>
+            <a:off x="2938272" y="2569464"/>
             <a:ext cx="1828800" cy="201168"/>
           </a:xfrm>
           <a:prstGeom prst="rect">
@@ -23423,7 +23199,7 @@
         </p:nvSpPr>
         <p:spPr>
           <a:xfrm>
-            <a:off x="2221992" y="2752344"/>
+            <a:off x="2938272" y="2752344"/>
             <a:ext cx="1828800" cy="182880"/>
           </a:xfrm>
           <a:prstGeom prst="rect">
@@ -23462,7 +23238,7 @@
         </p:nvSpPr>
         <p:spPr>
           <a:xfrm>
-            <a:off x="4370832" y="2258568"/>
+            <a:off x="5803392" y="2258568"/>
             <a:ext cx="1828800" cy="292608"/>
           </a:xfrm>
           <a:prstGeom prst="rect">
@@ -23496,7 +23272,7 @@
         </p:nvSpPr>
         <p:spPr>
           <a:xfrm>
-            <a:off x="4370832" y="2258568"/>
+            <a:off x="5803392" y="2258568"/>
             <a:ext cx="1828800" cy="292608"/>
           </a:xfrm>
           <a:prstGeom prst="rect">
@@ -23521,7 +23297,7 @@
                 <a:ea typeface="Trebuchet MS" pitchFamily="34" charset="-122"/>
                 <a:cs typeface="Trebuchet MS" pitchFamily="34" charset="-120"/>
               </a:rPr>
-              <a:t>ant</a:t>
+              <a:t>ion</a:t>
             </a:r>
             <a:endParaRPr lang="en-US" sz="1300" dirty="0"/>
           </a:p>
@@ -23535,7 +23311,7 @@
         </p:nvSpPr>
         <p:spPr>
           <a:xfrm>
-            <a:off x="4370832" y="2569464"/>
+            <a:off x="5803392" y="2569464"/>
             <a:ext cx="1828800" cy="201168"/>
           </a:xfrm>
           <a:prstGeom prst="rect">
@@ -23560,7 +23336,7 @@
                 <a:ea typeface="Calibri" pitchFamily="34" charset="-122"/>
                 <a:cs typeface="Calibri" pitchFamily="34" charset="-120"/>
               </a:rPr>
-              <a:t>a person who does something</a:t>
+              <a:t>the act or result of</a:t>
             </a:r>
             <a:endParaRPr lang="en-US" sz="850" dirty="0"/>
           </a:p>
@@ -23574,30 +23350,23 @@
         </p:nvSpPr>
         <p:spPr>
           <a:xfrm>
-            <a:off x="6519672" y="2258568"/>
-            <a:ext cx="1828800" cy="292608"/>
+            <a:off x="365760" y="3273552"/>
+            <a:ext cx="1371600" cy="658368"/>
           </a:xfrm>
           <a:prstGeom prst="rect">
             <a:avLst>
-              <a:gd name="adj" fmla="val 25000"/>
+              <a:gd name="adj" fmla="val 8333"/>
             </a:avLst>
           </a:prstGeom>
           <a:solidFill>
-            <a:srgbClr val="FCE7F3"/>
-          </a:solidFill>
-          <a:ln w="19050">
-            <a:solidFill>
-              <a:srgbClr val="DB2777"/>
-            </a:solidFill>
-            <a:prstDash val="solid"/>
-          </a:ln>
-          <a:effectLst>
-            <a:outerShdw sx="100000" sy="100000" kx="0" ky="0" algn="bl" rotWithShape="0" blurRad="101600" dist="38100" dir="8100000">
-              <a:srgbClr val="000000">
-                <a:alpha val="12000"/>
-              </a:srgbClr>
-            </a:outerShdw>
-          </a:effectLst>
+            <a:srgbClr val="E2E8F0"/>
+          </a:solidFill>
+          <a:ln w="12700">
+            <a:solidFill>
+              <a:srgbClr val="E2E8F0"/>
+            </a:solidFill>
+            <a:prstDash val="solid"/>
+          </a:ln>
         </p:spPr>
       </p:sp>
       <p:sp>
@@ -23608,47 +23377,983 @@
         </p:nvSpPr>
         <p:spPr>
           <a:xfrm>
-            <a:off x="6519672" y="2258568"/>
-            <a:ext cx="1828800" cy="292608"/>
-          </a:xfrm>
-          <a:prstGeom prst="rect">
-            <a:avLst/>
-          </a:prstGeom>
-          <a:noFill/>
-          <a:ln/>
-        </p:spPr>
-        <p:txBody>
-          <a:bodyPr wrap="square" lIns="0" tIns="0" rIns="0" bIns="0" rtlCol="0" anchor="ctr"/>
-          <a:lstStyle/>
-          <a:p>
-            <a:pPr algn="ctr" indent="0" marL="0">
-              <a:buNone/>
-            </a:pPr>
-            <a:r>
-              <a:rPr lang="en-US" sz="1300" b="1" dirty="0">
-                <a:solidFill>
-                  <a:srgbClr val="9D174D"/>
+            <a:off x="365760" y="3273552"/>
+            <a:ext cx="1371600" cy="658368"/>
+          </a:xfrm>
+          <a:prstGeom prst="rect">
+            <a:avLst/>
+          </a:prstGeom>
+          <a:noFill/>
+          <a:ln/>
+        </p:spPr>
+        <p:txBody>
+          <a:bodyPr wrap="square" lIns="0" tIns="0" rIns="0" bIns="0" rtlCol="0" anchor="ctr"/>
+          <a:lstStyle/>
+          <a:p>
+            <a:pPr algn="ctr" indent="0" marL="0">
+              <a:buNone/>
+            </a:pPr>
+            <a:r>
+              <a:rPr lang="en-US" sz="1100" b="1" dirty="0">
+                <a:solidFill>
+                  <a:srgbClr val="475569"/>
                 </a:solidFill>
                 <a:latin typeface="Trebuchet MS" pitchFamily="34" charset="0"/>
                 <a:ea typeface="Trebuchet MS" pitchFamily="34" charset="-122"/>
                 <a:cs typeface="Trebuchet MS" pitchFamily="34" charset="-120"/>
               </a:rPr>
-              <a:t>s</a:t>
-            </a:r>
-            <a:endParaRPr lang="en-US" sz="1300" dirty="0"/>
-          </a:p>
-        </p:txBody>
-      </p:sp>
-      <p:sp>
-        <p:nvSpPr>
-          <p:cNvPr id="25" name="Text 23"/>
-          <p:cNvSpPr/>
-          <p:nvPr/>
-        </p:nvSpPr>
-        <p:spPr>
-          <a:xfrm>
-            <a:off x="6519672" y="2569464"/>
-            <a:ext cx="1828800" cy="201168"/>
+              <a:t>Syllables</a:t>
+            </a:r>
+            <a:endParaRPr lang="en-US" sz="1100" dirty="0"/>
+          </a:p>
+        </p:txBody>
+      </p:sp>
+      <p:sp>
+        <p:nvSpPr>
+          <p:cNvPr id="25" name="Shape 23"/>
+          <p:cNvSpPr/>
+          <p:nvPr/>
+        </p:nvSpPr>
+        <p:spPr>
+          <a:xfrm>
+            <a:off x="1874520" y="3273552"/>
+            <a:ext cx="6903720" cy="658368"/>
+          </a:xfrm>
+          <a:prstGeom prst="rect">
+            <a:avLst>
+              <a:gd name="adj" fmla="val 8333"/>
+            </a:avLst>
+          </a:prstGeom>
+          <a:solidFill>
+            <a:srgbClr val="CCFBF1"/>
+          </a:solidFill>
+          <a:ln w="12700">
+            <a:solidFill>
+              <a:srgbClr val="0D9488"/>
+            </a:solidFill>
+            <a:prstDash val="solid"/>
+          </a:ln>
+        </p:spPr>
+      </p:sp>
+      <p:sp>
+        <p:nvSpPr>
+          <p:cNvPr id="26" name="Shape 24"/>
+          <p:cNvSpPr/>
+          <p:nvPr/>
+        </p:nvSpPr>
+        <p:spPr>
+          <a:xfrm>
+            <a:off x="1978152" y="3364992"/>
+            <a:ext cx="1225296" cy="475488"/>
+          </a:xfrm>
+          <a:prstGeom prst="rect">
+            <a:avLst>
+              <a:gd name="adj" fmla="val 9615"/>
+            </a:avLst>
+          </a:prstGeom>
+          <a:solidFill>
+            <a:srgbClr val="FFFFFF"/>
+          </a:solidFill>
+          <a:ln w="12700">
+            <a:solidFill>
+              <a:srgbClr val="0D9488"/>
+            </a:solidFill>
+            <a:prstDash val="solid"/>
+          </a:ln>
+        </p:spPr>
+      </p:sp>
+      <p:sp>
+        <p:nvSpPr>
+          <p:cNvPr id="27" name="Text 25"/>
+          <p:cNvSpPr/>
+          <p:nvPr/>
+        </p:nvSpPr>
+        <p:spPr>
+          <a:xfrm>
+            <a:off x="1978152" y="3364992"/>
+            <a:ext cx="1225296" cy="475488"/>
+          </a:xfrm>
+          <a:prstGeom prst="rect">
+            <a:avLst/>
+          </a:prstGeom>
+          <a:noFill/>
+          <a:ln/>
+        </p:spPr>
+        <p:txBody>
+          <a:bodyPr wrap="square" lIns="0" tIns="0" rIns="0" bIns="0" rtlCol="0" anchor="ctr"/>
+          <a:lstStyle/>
+          <a:p>
+            <a:pPr algn="ctr" indent="0" marL="0">
+              <a:buNone/>
+            </a:pPr>
+            <a:r>
+              <a:rPr lang="en-US" sz="1400" b="1" dirty="0">
+                <a:solidFill>
+                  <a:srgbClr val="0D9488"/>
+                </a:solidFill>
+                <a:latin typeface="Trebuchet MS" pitchFamily="34" charset="0"/>
+                <a:ea typeface="Trebuchet MS" pitchFamily="34" charset="-122"/>
+                <a:cs typeface="Trebuchet MS" pitchFamily="34" charset="-120"/>
+              </a:rPr>
+              <a:t>par</a:t>
+            </a:r>
+            <a:endParaRPr lang="en-US" sz="1400" dirty="0"/>
+          </a:p>
+        </p:txBody>
+      </p:sp>
+      <p:sp>
+        <p:nvSpPr>
+          <p:cNvPr id="28" name="Text 26"/>
+          <p:cNvSpPr/>
+          <p:nvPr/>
+        </p:nvSpPr>
+        <p:spPr>
+          <a:xfrm>
+            <a:off x="3203448" y="3364992"/>
+            <a:ext cx="76200" cy="475488"/>
+          </a:xfrm>
+          <a:prstGeom prst="rect">
+            <a:avLst/>
+          </a:prstGeom>
+          <a:noFill/>
+          <a:ln/>
+        </p:spPr>
+        <p:txBody>
+          <a:bodyPr wrap="square" lIns="0" tIns="0" rIns="0" bIns="0" rtlCol="0" anchor="ctr"/>
+          <a:lstStyle/>
+          <a:p>
+            <a:pPr algn="ctr" indent="0" marL="0">
+              <a:buNone/>
+            </a:pPr>
+            <a:r>
+              <a:rPr lang="en-US" sz="1600" b="1" dirty="0">
+                <a:solidFill>
+                  <a:srgbClr val="0D9488"/>
+                </a:solidFill>
+                <a:latin typeface="Trebuchet MS" pitchFamily="34" charset="0"/>
+                <a:ea typeface="Trebuchet MS" pitchFamily="34" charset="-122"/>
+                <a:cs typeface="Trebuchet MS" pitchFamily="34" charset="-120"/>
+              </a:rPr>
+              <a:t>·</a:t>
+            </a:r>
+            <a:endParaRPr lang="en-US" sz="1600" dirty="0"/>
+          </a:p>
+        </p:txBody>
+      </p:sp>
+      <p:sp>
+        <p:nvSpPr>
+          <p:cNvPr id="29" name="Shape 27"/>
+          <p:cNvSpPr/>
+          <p:nvPr/>
+        </p:nvSpPr>
+        <p:spPr>
+          <a:xfrm>
+            <a:off x="3279648" y="3364992"/>
+            <a:ext cx="1225296" cy="475488"/>
+          </a:xfrm>
+          <a:prstGeom prst="rect">
+            <a:avLst>
+              <a:gd name="adj" fmla="val 9615"/>
+            </a:avLst>
+          </a:prstGeom>
+          <a:solidFill>
+            <a:srgbClr val="FFFFFF"/>
+          </a:solidFill>
+          <a:ln w="12700">
+            <a:solidFill>
+              <a:srgbClr val="0D9488"/>
+            </a:solidFill>
+            <a:prstDash val="solid"/>
+          </a:ln>
+        </p:spPr>
+      </p:sp>
+      <p:sp>
+        <p:nvSpPr>
+          <p:cNvPr id="30" name="Text 28"/>
+          <p:cNvSpPr/>
+          <p:nvPr/>
+        </p:nvSpPr>
+        <p:spPr>
+          <a:xfrm>
+            <a:off x="3279648" y="3364992"/>
+            <a:ext cx="1225296" cy="475488"/>
+          </a:xfrm>
+          <a:prstGeom prst="rect">
+            <a:avLst/>
+          </a:prstGeom>
+          <a:noFill/>
+          <a:ln/>
+        </p:spPr>
+        <p:txBody>
+          <a:bodyPr wrap="square" lIns="0" tIns="0" rIns="0" bIns="0" rtlCol="0" anchor="ctr"/>
+          <a:lstStyle/>
+          <a:p>
+            <a:pPr algn="ctr" indent="0" marL="0">
+              <a:buNone/>
+            </a:pPr>
+            <a:r>
+              <a:rPr lang="en-US" sz="1400" b="1" dirty="0">
+                <a:solidFill>
+                  <a:srgbClr val="0D9488"/>
+                </a:solidFill>
+                <a:latin typeface="Trebuchet MS" pitchFamily="34" charset="0"/>
+                <a:ea typeface="Trebuchet MS" pitchFamily="34" charset="-122"/>
+                <a:cs typeface="Trebuchet MS" pitchFamily="34" charset="-120"/>
+              </a:rPr>
+              <a:t>ti</a:t>
+            </a:r>
+            <a:endParaRPr lang="en-US" sz="1400" dirty="0"/>
+          </a:p>
+        </p:txBody>
+      </p:sp>
+      <p:sp>
+        <p:nvSpPr>
+          <p:cNvPr id="31" name="Text 29"/>
+          <p:cNvSpPr/>
+          <p:nvPr/>
+        </p:nvSpPr>
+        <p:spPr>
+          <a:xfrm>
+            <a:off x="4504944" y="3364992"/>
+            <a:ext cx="76200" cy="475488"/>
+          </a:xfrm>
+          <a:prstGeom prst="rect">
+            <a:avLst/>
+          </a:prstGeom>
+          <a:noFill/>
+          <a:ln/>
+        </p:spPr>
+        <p:txBody>
+          <a:bodyPr wrap="square" lIns="0" tIns="0" rIns="0" bIns="0" rtlCol="0" anchor="ctr"/>
+          <a:lstStyle/>
+          <a:p>
+            <a:pPr algn="ctr" indent="0" marL="0">
+              <a:buNone/>
+            </a:pPr>
+            <a:r>
+              <a:rPr lang="en-US" sz="1600" b="1" dirty="0">
+                <a:solidFill>
+                  <a:srgbClr val="0D9488"/>
+                </a:solidFill>
+                <a:latin typeface="Trebuchet MS" pitchFamily="34" charset="0"/>
+                <a:ea typeface="Trebuchet MS" pitchFamily="34" charset="-122"/>
+                <a:cs typeface="Trebuchet MS" pitchFamily="34" charset="-120"/>
+              </a:rPr>
+              <a:t>·</a:t>
+            </a:r>
+            <a:endParaRPr lang="en-US" sz="1600" dirty="0"/>
+          </a:p>
+        </p:txBody>
+      </p:sp>
+      <p:sp>
+        <p:nvSpPr>
+          <p:cNvPr id="32" name="Shape 30"/>
+          <p:cNvSpPr/>
+          <p:nvPr/>
+        </p:nvSpPr>
+        <p:spPr>
+          <a:xfrm>
+            <a:off x="4581144" y="3364992"/>
+            <a:ext cx="1225296" cy="475488"/>
+          </a:xfrm>
+          <a:prstGeom prst="rect">
+            <a:avLst>
+              <a:gd name="adj" fmla="val 9615"/>
+            </a:avLst>
+          </a:prstGeom>
+          <a:solidFill>
+            <a:srgbClr val="FFFFFF"/>
+          </a:solidFill>
+          <a:ln w="12700">
+            <a:solidFill>
+              <a:srgbClr val="0D9488"/>
+            </a:solidFill>
+            <a:prstDash val="solid"/>
+          </a:ln>
+        </p:spPr>
+      </p:sp>
+      <p:sp>
+        <p:nvSpPr>
+          <p:cNvPr id="33" name="Text 31"/>
+          <p:cNvSpPr/>
+          <p:nvPr/>
+        </p:nvSpPr>
+        <p:spPr>
+          <a:xfrm>
+            <a:off x="4581144" y="3364992"/>
+            <a:ext cx="1225296" cy="475488"/>
+          </a:xfrm>
+          <a:prstGeom prst="rect">
+            <a:avLst/>
+          </a:prstGeom>
+          <a:noFill/>
+          <a:ln/>
+        </p:spPr>
+        <p:txBody>
+          <a:bodyPr wrap="square" lIns="0" tIns="0" rIns="0" bIns="0" rtlCol="0" anchor="ctr"/>
+          <a:lstStyle/>
+          <a:p>
+            <a:pPr algn="ctr" indent="0" marL="0">
+              <a:buNone/>
+            </a:pPr>
+            <a:r>
+              <a:rPr lang="en-US" sz="1400" b="1" dirty="0">
+                <a:solidFill>
+                  <a:srgbClr val="0D9488"/>
+                </a:solidFill>
+                <a:latin typeface="Trebuchet MS" pitchFamily="34" charset="0"/>
+                <a:ea typeface="Trebuchet MS" pitchFamily="34" charset="-122"/>
+                <a:cs typeface="Trebuchet MS" pitchFamily="34" charset="-120"/>
+              </a:rPr>
+              <a:t>ci</a:t>
+            </a:r>
+            <a:endParaRPr lang="en-US" sz="1400" dirty="0"/>
+          </a:p>
+        </p:txBody>
+      </p:sp>
+      <p:sp>
+        <p:nvSpPr>
+          <p:cNvPr id="34" name="Text 32"/>
+          <p:cNvSpPr/>
+          <p:nvPr/>
+        </p:nvSpPr>
+        <p:spPr>
+          <a:xfrm>
+            <a:off x="5806440" y="3364992"/>
+            <a:ext cx="76200" cy="475488"/>
+          </a:xfrm>
+          <a:prstGeom prst="rect">
+            <a:avLst/>
+          </a:prstGeom>
+          <a:noFill/>
+          <a:ln/>
+        </p:spPr>
+        <p:txBody>
+          <a:bodyPr wrap="square" lIns="0" tIns="0" rIns="0" bIns="0" rtlCol="0" anchor="ctr"/>
+          <a:lstStyle/>
+          <a:p>
+            <a:pPr algn="ctr" indent="0" marL="0">
+              <a:buNone/>
+            </a:pPr>
+            <a:r>
+              <a:rPr lang="en-US" sz="1600" b="1" dirty="0">
+                <a:solidFill>
+                  <a:srgbClr val="0D9488"/>
+                </a:solidFill>
+                <a:latin typeface="Trebuchet MS" pitchFamily="34" charset="0"/>
+                <a:ea typeface="Trebuchet MS" pitchFamily="34" charset="-122"/>
+                <a:cs typeface="Trebuchet MS" pitchFamily="34" charset="-120"/>
+              </a:rPr>
+              <a:t>·</a:t>
+            </a:r>
+            <a:endParaRPr lang="en-US" sz="1600" dirty="0"/>
+          </a:p>
+        </p:txBody>
+      </p:sp>
+      <p:sp>
+        <p:nvSpPr>
+          <p:cNvPr id="35" name="Shape 33"/>
+          <p:cNvSpPr/>
+          <p:nvPr/>
+        </p:nvSpPr>
+        <p:spPr>
+          <a:xfrm>
+            <a:off x="5882640" y="3364992"/>
+            <a:ext cx="1225296" cy="475488"/>
+          </a:xfrm>
+          <a:prstGeom prst="rect">
+            <a:avLst>
+              <a:gd name="adj" fmla="val 9615"/>
+            </a:avLst>
+          </a:prstGeom>
+          <a:solidFill>
+            <a:srgbClr val="FFFFFF"/>
+          </a:solidFill>
+          <a:ln w="12700">
+            <a:solidFill>
+              <a:srgbClr val="0D9488"/>
+            </a:solidFill>
+            <a:prstDash val="solid"/>
+          </a:ln>
+        </p:spPr>
+      </p:sp>
+      <p:sp>
+        <p:nvSpPr>
+          <p:cNvPr id="36" name="Text 34"/>
+          <p:cNvSpPr/>
+          <p:nvPr/>
+        </p:nvSpPr>
+        <p:spPr>
+          <a:xfrm>
+            <a:off x="5882640" y="3364992"/>
+            <a:ext cx="1225296" cy="475488"/>
+          </a:xfrm>
+          <a:prstGeom prst="rect">
+            <a:avLst/>
+          </a:prstGeom>
+          <a:noFill/>
+          <a:ln/>
+        </p:spPr>
+        <p:txBody>
+          <a:bodyPr wrap="square" lIns="0" tIns="0" rIns="0" bIns="0" rtlCol="0" anchor="ctr"/>
+          <a:lstStyle/>
+          <a:p>
+            <a:pPr algn="ctr" indent="0" marL="0">
+              <a:buNone/>
+            </a:pPr>
+            <a:r>
+              <a:rPr lang="en-US" sz="1400" b="1" dirty="0">
+                <a:solidFill>
+                  <a:srgbClr val="0D9488"/>
+                </a:solidFill>
+                <a:latin typeface="Trebuchet MS" pitchFamily="34" charset="0"/>
+                <a:ea typeface="Trebuchet MS" pitchFamily="34" charset="-122"/>
+                <a:cs typeface="Trebuchet MS" pitchFamily="34" charset="-120"/>
+              </a:rPr>
+              <a:t>pa</a:t>
+            </a:r>
+            <a:endParaRPr lang="en-US" sz="1400" dirty="0"/>
+          </a:p>
+        </p:txBody>
+      </p:sp>
+      <p:sp>
+        <p:nvSpPr>
+          <p:cNvPr id="37" name="Text 35"/>
+          <p:cNvSpPr/>
+          <p:nvPr/>
+        </p:nvSpPr>
+        <p:spPr>
+          <a:xfrm>
+            <a:off x="7107936" y="3364992"/>
+            <a:ext cx="76200" cy="475488"/>
+          </a:xfrm>
+          <a:prstGeom prst="rect">
+            <a:avLst/>
+          </a:prstGeom>
+          <a:noFill/>
+          <a:ln/>
+        </p:spPr>
+        <p:txBody>
+          <a:bodyPr wrap="square" lIns="0" tIns="0" rIns="0" bIns="0" rtlCol="0" anchor="ctr"/>
+          <a:lstStyle/>
+          <a:p>
+            <a:pPr algn="ctr" indent="0" marL="0">
+              <a:buNone/>
+            </a:pPr>
+            <a:r>
+              <a:rPr lang="en-US" sz="1600" b="1" dirty="0">
+                <a:solidFill>
+                  <a:srgbClr val="0D9488"/>
+                </a:solidFill>
+                <a:latin typeface="Trebuchet MS" pitchFamily="34" charset="0"/>
+                <a:ea typeface="Trebuchet MS" pitchFamily="34" charset="-122"/>
+                <a:cs typeface="Trebuchet MS" pitchFamily="34" charset="-120"/>
+              </a:rPr>
+              <a:t>·</a:t>
+            </a:r>
+            <a:endParaRPr lang="en-US" sz="1600" dirty="0"/>
+          </a:p>
+        </p:txBody>
+      </p:sp>
+      <p:sp>
+        <p:nvSpPr>
+          <p:cNvPr id="38" name="Shape 36"/>
+          <p:cNvSpPr/>
+          <p:nvPr/>
+        </p:nvSpPr>
+        <p:spPr>
+          <a:xfrm>
+            <a:off x="7184136" y="3364992"/>
+            <a:ext cx="1225296" cy="475488"/>
+          </a:xfrm>
+          <a:prstGeom prst="rect">
+            <a:avLst>
+              <a:gd name="adj" fmla="val 9615"/>
+            </a:avLst>
+          </a:prstGeom>
+          <a:solidFill>
+            <a:srgbClr val="FFFFFF"/>
+          </a:solidFill>
+          <a:ln w="12700">
+            <a:solidFill>
+              <a:srgbClr val="0D9488"/>
+            </a:solidFill>
+            <a:prstDash val="solid"/>
+          </a:ln>
+        </p:spPr>
+      </p:sp>
+      <p:sp>
+        <p:nvSpPr>
+          <p:cNvPr id="39" name="Text 37"/>
+          <p:cNvSpPr/>
+          <p:nvPr/>
+        </p:nvSpPr>
+        <p:spPr>
+          <a:xfrm>
+            <a:off x="7184136" y="3364992"/>
+            <a:ext cx="1225296" cy="475488"/>
+          </a:xfrm>
+          <a:prstGeom prst="rect">
+            <a:avLst/>
+          </a:prstGeom>
+          <a:noFill/>
+          <a:ln/>
+        </p:spPr>
+        <p:txBody>
+          <a:bodyPr wrap="square" lIns="0" tIns="0" rIns="0" bIns="0" rtlCol="0" anchor="ctr"/>
+          <a:lstStyle/>
+          <a:p>
+            <a:pPr algn="ctr" indent="0" marL="0">
+              <a:buNone/>
+            </a:pPr>
+            <a:r>
+              <a:rPr lang="en-US" sz="1400" b="1" dirty="0">
+                <a:solidFill>
+                  <a:srgbClr val="0D9488"/>
+                </a:solidFill>
+                <a:latin typeface="Trebuchet MS" pitchFamily="34" charset="0"/>
+                <a:ea typeface="Trebuchet MS" pitchFamily="34" charset="-122"/>
+                <a:cs typeface="Trebuchet MS" pitchFamily="34" charset="-120"/>
+              </a:rPr>
+              <a:t>tion</a:t>
+            </a:r>
+            <a:endParaRPr lang="en-US" sz="1400" dirty="0"/>
+          </a:p>
+        </p:txBody>
+      </p:sp>
+      <p:sp>
+        <p:nvSpPr>
+          <p:cNvPr id="40" name="Shape 38"/>
+          <p:cNvSpPr/>
+          <p:nvPr/>
+        </p:nvSpPr>
+        <p:spPr>
+          <a:xfrm>
+            <a:off x="365760" y="4096512"/>
+            <a:ext cx="1371600" cy="804672"/>
+          </a:xfrm>
+          <a:prstGeom prst="rect">
+            <a:avLst>
+              <a:gd name="adj" fmla="val 6818"/>
+            </a:avLst>
+          </a:prstGeom>
+          <a:solidFill>
+            <a:srgbClr val="E2E8F0"/>
+          </a:solidFill>
+          <a:ln w="12700">
+            <a:solidFill>
+              <a:srgbClr val="E2E8F0"/>
+            </a:solidFill>
+            <a:prstDash val="solid"/>
+          </a:ln>
+        </p:spPr>
+      </p:sp>
+      <p:sp>
+        <p:nvSpPr>
+          <p:cNvPr id="41" name="Text 39"/>
+          <p:cNvSpPr/>
+          <p:nvPr/>
+        </p:nvSpPr>
+        <p:spPr>
+          <a:xfrm>
+            <a:off x="365760" y="4096512"/>
+            <a:ext cx="1371600" cy="804672"/>
+          </a:xfrm>
+          <a:prstGeom prst="rect">
+            <a:avLst/>
+          </a:prstGeom>
+          <a:noFill/>
+          <a:ln/>
+        </p:spPr>
+        <p:txBody>
+          <a:bodyPr wrap="square" lIns="0" tIns="0" rIns="0" bIns="0" rtlCol="0" anchor="ctr"/>
+          <a:lstStyle/>
+          <a:p>
+            <a:pPr algn="ctr" indent="0" marL="0">
+              <a:buNone/>
+            </a:pPr>
+            <a:r>
+              <a:rPr lang="en-US" sz="1100" b="1" dirty="0">
+                <a:solidFill>
+                  <a:srgbClr val="475569"/>
+                </a:solidFill>
+                <a:latin typeface="Trebuchet MS" pitchFamily="34" charset="0"/>
+                <a:ea typeface="Trebuchet MS" pitchFamily="34" charset="-122"/>
+                <a:cs typeface="Trebuchet MS" pitchFamily="34" charset="-120"/>
+              </a:rPr>
+              <a:t>Phonemes</a:t>
+            </a:r>
+            <a:endParaRPr lang="en-US" sz="1100" dirty="0"/>
+          </a:p>
+        </p:txBody>
+      </p:sp>
+      <p:sp>
+        <p:nvSpPr>
+          <p:cNvPr id="42" name="Shape 40"/>
+          <p:cNvSpPr/>
+          <p:nvPr/>
+        </p:nvSpPr>
+        <p:spPr>
+          <a:xfrm>
+            <a:off x="1874520" y="4096512"/>
+            <a:ext cx="6903720" cy="804672"/>
+          </a:xfrm>
+          <a:prstGeom prst="rect">
+            <a:avLst>
+              <a:gd name="adj" fmla="val 6818"/>
+            </a:avLst>
+          </a:prstGeom>
+          <a:solidFill>
+            <a:srgbClr val="FCE7F3"/>
+          </a:solidFill>
+          <a:ln w="12700">
+            <a:solidFill>
+              <a:srgbClr val="DB2777"/>
+            </a:solidFill>
+            <a:prstDash val="solid"/>
+          </a:ln>
+        </p:spPr>
+      </p:sp>
+      <p:sp>
+        <p:nvSpPr>
+          <p:cNvPr id="43" name="Shape 41"/>
+          <p:cNvSpPr/>
+          <p:nvPr/>
+        </p:nvSpPr>
+        <p:spPr>
+          <a:xfrm>
+            <a:off x="1952244" y="4169664"/>
+            <a:ext cx="543652" cy="384048"/>
+          </a:xfrm>
+          <a:prstGeom prst="rect">
+            <a:avLst>
+              <a:gd name="adj" fmla="val 9524"/>
+            </a:avLst>
+          </a:prstGeom>
+          <a:solidFill>
+            <a:srgbClr val="FFFFFF"/>
+          </a:solidFill>
+          <a:ln w="12700">
+            <a:solidFill>
+              <a:srgbClr val="DB2777"/>
+            </a:solidFill>
+            <a:prstDash val="solid"/>
+          </a:ln>
+        </p:spPr>
+      </p:sp>
+      <p:sp>
+        <p:nvSpPr>
+          <p:cNvPr id="44" name="Text 42"/>
+          <p:cNvSpPr/>
+          <p:nvPr/>
+        </p:nvSpPr>
+        <p:spPr>
+          <a:xfrm>
+            <a:off x="1952244" y="4169664"/>
+            <a:ext cx="543652" cy="384048"/>
+          </a:xfrm>
+          <a:prstGeom prst="rect">
+            <a:avLst/>
+          </a:prstGeom>
+          <a:noFill/>
+          <a:ln/>
+        </p:spPr>
+        <p:txBody>
+          <a:bodyPr wrap="square" lIns="0" tIns="0" rIns="0" bIns="0" rtlCol="0" anchor="ctr"/>
+          <a:lstStyle/>
+          <a:p>
+            <a:pPr algn="ctr" indent="0" marL="0">
+              <a:buNone/>
+            </a:pPr>
+            <a:r>
+              <a:rPr lang="en-US" sz="900" b="1" dirty="0">
+                <a:solidFill>
+                  <a:srgbClr val="9D174D"/>
+                </a:solidFill>
+                <a:latin typeface="Trebuchet MS" pitchFamily="34" charset="0"/>
+                <a:ea typeface="Trebuchet MS" pitchFamily="34" charset="-122"/>
+                <a:cs typeface="Trebuchet MS" pitchFamily="34" charset="-120"/>
+              </a:rPr>
+              <a:t>p</a:t>
+            </a:r>
+            <a:endParaRPr lang="en-US" sz="900" dirty="0"/>
+          </a:p>
+        </p:txBody>
+      </p:sp>
+      <p:sp>
+        <p:nvSpPr>
+          <p:cNvPr id="45" name="Shape 43"/>
+          <p:cNvSpPr/>
+          <p:nvPr/>
+        </p:nvSpPr>
+        <p:spPr>
+          <a:xfrm>
+            <a:off x="2546188" y="4169664"/>
+            <a:ext cx="543652" cy="384048"/>
+          </a:xfrm>
+          <a:prstGeom prst="rect">
+            <a:avLst>
+              <a:gd name="adj" fmla="val 9524"/>
+            </a:avLst>
+          </a:prstGeom>
+          <a:solidFill>
+            <a:srgbClr val="FFFFFF"/>
+          </a:solidFill>
+          <a:ln w="12700">
+            <a:solidFill>
+              <a:srgbClr val="DB2777"/>
+            </a:solidFill>
+            <a:prstDash val="solid"/>
+          </a:ln>
+        </p:spPr>
+      </p:sp>
+      <p:sp>
+        <p:nvSpPr>
+          <p:cNvPr id="46" name="Text 44"/>
+          <p:cNvSpPr/>
+          <p:nvPr/>
+        </p:nvSpPr>
+        <p:spPr>
+          <a:xfrm>
+            <a:off x="2546188" y="4169664"/>
+            <a:ext cx="543652" cy="384048"/>
+          </a:xfrm>
+          <a:prstGeom prst="rect">
+            <a:avLst/>
+          </a:prstGeom>
+          <a:noFill/>
+          <a:ln/>
+        </p:spPr>
+        <p:txBody>
+          <a:bodyPr wrap="square" lIns="0" tIns="0" rIns="0" bIns="0" rtlCol="0" anchor="ctr"/>
+          <a:lstStyle/>
+          <a:p>
+            <a:pPr algn="ctr" indent="0" marL="0">
+              <a:buNone/>
+            </a:pPr>
+            <a:r>
+              <a:rPr lang="en-US" sz="900" b="1" dirty="0">
+                <a:solidFill>
+                  <a:srgbClr val="9D174D"/>
+                </a:solidFill>
+                <a:latin typeface="Trebuchet MS" pitchFamily="34" charset="0"/>
+                <a:ea typeface="Trebuchet MS" pitchFamily="34" charset="-122"/>
+                <a:cs typeface="Trebuchet MS" pitchFamily="34" charset="-120"/>
+              </a:rPr>
+              <a:t>ar</a:t>
+            </a:r>
+            <a:endParaRPr lang="en-US" sz="900" dirty="0"/>
+          </a:p>
+        </p:txBody>
+      </p:sp>
+      <p:sp>
+        <p:nvSpPr>
+          <p:cNvPr id="47" name="Shape 45"/>
+          <p:cNvSpPr/>
+          <p:nvPr/>
+        </p:nvSpPr>
+        <p:spPr>
+          <a:xfrm>
+            <a:off x="3140133" y="4169664"/>
+            <a:ext cx="543652" cy="384048"/>
+          </a:xfrm>
+          <a:prstGeom prst="rect">
+            <a:avLst>
+              <a:gd name="adj" fmla="val 9524"/>
+            </a:avLst>
+          </a:prstGeom>
+          <a:solidFill>
+            <a:srgbClr val="FFFFFF"/>
+          </a:solidFill>
+          <a:ln w="12700">
+            <a:solidFill>
+              <a:srgbClr val="DB2777"/>
+            </a:solidFill>
+            <a:prstDash val="solid"/>
+          </a:ln>
+        </p:spPr>
+      </p:sp>
+      <p:sp>
+        <p:nvSpPr>
+          <p:cNvPr id="48" name="Text 46"/>
+          <p:cNvSpPr/>
+          <p:nvPr/>
+        </p:nvSpPr>
+        <p:spPr>
+          <a:xfrm>
+            <a:off x="3140133" y="4169664"/>
+            <a:ext cx="543652" cy="384048"/>
+          </a:xfrm>
+          <a:prstGeom prst="rect">
+            <a:avLst/>
+          </a:prstGeom>
+          <a:noFill/>
+          <a:ln/>
+        </p:spPr>
+        <p:txBody>
+          <a:bodyPr wrap="square" lIns="0" tIns="0" rIns="0" bIns="0" rtlCol="0" anchor="ctr"/>
+          <a:lstStyle/>
+          <a:p>
+            <a:pPr algn="ctr" indent="0" marL="0">
+              <a:buNone/>
+            </a:pPr>
+            <a:r>
+              <a:rPr lang="en-US" sz="900" b="1" dirty="0">
+                <a:solidFill>
+                  <a:srgbClr val="9D174D"/>
+                </a:solidFill>
+                <a:latin typeface="Trebuchet MS" pitchFamily="34" charset="0"/>
+                <a:ea typeface="Trebuchet MS" pitchFamily="34" charset="-122"/>
+                <a:cs typeface="Trebuchet MS" pitchFamily="34" charset="-120"/>
+              </a:rPr>
+              <a:t>t</a:t>
+            </a:r>
+            <a:endParaRPr lang="en-US" sz="900" dirty="0"/>
+          </a:p>
+        </p:txBody>
+      </p:sp>
+      <p:sp>
+        <p:nvSpPr>
+          <p:cNvPr id="49" name="Shape 47"/>
+          <p:cNvSpPr/>
+          <p:nvPr/>
+        </p:nvSpPr>
+        <p:spPr>
+          <a:xfrm>
+            <a:off x="3734077" y="4169664"/>
+            <a:ext cx="543652" cy="384048"/>
+          </a:xfrm>
+          <a:prstGeom prst="rect">
+            <a:avLst>
+              <a:gd name="adj" fmla="val 9524"/>
+            </a:avLst>
+          </a:prstGeom>
+          <a:solidFill>
+            <a:srgbClr val="FFFFFF"/>
+          </a:solidFill>
+          <a:ln w="12700">
+            <a:solidFill>
+              <a:srgbClr val="DB2777"/>
+            </a:solidFill>
+            <a:prstDash val="solid"/>
+          </a:ln>
+        </p:spPr>
+      </p:sp>
+      <p:sp>
+        <p:nvSpPr>
+          <p:cNvPr id="50" name="Text 48"/>
+          <p:cNvSpPr/>
+          <p:nvPr/>
+        </p:nvSpPr>
+        <p:spPr>
+          <a:xfrm>
+            <a:off x="3734077" y="4169664"/>
+            <a:ext cx="543652" cy="384048"/>
+          </a:xfrm>
+          <a:prstGeom prst="rect">
+            <a:avLst/>
+          </a:prstGeom>
+          <a:noFill/>
+          <a:ln/>
+        </p:spPr>
+        <p:txBody>
+          <a:bodyPr wrap="square" lIns="0" tIns="0" rIns="0" bIns="0" rtlCol="0" anchor="ctr"/>
+          <a:lstStyle/>
+          <a:p>
+            <a:pPr algn="ctr" indent="0" marL="0">
+              <a:buNone/>
+            </a:pPr>
+            <a:r>
+              <a:rPr lang="en-US" sz="900" b="1" dirty="0">
+                <a:solidFill>
+                  <a:srgbClr val="9D174D"/>
+                </a:solidFill>
+                <a:latin typeface="Trebuchet MS" pitchFamily="34" charset="0"/>
+                <a:ea typeface="Trebuchet MS" pitchFamily="34" charset="-122"/>
+                <a:cs typeface="Trebuchet MS" pitchFamily="34" charset="-120"/>
+              </a:rPr>
+              <a:t>i</a:t>
+            </a:r>
+            <a:endParaRPr lang="en-US" sz="900" dirty="0"/>
+          </a:p>
+        </p:txBody>
+      </p:sp>
+      <p:sp>
+        <p:nvSpPr>
+          <p:cNvPr id="51" name="Shape 49"/>
+          <p:cNvSpPr/>
+          <p:nvPr/>
+        </p:nvSpPr>
+        <p:spPr>
+          <a:xfrm>
+            <a:off x="4328021" y="4169664"/>
+            <a:ext cx="543652" cy="384048"/>
+          </a:xfrm>
+          <a:prstGeom prst="rect">
+            <a:avLst>
+              <a:gd name="adj" fmla="val 9524"/>
+            </a:avLst>
+          </a:prstGeom>
+          <a:solidFill>
+            <a:srgbClr val="FFFFFF"/>
+          </a:solidFill>
+          <a:ln w="12700">
+            <a:solidFill>
+              <a:srgbClr val="DB2777"/>
+            </a:solidFill>
+            <a:prstDash val="solid"/>
+          </a:ln>
+        </p:spPr>
+      </p:sp>
+      <p:sp>
+        <p:nvSpPr>
+          <p:cNvPr id="52" name="Text 50"/>
+          <p:cNvSpPr/>
+          <p:nvPr/>
+        </p:nvSpPr>
+        <p:spPr>
+          <a:xfrm>
+            <a:off x="4328021" y="4169664"/>
+            <a:ext cx="543652" cy="384048"/>
+          </a:xfrm>
+          <a:prstGeom prst="rect">
+            <a:avLst/>
+          </a:prstGeom>
+          <a:noFill/>
+          <a:ln/>
+        </p:spPr>
+        <p:txBody>
+          <a:bodyPr wrap="square" lIns="0" tIns="0" rIns="0" bIns="0" rtlCol="0" anchor="ctr"/>
+          <a:lstStyle/>
+          <a:p>
+            <a:pPr algn="ctr" indent="0" marL="0">
+              <a:buNone/>
+            </a:pPr>
+            <a:r>
+              <a:rPr lang="en-US" sz="900" b="1" dirty="0">
+                <a:solidFill>
+                  <a:srgbClr val="9D174D"/>
+                </a:solidFill>
+                <a:latin typeface="Trebuchet MS" pitchFamily="34" charset="0"/>
+                <a:ea typeface="Trebuchet MS" pitchFamily="34" charset="-122"/>
+                <a:cs typeface="Trebuchet MS" pitchFamily="34" charset="-120"/>
+              </a:rPr>
+              <a:t>c</a:t>
+            </a:r>
+            <a:endParaRPr lang="en-US" sz="900" dirty="0"/>
+          </a:p>
+        </p:txBody>
+      </p:sp>
+      <p:sp>
+        <p:nvSpPr>
+          <p:cNvPr id="53" name="Text 51"/>
+          <p:cNvSpPr/>
+          <p:nvPr/>
+        </p:nvSpPr>
+        <p:spPr>
+          <a:xfrm>
+            <a:off x="4328021" y="4572000"/>
+            <a:ext cx="543652" cy="219456"/>
           </a:xfrm>
           <a:prstGeom prst="rect">
             <a:avLst/>
@@ -23664,232 +24369,232 @@
               <a:buNone/>
             </a:pPr>
             <a:r>
-              <a:rPr lang="en-US" sz="850" dirty="0">
-                <a:solidFill>
-                  <a:srgbClr val="475569"/>
+              <a:rPr lang="en-US" sz="750" i="1" dirty="0">
+                <a:solidFill>
+                  <a:srgbClr val="94A3B8"/>
                 </a:solidFill>
                 <a:latin typeface="Calibri" pitchFamily="34" charset="0"/>
                 <a:ea typeface="Calibri" pitchFamily="34" charset="-122"/>
                 <a:cs typeface="Calibri" pitchFamily="34" charset="-120"/>
               </a:rPr>
-              <a:t>more than one (plural)</a:t>
-            </a:r>
-            <a:endParaRPr lang="en-US" sz="850" dirty="0"/>
-          </a:p>
-        </p:txBody>
-      </p:sp>
-      <p:sp>
-        <p:nvSpPr>
-          <p:cNvPr id="26" name="Shape 24"/>
-          <p:cNvSpPr/>
-          <p:nvPr/>
-        </p:nvSpPr>
-        <p:spPr>
-          <a:xfrm>
-            <a:off x="365760" y="3273552"/>
-            <a:ext cx="1371600" cy="658368"/>
+              <a:t>/s/</a:t>
+            </a:r>
+            <a:endParaRPr lang="en-US" sz="750" dirty="0"/>
+          </a:p>
+        </p:txBody>
+      </p:sp>
+      <p:sp>
+        <p:nvSpPr>
+          <p:cNvPr id="54" name="Shape 52"/>
+          <p:cNvSpPr/>
+          <p:nvPr/>
+        </p:nvSpPr>
+        <p:spPr>
+          <a:xfrm>
+            <a:off x="4921966" y="4169664"/>
+            <a:ext cx="543652" cy="384048"/>
           </a:xfrm>
           <a:prstGeom prst="rect">
             <a:avLst>
-              <a:gd name="adj" fmla="val 8333"/>
+              <a:gd name="adj" fmla="val 9524"/>
             </a:avLst>
           </a:prstGeom>
           <a:solidFill>
-            <a:srgbClr val="E2E8F0"/>
-          </a:solidFill>
-          <a:ln w="12700">
-            <a:solidFill>
-              <a:srgbClr val="E2E8F0"/>
-            </a:solidFill>
-            <a:prstDash val="solid"/>
-          </a:ln>
-        </p:spPr>
-      </p:sp>
-      <p:sp>
-        <p:nvSpPr>
-          <p:cNvPr id="27" name="Text 25"/>
-          <p:cNvSpPr/>
-          <p:nvPr/>
-        </p:nvSpPr>
-        <p:spPr>
-          <a:xfrm>
-            <a:off x="365760" y="3273552"/>
-            <a:ext cx="1371600" cy="658368"/>
-          </a:xfrm>
-          <a:prstGeom prst="rect">
-            <a:avLst/>
-          </a:prstGeom>
-          <a:noFill/>
-          <a:ln/>
-        </p:spPr>
-        <p:txBody>
-          <a:bodyPr wrap="square" lIns="0" tIns="0" rIns="0" bIns="0" rtlCol="0" anchor="ctr"/>
-          <a:lstStyle/>
-          <a:p>
-            <a:pPr algn="ctr" indent="0" marL="0">
-              <a:buNone/>
-            </a:pPr>
-            <a:r>
-              <a:rPr lang="en-US" sz="1100" b="1" dirty="0">
-                <a:solidFill>
-                  <a:srgbClr val="475569"/>
+            <a:srgbClr val="FFFFFF"/>
+          </a:solidFill>
+          <a:ln w="12700">
+            <a:solidFill>
+              <a:srgbClr val="DB2777"/>
+            </a:solidFill>
+            <a:prstDash val="solid"/>
+          </a:ln>
+        </p:spPr>
+      </p:sp>
+      <p:sp>
+        <p:nvSpPr>
+          <p:cNvPr id="55" name="Text 53"/>
+          <p:cNvSpPr/>
+          <p:nvPr/>
+        </p:nvSpPr>
+        <p:spPr>
+          <a:xfrm>
+            <a:off x="4921966" y="4169664"/>
+            <a:ext cx="543652" cy="384048"/>
+          </a:xfrm>
+          <a:prstGeom prst="rect">
+            <a:avLst/>
+          </a:prstGeom>
+          <a:noFill/>
+          <a:ln/>
+        </p:spPr>
+        <p:txBody>
+          <a:bodyPr wrap="square" lIns="0" tIns="0" rIns="0" bIns="0" rtlCol="0" anchor="ctr"/>
+          <a:lstStyle/>
+          <a:p>
+            <a:pPr algn="ctr" indent="0" marL="0">
+              <a:buNone/>
+            </a:pPr>
+            <a:r>
+              <a:rPr lang="en-US" sz="900" b="1" dirty="0">
+                <a:solidFill>
+                  <a:srgbClr val="9D174D"/>
                 </a:solidFill>
                 <a:latin typeface="Trebuchet MS" pitchFamily="34" charset="0"/>
                 <a:ea typeface="Trebuchet MS" pitchFamily="34" charset="-122"/>
                 <a:cs typeface="Trebuchet MS" pitchFamily="34" charset="-120"/>
               </a:rPr>
-              <a:t>Syllables</a:t>
-            </a:r>
-            <a:endParaRPr lang="en-US" sz="1100" dirty="0"/>
-          </a:p>
-        </p:txBody>
-      </p:sp>
-      <p:sp>
-        <p:nvSpPr>
-          <p:cNvPr id="28" name="Shape 26"/>
-          <p:cNvSpPr/>
-          <p:nvPr/>
-        </p:nvSpPr>
-        <p:spPr>
-          <a:xfrm>
-            <a:off x="1874520" y="3273552"/>
-            <a:ext cx="6903720" cy="658368"/>
+              <a:t>i</a:t>
+            </a:r>
+            <a:endParaRPr lang="en-US" sz="900" dirty="0"/>
+          </a:p>
+        </p:txBody>
+      </p:sp>
+      <p:sp>
+        <p:nvSpPr>
+          <p:cNvPr id="56" name="Shape 54"/>
+          <p:cNvSpPr/>
+          <p:nvPr/>
+        </p:nvSpPr>
+        <p:spPr>
+          <a:xfrm>
+            <a:off x="5515910" y="4169664"/>
+            <a:ext cx="543652" cy="384048"/>
           </a:xfrm>
           <a:prstGeom prst="rect">
             <a:avLst>
-              <a:gd name="adj" fmla="val 8333"/>
+              <a:gd name="adj" fmla="val 9524"/>
             </a:avLst>
           </a:prstGeom>
           <a:solidFill>
-            <a:srgbClr val="CCFBF1"/>
-          </a:solidFill>
-          <a:ln w="12700">
-            <a:solidFill>
-              <a:srgbClr val="0D9488"/>
-            </a:solidFill>
-            <a:prstDash val="solid"/>
-          </a:ln>
-        </p:spPr>
-      </p:sp>
-      <p:sp>
-        <p:nvSpPr>
-          <p:cNvPr id="29" name="Shape 27"/>
-          <p:cNvSpPr/>
-          <p:nvPr/>
-        </p:nvSpPr>
-        <p:spPr>
-          <a:xfrm>
-            <a:off x="1975104" y="3364992"/>
-            <a:ext cx="1554480" cy="475488"/>
-          </a:xfrm>
-          <a:prstGeom prst="rect">
-            <a:avLst>
-              <a:gd name="adj" fmla="val 9615"/>
-            </a:avLst>
-          </a:prstGeom>
-          <a:solidFill>
             <a:srgbClr val="FFFFFF"/>
           </a:solidFill>
           <a:ln w="12700">
             <a:solidFill>
-              <a:srgbClr val="0D9488"/>
-            </a:solidFill>
-            <a:prstDash val="solid"/>
-          </a:ln>
-        </p:spPr>
-      </p:sp>
-      <p:sp>
-        <p:nvSpPr>
-          <p:cNvPr id="30" name="Text 28"/>
-          <p:cNvSpPr/>
-          <p:nvPr/>
-        </p:nvSpPr>
-        <p:spPr>
-          <a:xfrm>
-            <a:off x="1975104" y="3364992"/>
-            <a:ext cx="1554480" cy="475488"/>
-          </a:xfrm>
-          <a:prstGeom prst="rect">
-            <a:avLst/>
-          </a:prstGeom>
-          <a:noFill/>
-          <a:ln/>
-        </p:spPr>
-        <p:txBody>
-          <a:bodyPr wrap="square" lIns="0" tIns="0" rIns="0" bIns="0" rtlCol="0" anchor="ctr"/>
-          <a:lstStyle/>
-          <a:p>
-            <a:pPr algn="ctr" indent="0" marL="0">
-              <a:buNone/>
-            </a:pPr>
-            <a:r>
-              <a:rPr lang="en-US" sz="1400" b="1" dirty="0">
-                <a:solidFill>
-                  <a:srgbClr val="0D9488"/>
+              <a:srgbClr val="DB2777"/>
+            </a:solidFill>
+            <a:prstDash val="solid"/>
+          </a:ln>
+        </p:spPr>
+      </p:sp>
+      <p:sp>
+        <p:nvSpPr>
+          <p:cNvPr id="57" name="Text 55"/>
+          <p:cNvSpPr/>
+          <p:nvPr/>
+        </p:nvSpPr>
+        <p:spPr>
+          <a:xfrm>
+            <a:off x="5515910" y="4169664"/>
+            <a:ext cx="543652" cy="384048"/>
+          </a:xfrm>
+          <a:prstGeom prst="rect">
+            <a:avLst/>
+          </a:prstGeom>
+          <a:noFill/>
+          <a:ln/>
+        </p:spPr>
+        <p:txBody>
+          <a:bodyPr wrap="square" lIns="0" tIns="0" rIns="0" bIns="0" rtlCol="0" anchor="ctr"/>
+          <a:lstStyle/>
+          <a:p>
+            <a:pPr algn="ctr" indent="0" marL="0">
+              <a:buNone/>
+            </a:pPr>
+            <a:r>
+              <a:rPr lang="en-US" sz="900" b="1" dirty="0">
+                <a:solidFill>
+                  <a:srgbClr val="9D174D"/>
                 </a:solidFill>
                 <a:latin typeface="Trebuchet MS" pitchFamily="34" charset="0"/>
                 <a:ea typeface="Trebuchet MS" pitchFamily="34" charset="-122"/>
                 <a:cs typeface="Trebuchet MS" pitchFamily="34" charset="-120"/>
               </a:rPr>
-              <a:t>par</a:t>
-            </a:r>
-            <a:endParaRPr lang="en-US" sz="1400" dirty="0"/>
-          </a:p>
-        </p:txBody>
-      </p:sp>
-      <p:sp>
-        <p:nvSpPr>
-          <p:cNvPr id="31" name="Text 29"/>
-          <p:cNvSpPr/>
-          <p:nvPr/>
-        </p:nvSpPr>
-        <p:spPr>
-          <a:xfrm>
-            <a:off x="3529584" y="3364992"/>
-            <a:ext cx="73152" cy="475488"/>
-          </a:xfrm>
-          <a:prstGeom prst="rect">
-            <a:avLst/>
-          </a:prstGeom>
-          <a:noFill/>
-          <a:ln/>
-        </p:spPr>
-        <p:txBody>
-          <a:bodyPr wrap="square" lIns="0" tIns="0" rIns="0" bIns="0" rtlCol="0" anchor="ctr"/>
-          <a:lstStyle/>
-          <a:p>
-            <a:pPr algn="ctr" indent="0" marL="0">
-              <a:buNone/>
-            </a:pPr>
-            <a:r>
-              <a:rPr lang="en-US" sz="1600" b="1" dirty="0">
-                <a:solidFill>
-                  <a:srgbClr val="0D9488"/>
+              <a:t>p</a:t>
+            </a:r>
+            <a:endParaRPr lang="en-US" sz="900" dirty="0"/>
+          </a:p>
+        </p:txBody>
+      </p:sp>
+      <p:sp>
+        <p:nvSpPr>
+          <p:cNvPr id="58" name="Shape 56"/>
+          <p:cNvSpPr/>
+          <p:nvPr/>
+        </p:nvSpPr>
+        <p:spPr>
+          <a:xfrm>
+            <a:off x="6109855" y="4169664"/>
+            <a:ext cx="543652" cy="384048"/>
+          </a:xfrm>
+          <a:prstGeom prst="rect">
+            <a:avLst>
+              <a:gd name="adj" fmla="val 9524"/>
+            </a:avLst>
+          </a:prstGeom>
+          <a:solidFill>
+            <a:srgbClr val="FFFFFF"/>
+          </a:solidFill>
+          <a:ln w="12700">
+            <a:solidFill>
+              <a:srgbClr val="DB2777"/>
+            </a:solidFill>
+            <a:prstDash val="solid"/>
+          </a:ln>
+        </p:spPr>
+      </p:sp>
+      <p:sp>
+        <p:nvSpPr>
+          <p:cNvPr id="59" name="Text 57"/>
+          <p:cNvSpPr/>
+          <p:nvPr/>
+        </p:nvSpPr>
+        <p:spPr>
+          <a:xfrm>
+            <a:off x="6109855" y="4169664"/>
+            <a:ext cx="543652" cy="384048"/>
+          </a:xfrm>
+          <a:prstGeom prst="rect">
+            <a:avLst/>
+          </a:prstGeom>
+          <a:noFill/>
+          <a:ln/>
+        </p:spPr>
+        <p:txBody>
+          <a:bodyPr wrap="square" lIns="0" tIns="0" rIns="0" bIns="0" rtlCol="0" anchor="ctr"/>
+          <a:lstStyle/>
+          <a:p>
+            <a:pPr algn="ctr" indent="0" marL="0">
+              <a:buNone/>
+            </a:pPr>
+            <a:r>
+              <a:rPr lang="en-US" sz="900" b="1" dirty="0">
+                <a:solidFill>
+                  <a:srgbClr val="9D174D"/>
                 </a:solidFill>
                 <a:latin typeface="Trebuchet MS" pitchFamily="34" charset="0"/>
                 <a:ea typeface="Trebuchet MS" pitchFamily="34" charset="-122"/>
                 <a:cs typeface="Trebuchet MS" pitchFamily="34" charset="-120"/>
               </a:rPr>
-              <a:t>·</a:t>
-            </a:r>
-            <a:endParaRPr lang="en-US" sz="1600" dirty="0"/>
-          </a:p>
-        </p:txBody>
-      </p:sp>
-      <p:sp>
-        <p:nvSpPr>
-          <p:cNvPr id="32" name="Shape 30"/>
-          <p:cNvSpPr/>
-          <p:nvPr/>
-        </p:nvSpPr>
-        <p:spPr>
-          <a:xfrm>
-            <a:off x="3602736" y="3364992"/>
-            <a:ext cx="1554480" cy="475488"/>
+              <a:t>a</a:t>
+            </a:r>
+            <a:endParaRPr lang="en-US" sz="900" dirty="0"/>
+          </a:p>
+        </p:txBody>
+      </p:sp>
+      <p:sp>
+        <p:nvSpPr>
+          <p:cNvPr id="60" name="Shape 58"/>
+          <p:cNvSpPr/>
+          <p:nvPr/>
+        </p:nvSpPr>
+        <p:spPr>
+          <a:xfrm>
+            <a:off x="6703799" y="4169664"/>
+            <a:ext cx="543652" cy="384048"/>
           </a:xfrm>
           <a:prstGeom prst="rect">
             <a:avLst>
-              <a:gd name="adj" fmla="val 9615"/>
+              <a:gd name="adj" fmla="val 9524"/>
             </a:avLst>
           </a:prstGeom>
           <a:solidFill>
@@ -23897,104 +24602,170 @@
           </a:solidFill>
           <a:ln w="12700">
             <a:solidFill>
-              <a:srgbClr val="0D9488"/>
-            </a:solidFill>
-            <a:prstDash val="solid"/>
-          </a:ln>
-        </p:spPr>
-      </p:sp>
-      <p:sp>
-        <p:nvSpPr>
-          <p:cNvPr id="33" name="Text 31"/>
-          <p:cNvSpPr/>
-          <p:nvPr/>
-        </p:nvSpPr>
-        <p:spPr>
-          <a:xfrm>
-            <a:off x="3602736" y="3364992"/>
-            <a:ext cx="1554480" cy="475488"/>
-          </a:xfrm>
-          <a:prstGeom prst="rect">
-            <a:avLst/>
-          </a:prstGeom>
-          <a:noFill/>
-          <a:ln/>
-        </p:spPr>
-        <p:txBody>
-          <a:bodyPr wrap="square" lIns="0" tIns="0" rIns="0" bIns="0" rtlCol="0" anchor="ctr"/>
-          <a:lstStyle/>
-          <a:p>
-            <a:pPr algn="ctr" indent="0" marL="0">
-              <a:buNone/>
-            </a:pPr>
-            <a:r>
-              <a:rPr lang="en-US" sz="1400" b="1" dirty="0">
-                <a:solidFill>
-                  <a:srgbClr val="0D9488"/>
+              <a:srgbClr val="DB2777"/>
+            </a:solidFill>
+            <a:prstDash val="solid"/>
+          </a:ln>
+        </p:spPr>
+      </p:sp>
+      <p:sp>
+        <p:nvSpPr>
+          <p:cNvPr id="61" name="Text 59"/>
+          <p:cNvSpPr/>
+          <p:nvPr/>
+        </p:nvSpPr>
+        <p:spPr>
+          <a:xfrm>
+            <a:off x="6703799" y="4169664"/>
+            <a:ext cx="543652" cy="384048"/>
+          </a:xfrm>
+          <a:prstGeom prst="rect">
+            <a:avLst/>
+          </a:prstGeom>
+          <a:noFill/>
+          <a:ln/>
+        </p:spPr>
+        <p:txBody>
+          <a:bodyPr wrap="square" lIns="0" tIns="0" rIns="0" bIns="0" rtlCol="0" anchor="ctr"/>
+          <a:lstStyle/>
+          <a:p>
+            <a:pPr algn="ctr" indent="0" marL="0">
+              <a:buNone/>
+            </a:pPr>
+            <a:r>
+              <a:rPr lang="en-US" sz="900" b="1" dirty="0">
+                <a:solidFill>
+                  <a:srgbClr val="9D174D"/>
                 </a:solidFill>
                 <a:latin typeface="Trebuchet MS" pitchFamily="34" charset="0"/>
                 <a:ea typeface="Trebuchet MS" pitchFamily="34" charset="-122"/>
                 <a:cs typeface="Trebuchet MS" pitchFamily="34" charset="-120"/>
               </a:rPr>
-              <a:t>ti</a:t>
-            </a:r>
-            <a:endParaRPr lang="en-US" sz="1400" dirty="0"/>
-          </a:p>
-        </p:txBody>
-      </p:sp>
-      <p:sp>
-        <p:nvSpPr>
-          <p:cNvPr id="34" name="Text 32"/>
-          <p:cNvSpPr/>
-          <p:nvPr/>
-        </p:nvSpPr>
-        <p:spPr>
-          <a:xfrm>
-            <a:off x="5157216" y="3364992"/>
-            <a:ext cx="73152" cy="475488"/>
-          </a:xfrm>
-          <a:prstGeom prst="rect">
-            <a:avLst/>
-          </a:prstGeom>
-          <a:noFill/>
-          <a:ln/>
-        </p:spPr>
-        <p:txBody>
-          <a:bodyPr wrap="square" lIns="0" tIns="0" rIns="0" bIns="0" rtlCol="0" anchor="ctr"/>
-          <a:lstStyle/>
-          <a:p>
-            <a:pPr algn="ctr" indent="0" marL="0">
-              <a:buNone/>
-            </a:pPr>
-            <a:r>
-              <a:rPr lang="en-US" sz="1600" b="1" dirty="0">
-                <a:solidFill>
-                  <a:srgbClr val="0D9488"/>
+              <a:t>t</a:t>
+            </a:r>
+            <a:endParaRPr lang="en-US" sz="900" dirty="0"/>
+          </a:p>
+        </p:txBody>
+      </p:sp>
+      <p:sp>
+        <p:nvSpPr>
+          <p:cNvPr id="62" name="Text 60"/>
+          <p:cNvSpPr/>
+          <p:nvPr/>
+        </p:nvSpPr>
+        <p:spPr>
+          <a:xfrm>
+            <a:off x="6703799" y="4572000"/>
+            <a:ext cx="543652" cy="219456"/>
+          </a:xfrm>
+          <a:prstGeom prst="rect">
+            <a:avLst/>
+          </a:prstGeom>
+          <a:noFill/>
+          <a:ln/>
+        </p:spPr>
+        <p:txBody>
+          <a:bodyPr wrap="square" lIns="0" tIns="0" rIns="0" bIns="0" rtlCol="0" anchor="t"/>
+          <a:lstStyle/>
+          <a:p>
+            <a:pPr algn="ctr" indent="0" marL="0">
+              <a:buNone/>
+            </a:pPr>
+            <a:r>
+              <a:rPr lang="en-US" sz="750" i="1" dirty="0">
+                <a:solidFill>
+                  <a:srgbClr val="94A3B8"/>
+                </a:solidFill>
+                <a:latin typeface="Calibri" pitchFamily="34" charset="0"/>
+                <a:ea typeface="Calibri" pitchFamily="34" charset="-122"/>
+                <a:cs typeface="Calibri" pitchFamily="34" charset="-120"/>
+              </a:rPr>
+              <a:t>/sh/</a:t>
+            </a:r>
+            <a:endParaRPr lang="en-US" sz="750" dirty="0"/>
+          </a:p>
+        </p:txBody>
+      </p:sp>
+      <p:sp>
+        <p:nvSpPr>
+          <p:cNvPr id="63" name="Shape 61"/>
+          <p:cNvSpPr/>
+          <p:nvPr/>
+        </p:nvSpPr>
+        <p:spPr>
+          <a:xfrm>
+            <a:off x="7297743" y="4169664"/>
+            <a:ext cx="543652" cy="384048"/>
+          </a:xfrm>
+          <a:prstGeom prst="rect">
+            <a:avLst>
+              <a:gd name="adj" fmla="val 9524"/>
+            </a:avLst>
+          </a:prstGeom>
+          <a:solidFill>
+            <a:srgbClr val="FFFFFF"/>
+          </a:solidFill>
+          <a:ln w="12700">
+            <a:solidFill>
+              <a:srgbClr val="DB2777"/>
+            </a:solidFill>
+            <a:prstDash val="solid"/>
+          </a:ln>
+        </p:spPr>
+      </p:sp>
+      <p:sp>
+        <p:nvSpPr>
+          <p:cNvPr id="64" name="Text 62"/>
+          <p:cNvSpPr/>
+          <p:nvPr/>
+        </p:nvSpPr>
+        <p:spPr>
+          <a:xfrm>
+            <a:off x="7297743" y="4169664"/>
+            <a:ext cx="543652" cy="384048"/>
+          </a:xfrm>
+          <a:prstGeom prst="rect">
+            <a:avLst/>
+          </a:prstGeom>
+          <a:noFill/>
+          <a:ln/>
+        </p:spPr>
+        <p:txBody>
+          <a:bodyPr wrap="square" lIns="0" tIns="0" rIns="0" bIns="0" rtlCol="0" anchor="ctr"/>
+          <a:lstStyle/>
+          <a:p>
+            <a:pPr algn="ctr" indent="0" marL="0">
+              <a:buNone/>
+            </a:pPr>
+            <a:r>
+              <a:rPr lang="en-US" sz="900" b="1" dirty="0">
+                <a:solidFill>
+                  <a:srgbClr val="9D174D"/>
                 </a:solidFill>
                 <a:latin typeface="Trebuchet MS" pitchFamily="34" charset="0"/>
                 <a:ea typeface="Trebuchet MS" pitchFamily="34" charset="-122"/>
                 <a:cs typeface="Trebuchet MS" pitchFamily="34" charset="-120"/>
               </a:rPr>
-              <a:t>·</a:t>
-            </a:r>
-            <a:endParaRPr lang="en-US" sz="1600" dirty="0"/>
-          </a:p>
-        </p:txBody>
-      </p:sp>
-      <p:sp>
-        <p:nvSpPr>
-          <p:cNvPr id="35" name="Shape 33"/>
-          <p:cNvSpPr/>
-          <p:nvPr/>
-        </p:nvSpPr>
-        <p:spPr>
-          <a:xfrm>
-            <a:off x="5230368" y="3364992"/>
-            <a:ext cx="1554480" cy="475488"/>
+              <a:t>io</a:t>
+            </a:r>
+            <a:endParaRPr lang="en-US" sz="900" dirty="0"/>
+          </a:p>
+        </p:txBody>
+      </p:sp>
+      <p:sp>
+        <p:nvSpPr>
+          <p:cNvPr id="65" name="Shape 63"/>
+          <p:cNvSpPr/>
+          <p:nvPr/>
+        </p:nvSpPr>
+        <p:spPr>
+          <a:xfrm>
+            <a:off x="7891688" y="4169664"/>
+            <a:ext cx="543652" cy="384048"/>
           </a:xfrm>
           <a:prstGeom prst="rect">
             <a:avLst>
-              <a:gd name="adj" fmla="val 9615"/>
+              <a:gd name="adj" fmla="val 9524"/>
             </a:avLst>
           </a:prstGeom>
           <a:solidFill>
@@ -24002,1009 +24773,46 @@
           </a:solidFill>
           <a:ln w="12700">
             <a:solidFill>
-              <a:srgbClr val="0D9488"/>
-            </a:solidFill>
-            <a:prstDash val="solid"/>
-          </a:ln>
-        </p:spPr>
-      </p:sp>
-      <p:sp>
-        <p:nvSpPr>
-          <p:cNvPr id="36" name="Text 34"/>
-          <p:cNvSpPr/>
-          <p:nvPr/>
-        </p:nvSpPr>
-        <p:spPr>
-          <a:xfrm>
-            <a:off x="5230368" y="3364992"/>
-            <a:ext cx="1554480" cy="475488"/>
-          </a:xfrm>
-          <a:prstGeom prst="rect">
-            <a:avLst/>
-          </a:prstGeom>
-          <a:noFill/>
-          <a:ln/>
-        </p:spPr>
-        <p:txBody>
-          <a:bodyPr wrap="square" lIns="0" tIns="0" rIns="0" bIns="0" rtlCol="0" anchor="ctr"/>
-          <a:lstStyle/>
-          <a:p>
-            <a:pPr algn="ctr" indent="0" marL="0">
-              <a:buNone/>
-            </a:pPr>
-            <a:r>
-              <a:rPr lang="en-US" sz="1400" b="1" dirty="0">
-                <a:solidFill>
-                  <a:srgbClr val="0D9488"/>
+              <a:srgbClr val="DB2777"/>
+            </a:solidFill>
+            <a:prstDash val="solid"/>
+          </a:ln>
+        </p:spPr>
+      </p:sp>
+      <p:sp>
+        <p:nvSpPr>
+          <p:cNvPr id="66" name="Text 64"/>
+          <p:cNvSpPr/>
+          <p:nvPr/>
+        </p:nvSpPr>
+        <p:spPr>
+          <a:xfrm>
+            <a:off x="7891688" y="4169664"/>
+            <a:ext cx="543652" cy="384048"/>
+          </a:xfrm>
+          <a:prstGeom prst="rect">
+            <a:avLst/>
+          </a:prstGeom>
+          <a:noFill/>
+          <a:ln/>
+        </p:spPr>
+        <p:txBody>
+          <a:bodyPr wrap="square" lIns="0" tIns="0" rIns="0" bIns="0" rtlCol="0" anchor="ctr"/>
+          <a:lstStyle/>
+          <a:p>
+            <a:pPr algn="ctr" indent="0" marL="0">
+              <a:buNone/>
+            </a:pPr>
+            <a:r>
+              <a:rPr lang="en-US" sz="900" b="1" dirty="0">
+                <a:solidFill>
+                  <a:srgbClr val="9D174D"/>
                 </a:solidFill>
                 <a:latin typeface="Trebuchet MS" pitchFamily="34" charset="0"/>
                 <a:ea typeface="Trebuchet MS" pitchFamily="34" charset="-122"/>
                 <a:cs typeface="Trebuchet MS" pitchFamily="34" charset="-120"/>
               </a:rPr>
-              <a:t>ci</a:t>
-            </a:r>
-            <a:endParaRPr lang="en-US" sz="1400" dirty="0"/>
-          </a:p>
-        </p:txBody>
-      </p:sp>
-      <p:sp>
-        <p:nvSpPr>
-          <p:cNvPr id="37" name="Text 35"/>
-          <p:cNvSpPr/>
-          <p:nvPr/>
-        </p:nvSpPr>
-        <p:spPr>
-          <a:xfrm>
-            <a:off x="6784848" y="3364992"/>
-            <a:ext cx="73152" cy="475488"/>
-          </a:xfrm>
-          <a:prstGeom prst="rect">
-            <a:avLst/>
-          </a:prstGeom>
-          <a:noFill/>
-          <a:ln/>
-        </p:spPr>
-        <p:txBody>
-          <a:bodyPr wrap="square" lIns="0" tIns="0" rIns="0" bIns="0" rtlCol="0" anchor="ctr"/>
-          <a:lstStyle/>
-          <a:p>
-            <a:pPr algn="ctr" indent="0" marL="0">
-              <a:buNone/>
-            </a:pPr>
-            <a:r>
-              <a:rPr lang="en-US" sz="1600" b="1" dirty="0">
-                <a:solidFill>
-                  <a:srgbClr val="0D9488"/>
-                </a:solidFill>
-                <a:latin typeface="Trebuchet MS" pitchFamily="34" charset="0"/>
-                <a:ea typeface="Trebuchet MS" pitchFamily="34" charset="-122"/>
-                <a:cs typeface="Trebuchet MS" pitchFamily="34" charset="-120"/>
-              </a:rPr>
-              <a:t>·</a:t>
-            </a:r>
-            <a:endParaRPr lang="en-US" sz="1600" dirty="0"/>
-          </a:p>
-        </p:txBody>
-      </p:sp>
-      <p:sp>
-        <p:nvSpPr>
-          <p:cNvPr id="38" name="Shape 36"/>
-          <p:cNvSpPr/>
-          <p:nvPr/>
-        </p:nvSpPr>
-        <p:spPr>
-          <a:xfrm>
-            <a:off x="6858000" y="3364992"/>
-            <a:ext cx="1554480" cy="475488"/>
-          </a:xfrm>
-          <a:prstGeom prst="rect">
-            <a:avLst>
-              <a:gd name="adj" fmla="val 9615"/>
-            </a:avLst>
-          </a:prstGeom>
-          <a:solidFill>
-            <a:srgbClr val="FFFFFF"/>
-          </a:solidFill>
-          <a:ln w="12700">
-            <a:solidFill>
-              <a:srgbClr val="0D9488"/>
-            </a:solidFill>
-            <a:prstDash val="solid"/>
-          </a:ln>
-        </p:spPr>
-      </p:sp>
-      <p:sp>
-        <p:nvSpPr>
-          <p:cNvPr id="39" name="Text 37"/>
-          <p:cNvSpPr/>
-          <p:nvPr/>
-        </p:nvSpPr>
-        <p:spPr>
-          <a:xfrm>
-            <a:off x="6858000" y="3364992"/>
-            <a:ext cx="1554480" cy="475488"/>
-          </a:xfrm>
-          <a:prstGeom prst="rect">
-            <a:avLst/>
-          </a:prstGeom>
-          <a:noFill/>
-          <a:ln/>
-        </p:spPr>
-        <p:txBody>
-          <a:bodyPr wrap="square" lIns="0" tIns="0" rIns="0" bIns="0" rtlCol="0" anchor="ctr"/>
-          <a:lstStyle/>
-          <a:p>
-            <a:pPr algn="ctr" indent="0" marL="0">
-              <a:buNone/>
-            </a:pPr>
-            <a:r>
-              <a:rPr lang="en-US" sz="1400" b="1" dirty="0">
-                <a:solidFill>
-                  <a:srgbClr val="0D9488"/>
-                </a:solidFill>
-                <a:latin typeface="Trebuchet MS" pitchFamily="34" charset="0"/>
-                <a:ea typeface="Trebuchet MS" pitchFamily="34" charset="-122"/>
-                <a:cs typeface="Trebuchet MS" pitchFamily="34" charset="-120"/>
-              </a:rPr>
-              <a:t>pants</a:t>
-            </a:r>
-            <a:endParaRPr lang="en-US" sz="1400" dirty="0"/>
-          </a:p>
-        </p:txBody>
-      </p:sp>
-      <p:sp>
-        <p:nvSpPr>
-          <p:cNvPr id="40" name="Shape 38"/>
-          <p:cNvSpPr/>
-          <p:nvPr/>
-        </p:nvSpPr>
-        <p:spPr>
-          <a:xfrm>
-            <a:off x="365760" y="4096512"/>
-            <a:ext cx="1371600" cy="804672"/>
-          </a:xfrm>
-          <a:prstGeom prst="rect">
-            <a:avLst>
-              <a:gd name="adj" fmla="val 6818"/>
-            </a:avLst>
-          </a:prstGeom>
-          <a:solidFill>
-            <a:srgbClr val="E2E8F0"/>
-          </a:solidFill>
-          <a:ln w="12700">
-            <a:solidFill>
-              <a:srgbClr val="E2E8F0"/>
-            </a:solidFill>
-            <a:prstDash val="solid"/>
-          </a:ln>
-        </p:spPr>
-      </p:sp>
-      <p:sp>
-        <p:nvSpPr>
-          <p:cNvPr id="41" name="Text 39"/>
-          <p:cNvSpPr/>
-          <p:nvPr/>
-        </p:nvSpPr>
-        <p:spPr>
-          <a:xfrm>
-            <a:off x="365760" y="4096512"/>
-            <a:ext cx="1371600" cy="804672"/>
-          </a:xfrm>
-          <a:prstGeom prst="rect">
-            <a:avLst/>
-          </a:prstGeom>
-          <a:noFill/>
-          <a:ln/>
-        </p:spPr>
-        <p:txBody>
-          <a:bodyPr wrap="square" lIns="0" tIns="0" rIns="0" bIns="0" rtlCol="0" anchor="ctr"/>
-          <a:lstStyle/>
-          <a:p>
-            <a:pPr algn="ctr" indent="0" marL="0">
-              <a:buNone/>
-            </a:pPr>
-            <a:r>
-              <a:rPr lang="en-US" sz="1100" b="1" dirty="0">
-                <a:solidFill>
-                  <a:srgbClr val="475569"/>
-                </a:solidFill>
-                <a:latin typeface="Trebuchet MS" pitchFamily="34" charset="0"/>
-                <a:ea typeface="Trebuchet MS" pitchFamily="34" charset="-122"/>
-                <a:cs typeface="Trebuchet MS" pitchFamily="34" charset="-120"/>
-              </a:rPr>
-              <a:t>Phonemes</a:t>
-            </a:r>
-            <a:endParaRPr lang="en-US" sz="1100" dirty="0"/>
-          </a:p>
-        </p:txBody>
-      </p:sp>
-      <p:sp>
-        <p:nvSpPr>
-          <p:cNvPr id="42" name="Shape 40"/>
-          <p:cNvSpPr/>
-          <p:nvPr/>
-        </p:nvSpPr>
-        <p:spPr>
-          <a:xfrm>
-            <a:off x="1874520" y="4096512"/>
-            <a:ext cx="6903720" cy="804672"/>
-          </a:xfrm>
-          <a:prstGeom prst="rect">
-            <a:avLst>
-              <a:gd name="adj" fmla="val 6818"/>
-            </a:avLst>
-          </a:prstGeom>
-          <a:solidFill>
-            <a:srgbClr val="FCE7F3"/>
-          </a:solidFill>
-          <a:ln w="12700">
-            <a:solidFill>
-              <a:srgbClr val="DB2777"/>
-            </a:solidFill>
-            <a:prstDash val="solid"/>
-          </a:ln>
-        </p:spPr>
-      </p:sp>
-      <p:sp>
-        <p:nvSpPr>
-          <p:cNvPr id="43" name="Shape 41"/>
-          <p:cNvSpPr/>
-          <p:nvPr/>
-        </p:nvSpPr>
-        <p:spPr>
-          <a:xfrm>
-            <a:off x="1952244" y="4169664"/>
-            <a:ext cx="543652" cy="384048"/>
-          </a:xfrm>
-          <a:prstGeom prst="rect">
-            <a:avLst>
-              <a:gd name="adj" fmla="val 9524"/>
-            </a:avLst>
-          </a:prstGeom>
-          <a:solidFill>
-            <a:srgbClr val="FFFFFF"/>
-          </a:solidFill>
-          <a:ln w="12700">
-            <a:solidFill>
-              <a:srgbClr val="DB2777"/>
-            </a:solidFill>
-            <a:prstDash val="solid"/>
-          </a:ln>
-        </p:spPr>
-      </p:sp>
-      <p:sp>
-        <p:nvSpPr>
-          <p:cNvPr id="44" name="Text 42"/>
-          <p:cNvSpPr/>
-          <p:nvPr/>
-        </p:nvSpPr>
-        <p:spPr>
-          <a:xfrm>
-            <a:off x="1952244" y="4169664"/>
-            <a:ext cx="543652" cy="384048"/>
-          </a:xfrm>
-          <a:prstGeom prst="rect">
-            <a:avLst/>
-          </a:prstGeom>
-          <a:noFill/>
-          <a:ln/>
-        </p:spPr>
-        <p:txBody>
-          <a:bodyPr wrap="square" lIns="0" tIns="0" rIns="0" bIns="0" rtlCol="0" anchor="ctr"/>
-          <a:lstStyle/>
-          <a:p>
-            <a:pPr algn="ctr" indent="0" marL="0">
-              <a:buNone/>
-            </a:pPr>
-            <a:r>
-              <a:rPr lang="en-US" sz="900" b="1" dirty="0">
-                <a:solidFill>
-                  <a:srgbClr val="9D174D"/>
-                </a:solidFill>
-                <a:latin typeface="Trebuchet MS" pitchFamily="34" charset="0"/>
-                <a:ea typeface="Trebuchet MS" pitchFamily="34" charset="-122"/>
-                <a:cs typeface="Trebuchet MS" pitchFamily="34" charset="-120"/>
-              </a:rPr>
-              <a:t>p</a:t>
-            </a:r>
-            <a:endParaRPr lang="en-US" sz="900" dirty="0"/>
-          </a:p>
-        </p:txBody>
-      </p:sp>
-      <p:sp>
-        <p:nvSpPr>
-          <p:cNvPr id="45" name="Shape 43"/>
-          <p:cNvSpPr/>
-          <p:nvPr/>
-        </p:nvSpPr>
-        <p:spPr>
-          <a:xfrm>
-            <a:off x="2546188" y="4169664"/>
-            <a:ext cx="543652" cy="384048"/>
-          </a:xfrm>
-          <a:prstGeom prst="rect">
-            <a:avLst>
-              <a:gd name="adj" fmla="val 9524"/>
-            </a:avLst>
-          </a:prstGeom>
-          <a:solidFill>
-            <a:srgbClr val="FFFFFF"/>
-          </a:solidFill>
-          <a:ln w="12700">
-            <a:solidFill>
-              <a:srgbClr val="DB2777"/>
-            </a:solidFill>
-            <a:prstDash val="solid"/>
-          </a:ln>
-        </p:spPr>
-      </p:sp>
-      <p:sp>
-        <p:nvSpPr>
-          <p:cNvPr id="46" name="Text 44"/>
-          <p:cNvSpPr/>
-          <p:nvPr/>
-        </p:nvSpPr>
-        <p:spPr>
-          <a:xfrm>
-            <a:off x="2546188" y="4169664"/>
-            <a:ext cx="543652" cy="384048"/>
-          </a:xfrm>
-          <a:prstGeom prst="rect">
-            <a:avLst/>
-          </a:prstGeom>
-          <a:noFill/>
-          <a:ln/>
-        </p:spPr>
-        <p:txBody>
-          <a:bodyPr wrap="square" lIns="0" tIns="0" rIns="0" bIns="0" rtlCol="0" anchor="ctr"/>
-          <a:lstStyle/>
-          <a:p>
-            <a:pPr algn="ctr" indent="0" marL="0">
-              <a:buNone/>
-            </a:pPr>
-            <a:r>
-              <a:rPr lang="en-US" sz="900" b="1" dirty="0">
-                <a:solidFill>
-                  <a:srgbClr val="9D174D"/>
-                </a:solidFill>
-                <a:latin typeface="Trebuchet MS" pitchFamily="34" charset="0"/>
-                <a:ea typeface="Trebuchet MS" pitchFamily="34" charset="-122"/>
-                <a:cs typeface="Trebuchet MS" pitchFamily="34" charset="-120"/>
-              </a:rPr>
-              <a:t>ar</a:t>
-            </a:r>
-            <a:endParaRPr lang="en-US" sz="900" dirty="0"/>
-          </a:p>
-        </p:txBody>
-      </p:sp>
-      <p:sp>
-        <p:nvSpPr>
-          <p:cNvPr id="47" name="Shape 45"/>
-          <p:cNvSpPr/>
-          <p:nvPr/>
-        </p:nvSpPr>
-        <p:spPr>
-          <a:xfrm>
-            <a:off x="3140133" y="4169664"/>
-            <a:ext cx="543652" cy="384048"/>
-          </a:xfrm>
-          <a:prstGeom prst="rect">
-            <a:avLst>
-              <a:gd name="adj" fmla="val 9524"/>
-            </a:avLst>
-          </a:prstGeom>
-          <a:solidFill>
-            <a:srgbClr val="FFFFFF"/>
-          </a:solidFill>
-          <a:ln w="12700">
-            <a:solidFill>
-              <a:srgbClr val="DB2777"/>
-            </a:solidFill>
-            <a:prstDash val="solid"/>
-          </a:ln>
-        </p:spPr>
-      </p:sp>
-      <p:sp>
-        <p:nvSpPr>
-          <p:cNvPr id="48" name="Text 46"/>
-          <p:cNvSpPr/>
-          <p:nvPr/>
-        </p:nvSpPr>
-        <p:spPr>
-          <a:xfrm>
-            <a:off x="3140133" y="4169664"/>
-            <a:ext cx="543652" cy="384048"/>
-          </a:xfrm>
-          <a:prstGeom prst="rect">
-            <a:avLst/>
-          </a:prstGeom>
-          <a:noFill/>
-          <a:ln/>
-        </p:spPr>
-        <p:txBody>
-          <a:bodyPr wrap="square" lIns="0" tIns="0" rIns="0" bIns="0" rtlCol="0" anchor="ctr"/>
-          <a:lstStyle/>
-          <a:p>
-            <a:pPr algn="ctr" indent="0" marL="0">
-              <a:buNone/>
-            </a:pPr>
-            <a:r>
-              <a:rPr lang="en-US" sz="900" b="1" dirty="0">
-                <a:solidFill>
-                  <a:srgbClr val="9D174D"/>
-                </a:solidFill>
-                <a:latin typeface="Trebuchet MS" pitchFamily="34" charset="0"/>
-                <a:ea typeface="Trebuchet MS" pitchFamily="34" charset="-122"/>
-                <a:cs typeface="Trebuchet MS" pitchFamily="34" charset="-120"/>
-              </a:rPr>
-              <a:t>t</a:t>
-            </a:r>
-            <a:endParaRPr lang="en-US" sz="900" dirty="0"/>
-          </a:p>
-        </p:txBody>
-      </p:sp>
-      <p:sp>
-        <p:nvSpPr>
-          <p:cNvPr id="49" name="Shape 47"/>
-          <p:cNvSpPr/>
-          <p:nvPr/>
-        </p:nvSpPr>
-        <p:spPr>
-          <a:xfrm>
-            <a:off x="3734077" y="4169664"/>
-            <a:ext cx="543652" cy="384048"/>
-          </a:xfrm>
-          <a:prstGeom prst="rect">
-            <a:avLst>
-              <a:gd name="adj" fmla="val 9524"/>
-            </a:avLst>
-          </a:prstGeom>
-          <a:solidFill>
-            <a:srgbClr val="FFFFFF"/>
-          </a:solidFill>
-          <a:ln w="12700">
-            <a:solidFill>
-              <a:srgbClr val="DB2777"/>
-            </a:solidFill>
-            <a:prstDash val="solid"/>
-          </a:ln>
-        </p:spPr>
-      </p:sp>
-      <p:sp>
-        <p:nvSpPr>
-          <p:cNvPr id="50" name="Text 48"/>
-          <p:cNvSpPr/>
-          <p:nvPr/>
-        </p:nvSpPr>
-        <p:spPr>
-          <a:xfrm>
-            <a:off x="3734077" y="4169664"/>
-            <a:ext cx="543652" cy="384048"/>
-          </a:xfrm>
-          <a:prstGeom prst="rect">
-            <a:avLst/>
-          </a:prstGeom>
-          <a:noFill/>
-          <a:ln/>
-        </p:spPr>
-        <p:txBody>
-          <a:bodyPr wrap="square" lIns="0" tIns="0" rIns="0" bIns="0" rtlCol="0" anchor="ctr"/>
-          <a:lstStyle/>
-          <a:p>
-            <a:pPr algn="ctr" indent="0" marL="0">
-              <a:buNone/>
-            </a:pPr>
-            <a:r>
-              <a:rPr lang="en-US" sz="900" b="1" dirty="0">
-                <a:solidFill>
-                  <a:srgbClr val="9D174D"/>
-                </a:solidFill>
-                <a:latin typeface="Trebuchet MS" pitchFamily="34" charset="0"/>
-                <a:ea typeface="Trebuchet MS" pitchFamily="34" charset="-122"/>
-                <a:cs typeface="Trebuchet MS" pitchFamily="34" charset="-120"/>
-              </a:rPr>
-              <a:t>i</a:t>
-            </a:r>
-            <a:endParaRPr lang="en-US" sz="900" dirty="0"/>
-          </a:p>
-        </p:txBody>
-      </p:sp>
-      <p:sp>
-        <p:nvSpPr>
-          <p:cNvPr id="51" name="Shape 49"/>
-          <p:cNvSpPr/>
-          <p:nvPr/>
-        </p:nvSpPr>
-        <p:spPr>
-          <a:xfrm>
-            <a:off x="4328021" y="4169664"/>
-            <a:ext cx="543652" cy="384048"/>
-          </a:xfrm>
-          <a:prstGeom prst="rect">
-            <a:avLst>
-              <a:gd name="adj" fmla="val 9524"/>
-            </a:avLst>
-          </a:prstGeom>
-          <a:solidFill>
-            <a:srgbClr val="FFFFFF"/>
-          </a:solidFill>
-          <a:ln w="12700">
-            <a:solidFill>
-              <a:srgbClr val="DB2777"/>
-            </a:solidFill>
-            <a:prstDash val="solid"/>
-          </a:ln>
-        </p:spPr>
-      </p:sp>
-      <p:sp>
-        <p:nvSpPr>
-          <p:cNvPr id="52" name="Text 50"/>
-          <p:cNvSpPr/>
-          <p:nvPr/>
-        </p:nvSpPr>
-        <p:spPr>
-          <a:xfrm>
-            <a:off x="4328021" y="4169664"/>
-            <a:ext cx="543652" cy="384048"/>
-          </a:xfrm>
-          <a:prstGeom prst="rect">
-            <a:avLst/>
-          </a:prstGeom>
-          <a:noFill/>
-          <a:ln/>
-        </p:spPr>
-        <p:txBody>
-          <a:bodyPr wrap="square" lIns="0" tIns="0" rIns="0" bIns="0" rtlCol="0" anchor="ctr"/>
-          <a:lstStyle/>
-          <a:p>
-            <a:pPr algn="ctr" indent="0" marL="0">
-              <a:buNone/>
-            </a:pPr>
-            <a:r>
-              <a:rPr lang="en-US" sz="900" b="1" dirty="0">
-                <a:solidFill>
-                  <a:srgbClr val="9D174D"/>
-                </a:solidFill>
-                <a:latin typeface="Trebuchet MS" pitchFamily="34" charset="0"/>
-                <a:ea typeface="Trebuchet MS" pitchFamily="34" charset="-122"/>
-                <a:cs typeface="Trebuchet MS" pitchFamily="34" charset="-120"/>
-              </a:rPr>
-              <a:t>c</a:t>
-            </a:r>
-            <a:endParaRPr lang="en-US" sz="900" dirty="0"/>
-          </a:p>
-        </p:txBody>
-      </p:sp>
-      <p:sp>
-        <p:nvSpPr>
-          <p:cNvPr id="53" name="Text 51"/>
-          <p:cNvSpPr/>
-          <p:nvPr/>
-        </p:nvSpPr>
-        <p:spPr>
-          <a:xfrm>
-            <a:off x="4328021" y="4572000"/>
-            <a:ext cx="543652" cy="219456"/>
-          </a:xfrm>
-          <a:prstGeom prst="rect">
-            <a:avLst/>
-          </a:prstGeom>
-          <a:noFill/>
-          <a:ln/>
-        </p:spPr>
-        <p:txBody>
-          <a:bodyPr wrap="square" lIns="0" tIns="0" rIns="0" bIns="0" rtlCol="0" anchor="t"/>
-          <a:lstStyle/>
-          <a:p>
-            <a:pPr algn="ctr" indent="0" marL="0">
-              <a:buNone/>
-            </a:pPr>
-            <a:r>
-              <a:rPr lang="en-US" sz="750" i="1" dirty="0">
-                <a:solidFill>
-                  <a:srgbClr val="94A3B8"/>
-                </a:solidFill>
-                <a:latin typeface="Calibri" pitchFamily="34" charset="0"/>
-                <a:ea typeface="Calibri" pitchFamily="34" charset="-122"/>
-                <a:cs typeface="Calibri" pitchFamily="34" charset="-120"/>
-              </a:rPr>
-              <a:t>/s/</a:t>
-            </a:r>
-            <a:endParaRPr lang="en-US" sz="750" dirty="0"/>
-          </a:p>
-        </p:txBody>
-      </p:sp>
-      <p:sp>
-        <p:nvSpPr>
-          <p:cNvPr id="54" name="Shape 52"/>
-          <p:cNvSpPr/>
-          <p:nvPr/>
-        </p:nvSpPr>
-        <p:spPr>
-          <a:xfrm>
-            <a:off x="4921966" y="4169664"/>
-            <a:ext cx="543652" cy="384048"/>
-          </a:xfrm>
-          <a:prstGeom prst="rect">
-            <a:avLst>
-              <a:gd name="adj" fmla="val 9524"/>
-            </a:avLst>
-          </a:prstGeom>
-          <a:solidFill>
-            <a:srgbClr val="FFFFFF"/>
-          </a:solidFill>
-          <a:ln w="12700">
-            <a:solidFill>
-              <a:srgbClr val="DB2777"/>
-            </a:solidFill>
-            <a:prstDash val="solid"/>
-          </a:ln>
-        </p:spPr>
-      </p:sp>
-      <p:sp>
-        <p:nvSpPr>
-          <p:cNvPr id="55" name="Text 53"/>
-          <p:cNvSpPr/>
-          <p:nvPr/>
-        </p:nvSpPr>
-        <p:spPr>
-          <a:xfrm>
-            <a:off x="4921966" y="4169664"/>
-            <a:ext cx="543652" cy="384048"/>
-          </a:xfrm>
-          <a:prstGeom prst="rect">
-            <a:avLst/>
-          </a:prstGeom>
-          <a:noFill/>
-          <a:ln/>
-        </p:spPr>
-        <p:txBody>
-          <a:bodyPr wrap="square" lIns="0" tIns="0" rIns="0" bIns="0" rtlCol="0" anchor="ctr"/>
-          <a:lstStyle/>
-          <a:p>
-            <a:pPr algn="ctr" indent="0" marL="0">
-              <a:buNone/>
-            </a:pPr>
-            <a:r>
-              <a:rPr lang="en-US" sz="900" b="1" dirty="0">
-                <a:solidFill>
-                  <a:srgbClr val="9D174D"/>
-                </a:solidFill>
-                <a:latin typeface="Trebuchet MS" pitchFamily="34" charset="0"/>
-                <a:ea typeface="Trebuchet MS" pitchFamily="34" charset="-122"/>
-                <a:cs typeface="Trebuchet MS" pitchFamily="34" charset="-120"/>
-              </a:rPr>
-              <a:t>i</a:t>
-            </a:r>
-            <a:endParaRPr lang="en-US" sz="900" dirty="0"/>
-          </a:p>
-        </p:txBody>
-      </p:sp>
-      <p:sp>
-        <p:nvSpPr>
-          <p:cNvPr id="56" name="Shape 54"/>
-          <p:cNvSpPr/>
-          <p:nvPr/>
-        </p:nvSpPr>
-        <p:spPr>
-          <a:xfrm>
-            <a:off x="5515910" y="4169664"/>
-            <a:ext cx="543652" cy="384048"/>
-          </a:xfrm>
-          <a:prstGeom prst="rect">
-            <a:avLst>
-              <a:gd name="adj" fmla="val 9524"/>
-            </a:avLst>
-          </a:prstGeom>
-          <a:solidFill>
-            <a:srgbClr val="FFFFFF"/>
-          </a:solidFill>
-          <a:ln w="12700">
-            <a:solidFill>
-              <a:srgbClr val="DB2777"/>
-            </a:solidFill>
-            <a:prstDash val="solid"/>
-          </a:ln>
-        </p:spPr>
-      </p:sp>
-      <p:sp>
-        <p:nvSpPr>
-          <p:cNvPr id="57" name="Text 55"/>
-          <p:cNvSpPr/>
-          <p:nvPr/>
-        </p:nvSpPr>
-        <p:spPr>
-          <a:xfrm>
-            <a:off x="5515910" y="4169664"/>
-            <a:ext cx="543652" cy="384048"/>
-          </a:xfrm>
-          <a:prstGeom prst="rect">
-            <a:avLst/>
-          </a:prstGeom>
-          <a:noFill/>
-          <a:ln/>
-        </p:spPr>
-        <p:txBody>
-          <a:bodyPr wrap="square" lIns="0" tIns="0" rIns="0" bIns="0" rtlCol="0" anchor="ctr"/>
-          <a:lstStyle/>
-          <a:p>
-            <a:pPr algn="ctr" indent="0" marL="0">
-              <a:buNone/>
-            </a:pPr>
-            <a:r>
-              <a:rPr lang="en-US" sz="900" b="1" dirty="0">
-                <a:solidFill>
-                  <a:srgbClr val="9D174D"/>
-                </a:solidFill>
-                <a:latin typeface="Trebuchet MS" pitchFamily="34" charset="0"/>
-                <a:ea typeface="Trebuchet MS" pitchFamily="34" charset="-122"/>
-                <a:cs typeface="Trebuchet MS" pitchFamily="34" charset="-120"/>
-              </a:rPr>
-              <a:t>p</a:t>
-            </a:r>
-            <a:endParaRPr lang="en-US" sz="900" dirty="0"/>
-          </a:p>
-        </p:txBody>
-      </p:sp>
-      <p:sp>
-        <p:nvSpPr>
-          <p:cNvPr id="58" name="Shape 56"/>
-          <p:cNvSpPr/>
-          <p:nvPr/>
-        </p:nvSpPr>
-        <p:spPr>
-          <a:xfrm>
-            <a:off x="6109855" y="4169664"/>
-            <a:ext cx="543652" cy="384048"/>
-          </a:xfrm>
-          <a:prstGeom prst="rect">
-            <a:avLst>
-              <a:gd name="adj" fmla="val 9524"/>
-            </a:avLst>
-          </a:prstGeom>
-          <a:solidFill>
-            <a:srgbClr val="FFFFFF"/>
-          </a:solidFill>
-          <a:ln w="12700">
-            <a:solidFill>
-              <a:srgbClr val="DB2777"/>
-            </a:solidFill>
-            <a:prstDash val="solid"/>
-          </a:ln>
-        </p:spPr>
-      </p:sp>
-      <p:sp>
-        <p:nvSpPr>
-          <p:cNvPr id="59" name="Text 57"/>
-          <p:cNvSpPr/>
-          <p:nvPr/>
-        </p:nvSpPr>
-        <p:spPr>
-          <a:xfrm>
-            <a:off x="6109855" y="4169664"/>
-            <a:ext cx="543652" cy="384048"/>
-          </a:xfrm>
-          <a:prstGeom prst="rect">
-            <a:avLst/>
-          </a:prstGeom>
-          <a:noFill/>
-          <a:ln/>
-        </p:spPr>
-        <p:txBody>
-          <a:bodyPr wrap="square" lIns="0" tIns="0" rIns="0" bIns="0" rtlCol="0" anchor="ctr"/>
-          <a:lstStyle/>
-          <a:p>
-            <a:pPr algn="ctr" indent="0" marL="0">
-              <a:buNone/>
-            </a:pPr>
-            <a:r>
-              <a:rPr lang="en-US" sz="900" b="1" dirty="0">
-                <a:solidFill>
-                  <a:srgbClr val="9D174D"/>
-                </a:solidFill>
-                <a:latin typeface="Trebuchet MS" pitchFamily="34" charset="0"/>
-                <a:ea typeface="Trebuchet MS" pitchFamily="34" charset="-122"/>
-                <a:cs typeface="Trebuchet MS" pitchFamily="34" charset="-120"/>
-              </a:rPr>
-              <a:t>a</a:t>
-            </a:r>
-            <a:endParaRPr lang="en-US" sz="900" dirty="0"/>
-          </a:p>
-        </p:txBody>
-      </p:sp>
-      <p:sp>
-        <p:nvSpPr>
-          <p:cNvPr id="60" name="Shape 58"/>
-          <p:cNvSpPr/>
-          <p:nvPr/>
-        </p:nvSpPr>
-        <p:spPr>
-          <a:xfrm>
-            <a:off x="6703799" y="4169664"/>
-            <a:ext cx="543652" cy="384048"/>
-          </a:xfrm>
-          <a:prstGeom prst="rect">
-            <a:avLst>
-              <a:gd name="adj" fmla="val 9524"/>
-            </a:avLst>
-          </a:prstGeom>
-          <a:solidFill>
-            <a:srgbClr val="FFFFFF"/>
-          </a:solidFill>
-          <a:ln w="12700">
-            <a:solidFill>
-              <a:srgbClr val="DB2777"/>
-            </a:solidFill>
-            <a:prstDash val="solid"/>
-          </a:ln>
-        </p:spPr>
-      </p:sp>
-      <p:sp>
-        <p:nvSpPr>
-          <p:cNvPr id="61" name="Text 59"/>
-          <p:cNvSpPr/>
-          <p:nvPr/>
-        </p:nvSpPr>
-        <p:spPr>
-          <a:xfrm>
-            <a:off x="6703799" y="4169664"/>
-            <a:ext cx="543652" cy="384048"/>
-          </a:xfrm>
-          <a:prstGeom prst="rect">
-            <a:avLst/>
-          </a:prstGeom>
-          <a:noFill/>
-          <a:ln/>
-        </p:spPr>
-        <p:txBody>
-          <a:bodyPr wrap="square" lIns="0" tIns="0" rIns="0" bIns="0" rtlCol="0" anchor="ctr"/>
-          <a:lstStyle/>
-          <a:p>
-            <a:pPr algn="ctr" indent="0" marL="0">
-              <a:buNone/>
-            </a:pPr>
-            <a:r>
-              <a:rPr lang="en-US" sz="900" b="1" dirty="0">
-                <a:solidFill>
-                  <a:srgbClr val="9D174D"/>
-                </a:solidFill>
-                <a:latin typeface="Trebuchet MS" pitchFamily="34" charset="0"/>
-                <a:ea typeface="Trebuchet MS" pitchFamily="34" charset="-122"/>
-                <a:cs typeface="Trebuchet MS" pitchFamily="34" charset="-120"/>
-              </a:rPr>
               <a:t>n</a:t>
-            </a:r>
-            <a:endParaRPr lang="en-US" sz="900" dirty="0"/>
-          </a:p>
-        </p:txBody>
-      </p:sp>
-      <p:sp>
-        <p:nvSpPr>
-          <p:cNvPr id="62" name="Shape 60"/>
-          <p:cNvSpPr/>
-          <p:nvPr/>
-        </p:nvSpPr>
-        <p:spPr>
-          <a:xfrm>
-            <a:off x="7297743" y="4169664"/>
-            <a:ext cx="543652" cy="384048"/>
-          </a:xfrm>
-          <a:prstGeom prst="rect">
-            <a:avLst>
-              <a:gd name="adj" fmla="val 9524"/>
-            </a:avLst>
-          </a:prstGeom>
-          <a:solidFill>
-            <a:srgbClr val="FFFFFF"/>
-          </a:solidFill>
-          <a:ln w="12700">
-            <a:solidFill>
-              <a:srgbClr val="DB2777"/>
-            </a:solidFill>
-            <a:prstDash val="solid"/>
-          </a:ln>
-        </p:spPr>
-      </p:sp>
-      <p:sp>
-        <p:nvSpPr>
-          <p:cNvPr id="63" name="Text 61"/>
-          <p:cNvSpPr/>
-          <p:nvPr/>
-        </p:nvSpPr>
-        <p:spPr>
-          <a:xfrm>
-            <a:off x="7297743" y="4169664"/>
-            <a:ext cx="543652" cy="384048"/>
-          </a:xfrm>
-          <a:prstGeom prst="rect">
-            <a:avLst/>
-          </a:prstGeom>
-          <a:noFill/>
-          <a:ln/>
-        </p:spPr>
-        <p:txBody>
-          <a:bodyPr wrap="square" lIns="0" tIns="0" rIns="0" bIns="0" rtlCol="0" anchor="ctr"/>
-          <a:lstStyle/>
-          <a:p>
-            <a:pPr algn="ctr" indent="0" marL="0">
-              <a:buNone/>
-            </a:pPr>
-            <a:r>
-              <a:rPr lang="en-US" sz="900" b="1" dirty="0">
-                <a:solidFill>
-                  <a:srgbClr val="9D174D"/>
-                </a:solidFill>
-                <a:latin typeface="Trebuchet MS" pitchFamily="34" charset="0"/>
-                <a:ea typeface="Trebuchet MS" pitchFamily="34" charset="-122"/>
-                <a:cs typeface="Trebuchet MS" pitchFamily="34" charset="-120"/>
-              </a:rPr>
-              <a:t>t</a:t>
-            </a:r>
-            <a:endParaRPr lang="en-US" sz="900" dirty="0"/>
-          </a:p>
-        </p:txBody>
-      </p:sp>
-      <p:sp>
-        <p:nvSpPr>
-          <p:cNvPr id="64" name="Shape 62"/>
-          <p:cNvSpPr/>
-          <p:nvPr/>
-        </p:nvSpPr>
-        <p:spPr>
-          <a:xfrm>
-            <a:off x="7891688" y="4169664"/>
-            <a:ext cx="543652" cy="384048"/>
-          </a:xfrm>
-          <a:prstGeom prst="rect">
-            <a:avLst>
-              <a:gd name="adj" fmla="val 9524"/>
-            </a:avLst>
-          </a:prstGeom>
-          <a:solidFill>
-            <a:srgbClr val="FFFFFF"/>
-          </a:solidFill>
-          <a:ln w="12700">
-            <a:solidFill>
-              <a:srgbClr val="DB2777"/>
-            </a:solidFill>
-            <a:prstDash val="solid"/>
-          </a:ln>
-        </p:spPr>
-      </p:sp>
-      <p:sp>
-        <p:nvSpPr>
-          <p:cNvPr id="65" name="Text 63"/>
-          <p:cNvSpPr/>
-          <p:nvPr/>
-        </p:nvSpPr>
-        <p:spPr>
-          <a:xfrm>
-            <a:off x="7891688" y="4169664"/>
-            <a:ext cx="543652" cy="384048"/>
-          </a:xfrm>
-          <a:prstGeom prst="rect">
-            <a:avLst/>
-          </a:prstGeom>
-          <a:noFill/>
-          <a:ln/>
-        </p:spPr>
-        <p:txBody>
-          <a:bodyPr wrap="square" lIns="0" tIns="0" rIns="0" bIns="0" rtlCol="0" anchor="ctr"/>
-          <a:lstStyle/>
-          <a:p>
-            <a:pPr algn="ctr" indent="0" marL="0">
-              <a:buNone/>
-            </a:pPr>
-            <a:r>
-              <a:rPr lang="en-US" sz="900" b="1" dirty="0">
-                <a:solidFill>
-                  <a:srgbClr val="9D174D"/>
-                </a:solidFill>
-                <a:latin typeface="Trebuchet MS" pitchFamily="34" charset="0"/>
-                <a:ea typeface="Trebuchet MS" pitchFamily="34" charset="-122"/>
-                <a:cs typeface="Trebuchet MS" pitchFamily="34" charset="-120"/>
-              </a:rPr>
-              <a:t>s</a:t>
             </a:r>
             <a:endParaRPr lang="en-US" sz="900" dirty="0"/>
           </a:p>
@@ -25435,7 +25243,7 @@
                 <a:ea typeface="Trebuchet MS" pitchFamily="34" charset="-122"/>
                 <a:cs typeface="Trebuchet MS" pitchFamily="34" charset="-120"/>
               </a:rPr>
-              <a:t>participating</a:t>
+              <a:t>participated</a:t>
             </a:r>
             <a:endParaRPr lang="en-US" sz="2800" dirty="0"/>
           </a:p>
@@ -26262,7 +26070,7 @@
                 <a:ea typeface="Trebuchet MS" pitchFamily="34" charset="-122"/>
                 <a:cs typeface="Trebuchet MS" pitchFamily="34" charset="-120"/>
               </a:rPr>
-              <a:t>participating</a:t>
+              <a:t>participated</a:t>
             </a:r>
             <a:endParaRPr lang="en-US" sz="2800" dirty="0"/>
           </a:p>
@@ -26552,7 +26360,7 @@
                 <a:ea typeface="Trebuchet MS" pitchFamily="34" charset="-122"/>
                 <a:cs typeface="Trebuchet MS" pitchFamily="34" charset="-120"/>
               </a:rPr>
-              <a:t>ing</a:t>
+              <a:t>ed</a:t>
             </a:r>
             <a:endParaRPr lang="en-US" sz="1300" dirty="0"/>
           </a:p>
@@ -26591,7 +26399,7 @@
                 <a:ea typeface="Calibri" pitchFamily="34" charset="-122"/>
                 <a:cs typeface="Calibri" pitchFamily="34" charset="-120"/>
               </a:rPr>
-              <a:t>ongoing action</a:t>
+              <a:t>happened in the past</a:t>
             </a:r>
             <a:endParaRPr lang="en-US" sz="850" dirty="0"/>
           </a:p>
@@ -28005,7 +27813,7 @@
                 <a:ea typeface="Trebuchet MS" pitchFamily="34" charset="-122"/>
                 <a:cs typeface="Trebuchet MS" pitchFamily="34" charset="-120"/>
               </a:rPr>
-              <a:t>participating</a:t>
+              <a:t>participated</a:t>
             </a:r>
             <a:endParaRPr lang="en-US" sz="2800" dirty="0"/>
           </a:p>
@@ -28295,7 +28103,7 @@
                 <a:ea typeface="Trebuchet MS" pitchFamily="34" charset="-122"/>
                 <a:cs typeface="Trebuchet MS" pitchFamily="34" charset="-120"/>
               </a:rPr>
-              <a:t>ing</a:t>
+              <a:t>ed</a:t>
             </a:r>
             <a:endParaRPr lang="en-US" sz="1300" dirty="0"/>
           </a:p>
@@ -28334,7 +28142,7 @@
                 <a:ea typeface="Calibri" pitchFamily="34" charset="-122"/>
                 <a:cs typeface="Calibri" pitchFamily="34" charset="-120"/>
               </a:rPr>
-              <a:t>ongoing action</a:t>
+              <a:t>happened in the past</a:t>
             </a:r>
             <a:endParaRPr lang="en-US" sz="850" dirty="0"/>
           </a:p>
@@ -28913,7 +28721,7 @@
                 <a:ea typeface="Trebuchet MS" pitchFamily="34" charset="-122"/>
                 <a:cs typeface="Trebuchet MS" pitchFamily="34" charset="-120"/>
               </a:rPr>
-              <a:t>ting</a:t>
+              <a:t>ted</a:t>
             </a:r>
             <a:endParaRPr lang="en-US" sz="1400" dirty="0"/>
           </a:p>
@@ -29476,7 +29284,7 @@
                 <a:ea typeface="Trebuchet MS" pitchFamily="34" charset="-122"/>
                 <a:cs typeface="Trebuchet MS" pitchFamily="34" charset="-120"/>
               </a:rPr>
-              <a:t>participating</a:t>
+              <a:t>participated</a:t>
             </a:r>
             <a:endParaRPr lang="en-US" sz="2800" dirty="0"/>
           </a:p>
@@ -29766,7 +29574,7 @@
                 <a:ea typeface="Trebuchet MS" pitchFamily="34" charset="-122"/>
                 <a:cs typeface="Trebuchet MS" pitchFamily="34" charset="-120"/>
               </a:rPr>
-              <a:t>ing</a:t>
+              <a:t>ed</a:t>
             </a:r>
             <a:endParaRPr lang="en-US" sz="1300" dirty="0"/>
           </a:p>
@@ -29805,7 +29613,7 @@
                 <a:ea typeface="Calibri" pitchFamily="34" charset="-122"/>
                 <a:cs typeface="Calibri" pitchFamily="34" charset="-120"/>
               </a:rPr>
-              <a:t>ongoing action</a:t>
+              <a:t>happened in the past</a:t>
             </a:r>
             <a:endParaRPr lang="en-US" sz="850" dirty="0"/>
           </a:p>
@@ -30384,7 +30192,7 @@
                 <a:ea typeface="Trebuchet MS" pitchFamily="34" charset="-122"/>
                 <a:cs typeface="Trebuchet MS" pitchFamily="34" charset="-120"/>
               </a:rPr>
-              <a:t>ting</a:t>
+              <a:t>ted</a:t>
             </a:r>
             <a:endParaRPr lang="en-US" sz="1400" dirty="0"/>
           </a:p>
@@ -30491,8 +30299,8 @@
         </p:nvSpPr>
         <p:spPr>
           <a:xfrm>
-            <a:off x="1951828" y="4169664"/>
-            <a:ext cx="603504" cy="384048"/>
+            <a:off x="1952244" y="4169664"/>
+            <a:ext cx="543652" cy="384048"/>
           </a:xfrm>
           <a:prstGeom prst="rect">
             <a:avLst>
@@ -30518,8 +30326,8 @@
         </p:nvSpPr>
         <p:spPr>
           <a:xfrm>
-            <a:off x="1951828" y="4169664"/>
-            <a:ext cx="603504" cy="384048"/>
+            <a:off x="1952244" y="4169664"/>
+            <a:ext cx="543652" cy="384048"/>
           </a:xfrm>
           <a:prstGeom prst="rect">
             <a:avLst/>
@@ -30557,8 +30365,8 @@
         </p:nvSpPr>
         <p:spPr>
           <a:xfrm>
-            <a:off x="2605209" y="4169664"/>
-            <a:ext cx="603504" cy="384048"/>
+            <a:off x="2546188" y="4169664"/>
+            <a:ext cx="543652" cy="384048"/>
           </a:xfrm>
           <a:prstGeom prst="rect">
             <a:avLst>
@@ -30584,8 +30392,8 @@
         </p:nvSpPr>
         <p:spPr>
           <a:xfrm>
-            <a:off x="2605209" y="4169664"/>
-            <a:ext cx="603504" cy="384048"/>
+            <a:off x="2546188" y="4169664"/>
+            <a:ext cx="543652" cy="384048"/>
           </a:xfrm>
           <a:prstGeom prst="rect">
             <a:avLst/>
@@ -30623,8 +30431,8 @@
         </p:nvSpPr>
         <p:spPr>
           <a:xfrm>
-            <a:off x="3258589" y="4169664"/>
-            <a:ext cx="603504" cy="384048"/>
+            <a:off x="3140133" y="4169664"/>
+            <a:ext cx="543652" cy="384048"/>
           </a:xfrm>
           <a:prstGeom prst="rect">
             <a:avLst>
@@ -30650,8 +30458,8 @@
         </p:nvSpPr>
         <p:spPr>
           <a:xfrm>
-            <a:off x="3258589" y="4169664"/>
-            <a:ext cx="603504" cy="384048"/>
+            <a:off x="3140133" y="4169664"/>
+            <a:ext cx="543652" cy="384048"/>
           </a:xfrm>
           <a:prstGeom prst="rect">
             <a:avLst/>
@@ -30689,8 +30497,8 @@
         </p:nvSpPr>
         <p:spPr>
           <a:xfrm>
-            <a:off x="3911969" y="4169664"/>
-            <a:ext cx="603504" cy="384048"/>
+            <a:off x="3734077" y="4169664"/>
+            <a:ext cx="543652" cy="384048"/>
           </a:xfrm>
           <a:prstGeom prst="rect">
             <a:avLst>
@@ -30716,8 +30524,8 @@
         </p:nvSpPr>
         <p:spPr>
           <a:xfrm>
-            <a:off x="3911969" y="4169664"/>
-            <a:ext cx="603504" cy="384048"/>
+            <a:off x="3734077" y="4169664"/>
+            <a:ext cx="543652" cy="384048"/>
           </a:xfrm>
           <a:prstGeom prst="rect">
             <a:avLst/>
@@ -30755,8 +30563,8 @@
         </p:nvSpPr>
         <p:spPr>
           <a:xfrm>
-            <a:off x="4565350" y="4169664"/>
-            <a:ext cx="603504" cy="384048"/>
+            <a:off x="4328021" y="4169664"/>
+            <a:ext cx="543652" cy="384048"/>
           </a:xfrm>
           <a:prstGeom prst="rect">
             <a:avLst>
@@ -30782,8 +30590,8 @@
         </p:nvSpPr>
         <p:spPr>
           <a:xfrm>
-            <a:off x="4565350" y="4169664"/>
-            <a:ext cx="603504" cy="384048"/>
+            <a:off x="4328021" y="4169664"/>
+            <a:ext cx="543652" cy="384048"/>
           </a:xfrm>
           <a:prstGeom prst="rect">
             <a:avLst/>
@@ -30821,8 +30629,8 @@
         </p:nvSpPr>
         <p:spPr>
           <a:xfrm>
-            <a:off x="4565350" y="4572000"/>
-            <a:ext cx="603504" cy="219456"/>
+            <a:off x="4328021" y="4572000"/>
+            <a:ext cx="543652" cy="219456"/>
           </a:xfrm>
           <a:prstGeom prst="rect">
             <a:avLst/>
@@ -30860,8 +30668,8 @@
         </p:nvSpPr>
         <p:spPr>
           <a:xfrm>
-            <a:off x="5218730" y="4169664"/>
-            <a:ext cx="603504" cy="384048"/>
+            <a:off x="4921966" y="4169664"/>
+            <a:ext cx="543652" cy="384048"/>
           </a:xfrm>
           <a:prstGeom prst="rect">
             <a:avLst>
@@ -30887,8 +30695,8 @@
         </p:nvSpPr>
         <p:spPr>
           <a:xfrm>
-            <a:off x="5218730" y="4169664"/>
-            <a:ext cx="603504" cy="384048"/>
+            <a:off x="4921966" y="4169664"/>
+            <a:ext cx="543652" cy="384048"/>
           </a:xfrm>
           <a:prstGeom prst="rect">
             <a:avLst/>
@@ -30926,8 +30734,8 @@
         </p:nvSpPr>
         <p:spPr>
           <a:xfrm>
-            <a:off x="5872111" y="4169664"/>
-            <a:ext cx="603504" cy="384048"/>
+            <a:off x="5515910" y="4169664"/>
+            <a:ext cx="543652" cy="384048"/>
           </a:xfrm>
           <a:prstGeom prst="rect">
             <a:avLst>
@@ -30953,8 +30761,8 @@
         </p:nvSpPr>
         <p:spPr>
           <a:xfrm>
-            <a:off x="5872111" y="4169664"/>
-            <a:ext cx="603504" cy="384048"/>
+            <a:off x="5515910" y="4169664"/>
+            <a:ext cx="543652" cy="384048"/>
           </a:xfrm>
           <a:prstGeom prst="rect">
             <a:avLst/>
@@ -30992,8 +30800,8 @@
         </p:nvSpPr>
         <p:spPr>
           <a:xfrm>
-            <a:off x="6525491" y="4169664"/>
-            <a:ext cx="603504" cy="384048"/>
+            <a:off x="6109855" y="4169664"/>
+            <a:ext cx="543652" cy="384048"/>
           </a:xfrm>
           <a:prstGeom prst="rect">
             <a:avLst>
@@ -31019,8 +30827,8 @@
         </p:nvSpPr>
         <p:spPr>
           <a:xfrm>
-            <a:off x="6525491" y="4169664"/>
-            <a:ext cx="603504" cy="384048"/>
+            <a:off x="6109855" y="4169664"/>
+            <a:ext cx="543652" cy="384048"/>
           </a:xfrm>
           <a:prstGeom prst="rect">
             <a:avLst/>
@@ -31058,8 +30866,8 @@
         </p:nvSpPr>
         <p:spPr>
           <a:xfrm>
-            <a:off x="7178871" y="4169664"/>
-            <a:ext cx="603504" cy="384048"/>
+            <a:off x="6703799" y="4169664"/>
+            <a:ext cx="543652" cy="384048"/>
           </a:xfrm>
           <a:prstGeom prst="rect">
             <a:avLst>
@@ -31085,8 +30893,8 @@
         </p:nvSpPr>
         <p:spPr>
           <a:xfrm>
-            <a:off x="7178871" y="4169664"/>
-            <a:ext cx="603504" cy="384048"/>
+            <a:off x="6703799" y="4169664"/>
+            <a:ext cx="543652" cy="384048"/>
           </a:xfrm>
           <a:prstGeom prst="rect">
             <a:avLst/>
@@ -31124,8 +30932,8 @@
         </p:nvSpPr>
         <p:spPr>
           <a:xfrm>
-            <a:off x="7832252" y="4169664"/>
-            <a:ext cx="603504" cy="384048"/>
+            <a:off x="7297743" y="4169664"/>
+            <a:ext cx="543652" cy="384048"/>
           </a:xfrm>
           <a:prstGeom prst="rect">
             <a:avLst>
@@ -31151,8 +30959,8 @@
         </p:nvSpPr>
         <p:spPr>
           <a:xfrm>
-            <a:off x="7832252" y="4169664"/>
-            <a:ext cx="603504" cy="384048"/>
+            <a:off x="7297743" y="4169664"/>
+            <a:ext cx="543652" cy="384048"/>
           </a:xfrm>
           <a:prstGeom prst="rect">
             <a:avLst/>
@@ -31176,7 +30984,73 @@
                 <a:ea typeface="Trebuchet MS" pitchFamily="34" charset="-122"/>
                 <a:cs typeface="Trebuchet MS" pitchFamily="34" charset="-120"/>
               </a:rPr>
-              <a:t>ing</a:t>
+              <a:t>e</a:t>
+            </a:r>
+            <a:endParaRPr lang="en-US" sz="900" dirty="0"/>
+          </a:p>
+        </p:txBody>
+      </p:sp>
+      <p:sp>
+        <p:nvSpPr>
+          <p:cNvPr id="64" name="Shape 62"/>
+          <p:cNvSpPr/>
+          <p:nvPr/>
+        </p:nvSpPr>
+        <p:spPr>
+          <a:xfrm>
+            <a:off x="7891688" y="4169664"/>
+            <a:ext cx="543652" cy="384048"/>
+          </a:xfrm>
+          <a:prstGeom prst="rect">
+            <a:avLst>
+              <a:gd name="adj" fmla="val 9524"/>
+            </a:avLst>
+          </a:prstGeom>
+          <a:solidFill>
+            <a:srgbClr val="FFFFFF"/>
+          </a:solidFill>
+          <a:ln w="12700">
+            <a:solidFill>
+              <a:srgbClr val="DB2777"/>
+            </a:solidFill>
+            <a:prstDash val="solid"/>
+          </a:ln>
+        </p:spPr>
+      </p:sp>
+      <p:sp>
+        <p:nvSpPr>
+          <p:cNvPr id="65" name="Text 63"/>
+          <p:cNvSpPr/>
+          <p:nvPr/>
+        </p:nvSpPr>
+        <p:spPr>
+          <a:xfrm>
+            <a:off x="7891688" y="4169664"/>
+            <a:ext cx="543652" cy="384048"/>
+          </a:xfrm>
+          <a:prstGeom prst="rect">
+            <a:avLst/>
+          </a:prstGeom>
+          <a:noFill/>
+          <a:ln/>
+        </p:spPr>
+        <p:txBody>
+          <a:bodyPr wrap="square" lIns="0" tIns="0" rIns="0" bIns="0" rtlCol="0" anchor="ctr"/>
+          <a:lstStyle/>
+          <a:p>
+            <a:pPr algn="ctr" indent="0" marL="0">
+              <a:buNone/>
+            </a:pPr>
+            <a:r>
+              <a:rPr lang="en-US" sz="900" b="1" dirty="0">
+                <a:solidFill>
+                  <a:srgbClr val="9D174D"/>
+                </a:solidFill>
+                <a:latin typeface="Trebuchet MS" pitchFamily="34" charset="0"/>
+                <a:ea typeface="Trebuchet MS" pitchFamily="34" charset="-122"/>
+                <a:cs typeface="Trebuchet MS" pitchFamily="34" charset="-120"/>
+              </a:rPr>
+              <a:t>d</a:t>
             </a:r>
             <a:endParaRPr lang="en-US" sz="900" dirty="0"/>
           </a:p>
@@ -31607,7 +31481,7 @@
                 <a:ea typeface="Trebuchet MS" pitchFamily="34" charset="-122"/>
                 <a:cs typeface="Trebuchet MS" pitchFamily="34" charset="-120"/>
               </a:rPr>
-              <a:t>participation</a:t>
+              <a:t>participatory</a:t>
             </a:r>
             <a:endParaRPr lang="en-US" sz="2800" dirty="0"/>
           </a:p>
@@ -32434,7 +32308,7 @@
                 <a:ea typeface="Trebuchet MS" pitchFamily="34" charset="-122"/>
                 <a:cs typeface="Trebuchet MS" pitchFamily="34" charset="-120"/>
               </a:rPr>
-              <a:t>participation</a:t>
+              <a:t>participatory</a:t>
             </a:r>
             <a:endParaRPr lang="en-US" sz="2800" dirty="0"/>
           </a:p>
@@ -32724,7 +32598,7 @@
                 <a:ea typeface="Trebuchet MS" pitchFamily="34" charset="-122"/>
                 <a:cs typeface="Trebuchet MS" pitchFamily="34" charset="-120"/>
               </a:rPr>
-              <a:t>ion</a:t>
+              <a:t>ory</a:t>
             </a:r>
             <a:endParaRPr lang="en-US" sz="1300" dirty="0"/>
           </a:p>
@@ -32763,7 +32637,7 @@
                 <a:ea typeface="Calibri" pitchFamily="34" charset="-122"/>
                 <a:cs typeface="Calibri" pitchFamily="34" charset="-120"/>
               </a:rPr>
-              <a:t>act or process of</a:t>
+              <a:t>relating to or involving</a:t>
             </a:r>
             <a:endParaRPr lang="en-US" sz="850" dirty="0"/>
           </a:p>
@@ -33458,7 +33332,7 @@
                 <a:ea typeface="Trebuchet MS" pitchFamily="34" charset="-122"/>
                 <a:cs typeface="Trebuchet MS" pitchFamily="34" charset="-120"/>
               </a:rPr>
-              <a:t>participation</a:t>
+              <a:t>participatory</a:t>
             </a:r>
             <a:endParaRPr lang="en-US" sz="2800" dirty="0"/>
           </a:p>
@@ -33748,7 +33622,7 @@
                 <a:ea typeface="Trebuchet MS" pitchFamily="34" charset="-122"/>
                 <a:cs typeface="Trebuchet MS" pitchFamily="34" charset="-120"/>
               </a:rPr>
-              <a:t>ion</a:t>
+              <a:t>ory</a:t>
             </a:r>
             <a:endParaRPr lang="en-US" sz="1300" dirty="0"/>
           </a:p>
@@ -33787,7 +33661,7 @@
                 <a:ea typeface="Calibri" pitchFamily="34" charset="-122"/>
                 <a:cs typeface="Calibri" pitchFamily="34" charset="-120"/>
               </a:rPr>
-              <a:t>act or process of</a:t>
+              <a:t>relating to or involving</a:t>
             </a:r>
             <a:endParaRPr lang="en-US" sz="850" dirty="0"/>
           </a:p>
@@ -33894,8 +33768,8 @@
         </p:nvSpPr>
         <p:spPr>
           <a:xfrm>
-            <a:off x="1978152" y="3364992"/>
-            <a:ext cx="1225296" cy="475488"/>
+            <a:off x="1980329" y="3364992"/>
+            <a:ext cx="1005840" cy="475488"/>
           </a:xfrm>
           <a:prstGeom prst="rect">
             <a:avLst>
@@ -33921,8 +33795,8 @@
         </p:nvSpPr>
         <p:spPr>
           <a:xfrm>
-            <a:off x="1978152" y="3364992"/>
-            <a:ext cx="1225296" cy="475488"/>
+            <a:off x="1980329" y="3364992"/>
+            <a:ext cx="1005840" cy="475488"/>
           </a:xfrm>
           <a:prstGeom prst="rect">
             <a:avLst/>
@@ -33960,8 +33834,8 @@
         </p:nvSpPr>
         <p:spPr>
           <a:xfrm>
-            <a:off x="3203448" y="3364992"/>
-            <a:ext cx="76200" cy="475488"/>
+            <a:off x="2986169" y="3364992"/>
+            <a:ext cx="78377" cy="475488"/>
           </a:xfrm>
           <a:prstGeom prst="rect">
             <a:avLst/>
@@ -33999,8 +33873,8 @@
         </p:nvSpPr>
         <p:spPr>
           <a:xfrm>
-            <a:off x="3279648" y="3364992"/>
-            <a:ext cx="1225296" cy="475488"/>
+            <a:off x="3064546" y="3364992"/>
+            <a:ext cx="1005840" cy="475488"/>
           </a:xfrm>
           <a:prstGeom prst="rect">
             <a:avLst>
@@ -34026,8 +33900,8 @@
         </p:nvSpPr>
         <p:spPr>
           <a:xfrm>
-            <a:off x="3279648" y="3364992"/>
-            <a:ext cx="1225296" cy="475488"/>
+            <a:off x="3064546" y="3364992"/>
+            <a:ext cx="1005840" cy="475488"/>
           </a:xfrm>
           <a:prstGeom prst="rect">
             <a:avLst/>
@@ -34065,8 +33939,8 @@
         </p:nvSpPr>
         <p:spPr>
           <a:xfrm>
-            <a:off x="4504944" y="3364992"/>
-            <a:ext cx="76200" cy="475488"/>
+            <a:off x="4070386" y="3364992"/>
+            <a:ext cx="78377" cy="475488"/>
           </a:xfrm>
           <a:prstGeom prst="rect">
             <a:avLst/>
@@ -34104,8 +33978,8 @@
         </p:nvSpPr>
         <p:spPr>
           <a:xfrm>
-            <a:off x="4581144" y="3364992"/>
-            <a:ext cx="1225296" cy="475488"/>
+            <a:off x="4148763" y="3364992"/>
+            <a:ext cx="1005840" cy="475488"/>
           </a:xfrm>
           <a:prstGeom prst="rect">
             <a:avLst>
@@ -34131,8 +34005,8 @@
         </p:nvSpPr>
         <p:spPr>
           <a:xfrm>
-            <a:off x="4581144" y="3364992"/>
-            <a:ext cx="1225296" cy="475488"/>
+            <a:off x="4148763" y="3364992"/>
+            <a:ext cx="1005840" cy="475488"/>
           </a:xfrm>
           <a:prstGeom prst="rect">
             <a:avLst/>
@@ -34170,8 +34044,8 @@
         </p:nvSpPr>
         <p:spPr>
           <a:xfrm>
-            <a:off x="5806440" y="3364992"/>
-            <a:ext cx="76200" cy="475488"/>
+            <a:off x="5154603" y="3364992"/>
+            <a:ext cx="78377" cy="475488"/>
           </a:xfrm>
           <a:prstGeom prst="rect">
             <a:avLst/>
@@ -34209,8 +34083,8 @@
         </p:nvSpPr>
         <p:spPr>
           <a:xfrm>
-            <a:off x="5882640" y="3364992"/>
-            <a:ext cx="1225296" cy="475488"/>
+            <a:off x="5232981" y="3364992"/>
+            <a:ext cx="1005840" cy="475488"/>
           </a:xfrm>
           <a:prstGeom prst="rect">
             <a:avLst>
@@ -34236,8 +34110,8 @@
         </p:nvSpPr>
         <p:spPr>
           <a:xfrm>
-            <a:off x="5882640" y="3364992"/>
-            <a:ext cx="1225296" cy="475488"/>
+            <a:off x="5232981" y="3364992"/>
+            <a:ext cx="1005840" cy="475488"/>
           </a:xfrm>
           <a:prstGeom prst="rect">
             <a:avLst/>
@@ -34275,8 +34149,8 @@
         </p:nvSpPr>
         <p:spPr>
           <a:xfrm>
-            <a:off x="7107936" y="3364992"/>
-            <a:ext cx="76200" cy="475488"/>
+            <a:off x="6238821" y="3364992"/>
+            <a:ext cx="78377" cy="475488"/>
           </a:xfrm>
           <a:prstGeom prst="rect">
             <a:avLst/>
@@ -34314,8 +34188,8 @@
         </p:nvSpPr>
         <p:spPr>
           <a:xfrm>
-            <a:off x="7184136" y="3364992"/>
-            <a:ext cx="1225296" cy="475488"/>
+            <a:off x="6317198" y="3364992"/>
+            <a:ext cx="1005840" cy="475488"/>
           </a:xfrm>
           <a:prstGeom prst="rect">
             <a:avLst>
@@ -34341,8 +34215,8 @@
         </p:nvSpPr>
         <p:spPr>
           <a:xfrm>
-            <a:off x="7184136" y="3364992"/>
-            <a:ext cx="1225296" cy="475488"/>
+            <a:off x="6317198" y="3364992"/>
+            <a:ext cx="1005840" cy="475488"/>
           </a:xfrm>
           <a:prstGeom prst="rect">
             <a:avLst/>
@@ -34366,7 +34240,7 @@
                 <a:ea typeface="Trebuchet MS" pitchFamily="34" charset="-122"/>
                 <a:cs typeface="Trebuchet MS" pitchFamily="34" charset="-120"/>
               </a:rPr>
-              <a:t>tion</a:t>
+              <a:t>to</a:t>
             </a:r>
             <a:endParaRPr lang="en-US" sz="1400" dirty="0"/>
           </a:p>
@@ -34374,7 +34248,112 @@
       </p:sp>
       <p:sp>
         <p:nvSpPr>
-          <p:cNvPr id="40" name="Shape 38"/>
+          <p:cNvPr id="40" name="Text 38"/>
+          <p:cNvSpPr/>
+          <p:nvPr/>
+        </p:nvSpPr>
+        <p:spPr>
+          <a:xfrm>
+            <a:off x="7323038" y="3364992"/>
+            <a:ext cx="78377" cy="475488"/>
+          </a:xfrm>
+          <a:prstGeom prst="rect">
+            <a:avLst/>
+          </a:prstGeom>
+          <a:noFill/>
+          <a:ln/>
+        </p:spPr>
+        <p:txBody>
+          <a:bodyPr wrap="square" lIns="0" tIns="0" rIns="0" bIns="0" rtlCol="0" anchor="ctr"/>
+          <a:lstStyle/>
+          <a:p>
+            <a:pPr algn="ctr" indent="0" marL="0">
+              <a:buNone/>
+            </a:pPr>
+            <a:r>
+              <a:rPr lang="en-US" sz="1600" b="1" dirty="0">
+                <a:solidFill>
+                  <a:srgbClr val="0D9488"/>
+                </a:solidFill>
+                <a:latin typeface="Trebuchet MS" pitchFamily="34" charset="0"/>
+                <a:ea typeface="Trebuchet MS" pitchFamily="34" charset="-122"/>
+                <a:cs typeface="Trebuchet MS" pitchFamily="34" charset="-120"/>
+              </a:rPr>
+              <a:t>·</a:t>
+            </a:r>
+            <a:endParaRPr lang="en-US" sz="1600" dirty="0"/>
+          </a:p>
+        </p:txBody>
+      </p:sp>
+      <p:sp>
+        <p:nvSpPr>
+          <p:cNvPr id="41" name="Shape 39"/>
+          <p:cNvSpPr/>
+          <p:nvPr/>
+        </p:nvSpPr>
+        <p:spPr>
+          <a:xfrm>
+            <a:off x="7401415" y="3364992"/>
+            <a:ext cx="1005840" cy="475488"/>
+          </a:xfrm>
+          <a:prstGeom prst="rect">
+            <a:avLst>
+              <a:gd name="adj" fmla="val 9615"/>
+            </a:avLst>
+          </a:prstGeom>
+          <a:solidFill>
+            <a:srgbClr val="FFFFFF"/>
+          </a:solidFill>
+          <a:ln w="12700">
+            <a:solidFill>
+              <a:srgbClr val="0D9488"/>
+            </a:solidFill>
+            <a:prstDash val="solid"/>
+          </a:ln>
+        </p:spPr>
+      </p:sp>
+      <p:sp>
+        <p:nvSpPr>
+          <p:cNvPr id="42" name="Text 40"/>
+          <p:cNvSpPr/>
+          <p:nvPr/>
+        </p:nvSpPr>
+        <p:spPr>
+          <a:xfrm>
+            <a:off x="7401415" y="3364992"/>
+            <a:ext cx="1005840" cy="475488"/>
+          </a:xfrm>
+          <a:prstGeom prst="rect">
+            <a:avLst/>
+          </a:prstGeom>
+          <a:noFill/>
+          <a:ln/>
+        </p:spPr>
+        <p:txBody>
+          <a:bodyPr wrap="square" lIns="0" tIns="0" rIns="0" bIns="0" rtlCol="0" anchor="ctr"/>
+          <a:lstStyle/>
+          <a:p>
+            <a:pPr algn="ctr" indent="0" marL="0">
+              <a:buNone/>
+            </a:pPr>
+            <a:r>
+              <a:rPr lang="en-US" sz="1400" b="1" dirty="0">
+                <a:solidFill>
+                  <a:srgbClr val="0D9488"/>
+                </a:solidFill>
+                <a:latin typeface="Trebuchet MS" pitchFamily="34" charset="0"/>
+                <a:ea typeface="Trebuchet MS" pitchFamily="34" charset="-122"/>
+                <a:cs typeface="Trebuchet MS" pitchFamily="34" charset="-120"/>
+              </a:rPr>
+              <a:t>ry</a:t>
+            </a:r>
+            <a:endParaRPr lang="en-US" sz="1400" dirty="0"/>
+          </a:p>
+        </p:txBody>
+      </p:sp>
+      <p:sp>
+        <p:nvSpPr>
+          <p:cNvPr id="43" name="Shape 41"/>
           <p:cNvSpPr/>
           <p:nvPr/>
         </p:nvSpPr>
@@ -34401,7 +34380,7 @@
       </p:sp>
       <p:sp>
         <p:nvSpPr>
-          <p:cNvPr id="41" name="Text 39"/>
+          <p:cNvPr id="44" name="Text 42"/>
           <p:cNvSpPr/>
           <p:nvPr/>
         </p:nvSpPr>
@@ -34440,7 +34419,7 @@
       </p:sp>
       <p:sp>
         <p:nvSpPr>
-          <p:cNvPr id="42" name="Shape 40"/>
+          <p:cNvPr id="45" name="Shape 43"/>
           <p:cNvSpPr/>
           <p:nvPr/>
         </p:nvSpPr>
@@ -34467,7 +34446,7 @@
       </p:sp>
       <p:sp>
         <p:nvSpPr>
-          <p:cNvPr id="43" name="Text 41"/>
+          <p:cNvPr id="46" name="Text 44"/>
           <p:cNvSpPr/>
           <p:nvPr/>
         </p:nvSpPr>
@@ -34929,7 +34908,7 @@
                 <a:ea typeface="Trebuchet MS" pitchFamily="34" charset="-122"/>
                 <a:cs typeface="Trebuchet MS" pitchFamily="34" charset="-120"/>
               </a:rPr>
-              <a:t>participation</a:t>
+              <a:t>participatory</a:t>
             </a:r>
             <a:endParaRPr lang="en-US" sz="2800" dirty="0"/>
           </a:p>
@@ -35219,7 +35198,7 @@
                 <a:ea typeface="Trebuchet MS" pitchFamily="34" charset="-122"/>
                 <a:cs typeface="Trebuchet MS" pitchFamily="34" charset="-120"/>
               </a:rPr>
-              <a:t>ion</a:t>
+              <a:t>ory</a:t>
             </a:r>
             <a:endParaRPr lang="en-US" sz="1300" dirty="0"/>
           </a:p>
@@ -35258,7 +35237,7 @@
                 <a:ea typeface="Calibri" pitchFamily="34" charset="-122"/>
                 <a:cs typeface="Calibri" pitchFamily="34" charset="-120"/>
               </a:rPr>
-              <a:t>act or process of</a:t>
+              <a:t>relating to or involving</a:t>
             </a:r>
             <a:endParaRPr lang="en-US" sz="850" dirty="0"/>
           </a:p>
@@ -35365,8 +35344,8 @@
         </p:nvSpPr>
         <p:spPr>
           <a:xfrm>
-            <a:off x="1978152" y="3364992"/>
-            <a:ext cx="1225296" cy="475488"/>
+            <a:off x="1980329" y="3364992"/>
+            <a:ext cx="1005840" cy="475488"/>
           </a:xfrm>
           <a:prstGeom prst="rect">
             <a:avLst>
@@ -35392,8 +35371,8 @@
         </p:nvSpPr>
         <p:spPr>
           <a:xfrm>
-            <a:off x="1978152" y="3364992"/>
-            <a:ext cx="1225296" cy="475488"/>
+            <a:off x="1980329" y="3364992"/>
+            <a:ext cx="1005840" cy="475488"/>
           </a:xfrm>
           <a:prstGeom prst="rect">
             <a:avLst/>
@@ -35431,8 +35410,8 @@
         </p:nvSpPr>
         <p:spPr>
           <a:xfrm>
-            <a:off x="3203448" y="3364992"/>
-            <a:ext cx="76200" cy="475488"/>
+            <a:off x="2986169" y="3364992"/>
+            <a:ext cx="78377" cy="475488"/>
           </a:xfrm>
           <a:prstGeom prst="rect">
             <a:avLst/>
@@ -35470,8 +35449,8 @@
         </p:nvSpPr>
         <p:spPr>
           <a:xfrm>
-            <a:off x="3279648" y="3364992"/>
-            <a:ext cx="1225296" cy="475488"/>
+            <a:off x="3064546" y="3364992"/>
+            <a:ext cx="1005840" cy="475488"/>
           </a:xfrm>
           <a:prstGeom prst="rect">
             <a:avLst>
@@ -35497,8 +35476,8 @@
         </p:nvSpPr>
         <p:spPr>
           <a:xfrm>
-            <a:off x="3279648" y="3364992"/>
-            <a:ext cx="1225296" cy="475488"/>
+            <a:off x="3064546" y="3364992"/>
+            <a:ext cx="1005840" cy="475488"/>
           </a:xfrm>
           <a:prstGeom prst="rect">
             <a:avLst/>
@@ -35536,8 +35515,8 @@
         </p:nvSpPr>
         <p:spPr>
           <a:xfrm>
-            <a:off x="4504944" y="3364992"/>
-            <a:ext cx="76200" cy="475488"/>
+            <a:off x="4070386" y="3364992"/>
+            <a:ext cx="78377" cy="475488"/>
           </a:xfrm>
           <a:prstGeom prst="rect">
             <a:avLst/>
@@ -35575,8 +35554,8 @@
         </p:nvSpPr>
         <p:spPr>
           <a:xfrm>
-            <a:off x="4581144" y="3364992"/>
-            <a:ext cx="1225296" cy="475488"/>
+            <a:off x="4148763" y="3364992"/>
+            <a:ext cx="1005840" cy="475488"/>
           </a:xfrm>
           <a:prstGeom prst="rect">
             <a:avLst>
@@ -35602,8 +35581,8 @@
         </p:nvSpPr>
         <p:spPr>
           <a:xfrm>
-            <a:off x="4581144" y="3364992"/>
-            <a:ext cx="1225296" cy="475488"/>
+            <a:off x="4148763" y="3364992"/>
+            <a:ext cx="1005840" cy="475488"/>
           </a:xfrm>
           <a:prstGeom prst="rect">
             <a:avLst/>
@@ -35641,8 +35620,8 @@
         </p:nvSpPr>
         <p:spPr>
           <a:xfrm>
-            <a:off x="5806440" y="3364992"/>
-            <a:ext cx="76200" cy="475488"/>
+            <a:off x="5154603" y="3364992"/>
+            <a:ext cx="78377" cy="475488"/>
           </a:xfrm>
           <a:prstGeom prst="rect">
             <a:avLst/>
@@ -35680,8 +35659,8 @@
         </p:nvSpPr>
         <p:spPr>
           <a:xfrm>
-            <a:off x="5882640" y="3364992"/>
-            <a:ext cx="1225296" cy="475488"/>
+            <a:off x="5232981" y="3364992"/>
+            <a:ext cx="1005840" cy="475488"/>
           </a:xfrm>
           <a:prstGeom prst="rect">
             <a:avLst>
@@ -35707,8 +35686,8 @@
         </p:nvSpPr>
         <p:spPr>
           <a:xfrm>
-            <a:off x="5882640" y="3364992"/>
-            <a:ext cx="1225296" cy="475488"/>
+            <a:off x="5232981" y="3364992"/>
+            <a:ext cx="1005840" cy="475488"/>
           </a:xfrm>
           <a:prstGeom prst="rect">
             <a:avLst/>
@@ -35746,8 +35725,8 @@
         </p:nvSpPr>
         <p:spPr>
           <a:xfrm>
-            <a:off x="7107936" y="3364992"/>
-            <a:ext cx="76200" cy="475488"/>
+            <a:off x="6238821" y="3364992"/>
+            <a:ext cx="78377" cy="475488"/>
           </a:xfrm>
           <a:prstGeom prst="rect">
             <a:avLst/>
@@ -35785,8 +35764,8 @@
         </p:nvSpPr>
         <p:spPr>
           <a:xfrm>
-            <a:off x="7184136" y="3364992"/>
-            <a:ext cx="1225296" cy="475488"/>
+            <a:off x="6317198" y="3364992"/>
+            <a:ext cx="1005840" cy="475488"/>
           </a:xfrm>
           <a:prstGeom prst="rect">
             <a:avLst>
@@ -35812,8 +35791,8 @@
         </p:nvSpPr>
         <p:spPr>
           <a:xfrm>
-            <a:off x="7184136" y="3364992"/>
-            <a:ext cx="1225296" cy="475488"/>
+            <a:off x="6317198" y="3364992"/>
+            <a:ext cx="1005840" cy="475488"/>
           </a:xfrm>
           <a:prstGeom prst="rect">
             <a:avLst/>
@@ -35837,7 +35816,7 @@
                 <a:ea typeface="Trebuchet MS" pitchFamily="34" charset="-122"/>
                 <a:cs typeface="Trebuchet MS" pitchFamily="34" charset="-120"/>
               </a:rPr>
-              <a:t>tion</a:t>
+              <a:t>to</a:t>
             </a:r>
             <a:endParaRPr lang="en-US" sz="1400" dirty="0"/>
           </a:p>
@@ -35845,7 +35824,112 @@
       </p:sp>
       <p:sp>
         <p:nvSpPr>
-          <p:cNvPr id="40" name="Shape 38"/>
+          <p:cNvPr id="40" name="Text 38"/>
+          <p:cNvSpPr/>
+          <p:nvPr/>
+        </p:nvSpPr>
+        <p:spPr>
+          <a:xfrm>
+            <a:off x="7323038" y="3364992"/>
+            <a:ext cx="78377" cy="475488"/>
+          </a:xfrm>
+          <a:prstGeom prst="rect">
+            <a:avLst/>
+          </a:prstGeom>
+          <a:noFill/>
+          <a:ln/>
+        </p:spPr>
+        <p:txBody>
+          <a:bodyPr wrap="square" lIns="0" tIns="0" rIns="0" bIns="0" rtlCol="0" anchor="ctr"/>
+          <a:lstStyle/>
+          <a:p>
+            <a:pPr algn="ctr" indent="0" marL="0">
+              <a:buNone/>
+            </a:pPr>
+            <a:r>
+              <a:rPr lang="en-US" sz="1600" b="1" dirty="0">
+                <a:solidFill>
+                  <a:srgbClr val="0D9488"/>
+                </a:solidFill>
+                <a:latin typeface="Trebuchet MS" pitchFamily="34" charset="0"/>
+                <a:ea typeface="Trebuchet MS" pitchFamily="34" charset="-122"/>
+                <a:cs typeface="Trebuchet MS" pitchFamily="34" charset="-120"/>
+              </a:rPr>
+              <a:t>·</a:t>
+            </a:r>
+            <a:endParaRPr lang="en-US" sz="1600" dirty="0"/>
+          </a:p>
+        </p:txBody>
+      </p:sp>
+      <p:sp>
+        <p:nvSpPr>
+          <p:cNvPr id="41" name="Shape 39"/>
+          <p:cNvSpPr/>
+          <p:nvPr/>
+        </p:nvSpPr>
+        <p:spPr>
+          <a:xfrm>
+            <a:off x="7401415" y="3364992"/>
+            <a:ext cx="1005840" cy="475488"/>
+          </a:xfrm>
+          <a:prstGeom prst="rect">
+            <a:avLst>
+              <a:gd name="adj" fmla="val 9615"/>
+            </a:avLst>
+          </a:prstGeom>
+          <a:solidFill>
+            <a:srgbClr val="FFFFFF"/>
+          </a:solidFill>
+          <a:ln w="12700">
+            <a:solidFill>
+              <a:srgbClr val="0D9488"/>
+            </a:solidFill>
+            <a:prstDash val="solid"/>
+          </a:ln>
+        </p:spPr>
+      </p:sp>
+      <p:sp>
+        <p:nvSpPr>
+          <p:cNvPr id="42" name="Text 40"/>
+          <p:cNvSpPr/>
+          <p:nvPr/>
+        </p:nvSpPr>
+        <p:spPr>
+          <a:xfrm>
+            <a:off x="7401415" y="3364992"/>
+            <a:ext cx="1005840" cy="475488"/>
+          </a:xfrm>
+          <a:prstGeom prst="rect">
+            <a:avLst/>
+          </a:prstGeom>
+          <a:noFill/>
+          <a:ln/>
+        </p:spPr>
+        <p:txBody>
+          <a:bodyPr wrap="square" lIns="0" tIns="0" rIns="0" bIns="0" rtlCol="0" anchor="ctr"/>
+          <a:lstStyle/>
+          <a:p>
+            <a:pPr algn="ctr" indent="0" marL="0">
+              <a:buNone/>
+            </a:pPr>
+            <a:r>
+              <a:rPr lang="en-US" sz="1400" b="1" dirty="0">
+                <a:solidFill>
+                  <a:srgbClr val="0D9488"/>
+                </a:solidFill>
+                <a:latin typeface="Trebuchet MS" pitchFamily="34" charset="0"/>
+                <a:ea typeface="Trebuchet MS" pitchFamily="34" charset="-122"/>
+                <a:cs typeface="Trebuchet MS" pitchFamily="34" charset="-120"/>
+              </a:rPr>
+              <a:t>ry</a:t>
+            </a:r>
+            <a:endParaRPr lang="en-US" sz="1400" dirty="0"/>
+          </a:p>
+        </p:txBody>
+      </p:sp>
+      <p:sp>
+        <p:nvSpPr>
+          <p:cNvPr id="43" name="Shape 41"/>
           <p:cNvSpPr/>
           <p:nvPr/>
         </p:nvSpPr>
@@ -35872,7 +35956,7 @@
       </p:sp>
       <p:sp>
         <p:nvSpPr>
-          <p:cNvPr id="41" name="Text 39"/>
+          <p:cNvPr id="44" name="Text 42"/>
           <p:cNvSpPr/>
           <p:nvPr/>
         </p:nvSpPr>
@@ -35911,7 +35995,7 @@
       </p:sp>
       <p:sp>
         <p:nvSpPr>
-          <p:cNvPr id="42" name="Shape 40"/>
+          <p:cNvPr id="45" name="Shape 43"/>
           <p:cNvSpPr/>
           <p:nvPr/>
         </p:nvSpPr>
@@ -35938,7 +36022,7 @@
       </p:sp>
       <p:sp>
         <p:nvSpPr>
-          <p:cNvPr id="43" name="Shape 41"/>
+          <p:cNvPr id="46" name="Shape 44"/>
           <p:cNvSpPr/>
           <p:nvPr/>
         </p:nvSpPr>
@@ -35965,7 +36049,7 @@
       </p:sp>
       <p:sp>
         <p:nvSpPr>
-          <p:cNvPr id="44" name="Text 42"/>
+          <p:cNvPr id="47" name="Text 45"/>
           <p:cNvSpPr/>
           <p:nvPr/>
         </p:nvSpPr>
@@ -36004,7 +36088,7 @@
       </p:sp>
       <p:sp>
         <p:nvSpPr>
-          <p:cNvPr id="45" name="Shape 43"/>
+          <p:cNvPr id="48" name="Shape 46"/>
           <p:cNvSpPr/>
           <p:nvPr/>
         </p:nvSpPr>
@@ -36031,7 +36115,7 @@
       </p:sp>
       <p:sp>
         <p:nvSpPr>
-          <p:cNvPr id="46" name="Text 44"/>
+          <p:cNvPr id="49" name="Text 47"/>
           <p:cNvSpPr/>
           <p:nvPr/>
         </p:nvSpPr>
@@ -36070,7 +36154,7 @@
       </p:sp>
       <p:sp>
         <p:nvSpPr>
-          <p:cNvPr id="47" name="Shape 45"/>
+          <p:cNvPr id="50" name="Shape 48"/>
           <p:cNvSpPr/>
           <p:nvPr/>
         </p:nvSpPr>
@@ -36097,7 +36181,7 @@
       </p:sp>
       <p:sp>
         <p:nvSpPr>
-          <p:cNvPr id="48" name="Text 46"/>
+          <p:cNvPr id="51" name="Text 49"/>
           <p:cNvSpPr/>
           <p:nvPr/>
         </p:nvSpPr>
@@ -36136,7 +36220,7 @@
       </p:sp>
       <p:sp>
         <p:nvSpPr>
-          <p:cNvPr id="49" name="Shape 47"/>
+          <p:cNvPr id="52" name="Shape 50"/>
           <p:cNvSpPr/>
           <p:nvPr/>
         </p:nvSpPr>
@@ -36163,7 +36247,7 @@
       </p:sp>
       <p:sp>
         <p:nvSpPr>
-          <p:cNvPr id="50" name="Text 48"/>
+          <p:cNvPr id="53" name="Text 51"/>
           <p:cNvSpPr/>
           <p:nvPr/>
         </p:nvSpPr>
@@ -36202,7 +36286,7 @@
       </p:sp>
       <p:sp>
         <p:nvSpPr>
-          <p:cNvPr id="51" name="Shape 49"/>
+          <p:cNvPr id="54" name="Shape 52"/>
           <p:cNvSpPr/>
           <p:nvPr/>
         </p:nvSpPr>
@@ -36229,7 +36313,7 @@
       </p:sp>
       <p:sp>
         <p:nvSpPr>
-          <p:cNvPr id="52" name="Text 50"/>
+          <p:cNvPr id="55" name="Text 53"/>
           <p:cNvSpPr/>
           <p:nvPr/>
         </p:nvSpPr>
@@ -36268,7 +36352,7 @@
       </p:sp>
       <p:sp>
         <p:nvSpPr>
-          <p:cNvPr id="53" name="Text 51"/>
+          <p:cNvPr id="56" name="Text 54"/>
           <p:cNvSpPr/>
           <p:nvPr/>
         </p:nvSpPr>
@@ -36307,7 +36391,7 @@
       </p:sp>
       <p:sp>
         <p:nvSpPr>
-          <p:cNvPr id="54" name="Shape 52"/>
+          <p:cNvPr id="57" name="Shape 55"/>
           <p:cNvSpPr/>
           <p:nvPr/>
         </p:nvSpPr>
@@ -36334,7 +36418,7 @@
       </p:sp>
       <p:sp>
         <p:nvSpPr>
-          <p:cNvPr id="55" name="Text 53"/>
+          <p:cNvPr id="58" name="Text 56"/>
           <p:cNvSpPr/>
           <p:nvPr/>
         </p:nvSpPr>
@@ -36373,7 +36457,7 @@
       </p:sp>
       <p:sp>
         <p:nvSpPr>
-          <p:cNvPr id="56" name="Shape 54"/>
+          <p:cNvPr id="59" name="Shape 57"/>
           <p:cNvSpPr/>
           <p:nvPr/>
         </p:nvSpPr>
@@ -36400,7 +36484,7 @@
       </p:sp>
       <p:sp>
         <p:nvSpPr>
-          <p:cNvPr id="57" name="Text 55"/>
+          <p:cNvPr id="60" name="Text 58"/>
           <p:cNvSpPr/>
           <p:nvPr/>
         </p:nvSpPr>
@@ -36439,7 +36523,7 @@
       </p:sp>
       <p:sp>
         <p:nvSpPr>
-          <p:cNvPr id="58" name="Shape 56"/>
+          <p:cNvPr id="61" name="Shape 59"/>
           <p:cNvSpPr/>
           <p:nvPr/>
         </p:nvSpPr>
@@ -36466,7 +36550,7 @@
       </p:sp>
       <p:sp>
         <p:nvSpPr>
-          <p:cNvPr id="59" name="Text 57"/>
+          <p:cNvPr id="62" name="Text 60"/>
           <p:cNvSpPr/>
           <p:nvPr/>
         </p:nvSpPr>
@@ -36505,7 +36589,7 @@
       </p:sp>
       <p:sp>
         <p:nvSpPr>
-          <p:cNvPr id="60" name="Shape 58"/>
+          <p:cNvPr id="63" name="Shape 61"/>
           <p:cNvSpPr/>
           <p:nvPr/>
         </p:nvSpPr>
@@ -36532,7 +36616,7 @@
       </p:sp>
       <p:sp>
         <p:nvSpPr>
-          <p:cNvPr id="61" name="Text 59"/>
+          <p:cNvPr id="64" name="Text 62"/>
           <p:cNvSpPr/>
           <p:nvPr/>
         </p:nvSpPr>
@@ -36571,46 +36655,7 @@
       </p:sp>
       <p:sp>
         <p:nvSpPr>
-          <p:cNvPr id="62" name="Text 60"/>
-          <p:cNvSpPr/>
-          <p:nvPr/>
-        </p:nvSpPr>
-        <p:spPr>
-          <a:xfrm>
-            <a:off x="6703799" y="4572000"/>
-            <a:ext cx="543652" cy="219456"/>
-          </a:xfrm>
-          <a:prstGeom prst="rect">
-            <a:avLst/>
-          </a:prstGeom>
-          <a:noFill/>
-          <a:ln/>
-        </p:spPr>
-        <p:txBody>
-          <a:bodyPr wrap="square" lIns="0" tIns="0" rIns="0" bIns="0" rtlCol="0" anchor="t"/>
-          <a:lstStyle/>
-          <a:p>
-            <a:pPr algn="ctr" indent="0" marL="0">
-              <a:buNone/>
-            </a:pPr>
-            <a:r>
-              <a:rPr lang="en-US" sz="750" i="1" dirty="0">
-                <a:solidFill>
-                  <a:srgbClr val="94A3B8"/>
-                </a:solidFill>
-                <a:latin typeface="Calibri" pitchFamily="34" charset="0"/>
-                <a:ea typeface="Calibri" pitchFamily="34" charset="-122"/>
-                <a:cs typeface="Calibri" pitchFamily="34" charset="-120"/>
-              </a:rPr>
-              <a:t>/sh/</a:t>
-            </a:r>
-            <a:endParaRPr lang="en-US" sz="750" dirty="0"/>
-          </a:p>
-        </p:txBody>
-      </p:sp>
-      <p:sp>
-        <p:nvSpPr>
-          <p:cNvPr id="63" name="Shape 61"/>
+          <p:cNvPr id="65" name="Shape 63"/>
           <p:cNvSpPr/>
           <p:nvPr/>
         </p:nvSpPr>
@@ -36637,7 +36682,7 @@
       </p:sp>
       <p:sp>
         <p:nvSpPr>
-          <p:cNvPr id="64" name="Text 62"/>
+          <p:cNvPr id="66" name="Text 64"/>
           <p:cNvSpPr/>
           <p:nvPr/>
         </p:nvSpPr>
@@ -36668,7 +36713,7 @@
                 <a:ea typeface="Trebuchet MS" pitchFamily="34" charset="-122"/>
                 <a:cs typeface="Trebuchet MS" pitchFamily="34" charset="-120"/>
               </a:rPr>
-              <a:t>io</a:t>
+              <a:t>or</a:t>
             </a:r>
             <a:endParaRPr lang="en-US" sz="900" dirty="0"/>
           </a:p>
@@ -36676,7 +36721,7 @@
       </p:sp>
       <p:sp>
         <p:nvSpPr>
-          <p:cNvPr id="65" name="Shape 63"/>
+          <p:cNvPr id="67" name="Shape 65"/>
           <p:cNvSpPr/>
           <p:nvPr/>
         </p:nvSpPr>
@@ -36703,7 +36748,7 @@
       </p:sp>
       <p:sp>
         <p:nvSpPr>
-          <p:cNvPr id="66" name="Text 64"/>
+          <p:cNvPr id="68" name="Text 66"/>
           <p:cNvSpPr/>
           <p:nvPr/>
         </p:nvSpPr>
@@ -36734,7 +36779,7 @@
                 <a:ea typeface="Trebuchet MS" pitchFamily="34" charset="-122"/>
                 <a:cs typeface="Trebuchet MS" pitchFamily="34" charset="-120"/>
               </a:rPr>
-              <a:t>n</a:t>
+              <a:t>y</a:t>
             </a:r>
             <a:endParaRPr lang="en-US" sz="900" dirty="0"/>
           </a:p>
@@ -38496,7 +38541,7 @@
                 <a:ea typeface="Trebuchet MS" pitchFamily="34" charset="-122"/>
                 <a:cs typeface="Trebuchet MS" pitchFamily="34" charset="-120"/>
               </a:rPr>
-              <a:t>non-</a:t>
+              <a:t>re-</a:t>
             </a:r>
             <a:endParaRPr lang="en-US" sz="1300" dirty="0"/>
           </a:p>
@@ -38624,7 +38669,7 @@
                 <a:ea typeface="Trebuchet MS" pitchFamily="34" charset="-122"/>
                 <a:cs typeface="Trebuchet MS" pitchFamily="34" charset="-120"/>
               </a:rPr>
-              <a:t>--ion</a:t>
+              <a:t>-ion</a:t>
             </a:r>
             <a:endParaRPr lang="en-US" sz="1300" dirty="0"/>
           </a:p>
@@ -38688,7 +38733,7 @@
                 <a:ea typeface="Trebuchet MS" pitchFamily="34" charset="-122"/>
                 <a:cs typeface="Trebuchet MS" pitchFamily="34" charset="-120"/>
               </a:rPr>
-              <a:t>co-</a:t>
+              <a:t>non-</a:t>
             </a:r>
             <a:endParaRPr lang="en-US" sz="1300" dirty="0"/>
           </a:p>
@@ -38777,7 +38822,7 @@
                 <a:ea typeface="Trebuchet MS" pitchFamily="34" charset="-122"/>
                 <a:cs typeface="Trebuchet MS" pitchFamily="34" charset="-120"/>
               </a:rPr>
-              <a:t>--ing</a:t>
+              <a:t>-ing</a:t>
             </a:r>
             <a:endParaRPr lang="en-US" sz="1300" dirty="0"/>
           </a:p>
@@ -38841,7 +38886,7 @@
                 <a:ea typeface="Trebuchet MS" pitchFamily="34" charset="-122"/>
                 <a:cs typeface="Trebuchet MS" pitchFamily="34" charset="-120"/>
               </a:rPr>
-              <a:t>re-</a:t>
+              <a:t>co-</a:t>
             </a:r>
             <a:endParaRPr lang="en-US" sz="1300" dirty="0"/>
           </a:p>
@@ -38930,7 +38975,7 @@
                 <a:ea typeface="Trebuchet MS" pitchFamily="34" charset="-122"/>
                 <a:cs typeface="Trebuchet MS" pitchFamily="34" charset="-120"/>
               </a:rPr>
-              <a:t>--ed</a:t>
+              <a:t>-ed</a:t>
             </a:r>
             <a:endParaRPr lang="en-US" sz="1300" dirty="0"/>
           </a:p>
@@ -38994,7 +39039,7 @@
                 <a:ea typeface="Trebuchet MS" pitchFamily="34" charset="-122"/>
                 <a:cs typeface="Trebuchet MS" pitchFamily="34" charset="-120"/>
               </a:rPr>
-              <a:t>over-</a:t>
+              <a:t>pre-</a:t>
             </a:r>
             <a:endParaRPr lang="en-US" sz="1300" dirty="0"/>
           </a:p>
@@ -39083,7 +39128,7 @@
                 <a:ea typeface="Trebuchet MS" pitchFamily="34" charset="-122"/>
                 <a:cs typeface="Trebuchet MS" pitchFamily="34" charset="-120"/>
               </a:rPr>
-              <a:t>--ant</a:t>
+              <a:t>-ant</a:t>
             </a:r>
             <a:endParaRPr lang="en-US" sz="1300" dirty="0"/>
           </a:p>
@@ -39147,7 +39192,7 @@
                 <a:ea typeface="Trebuchet MS" pitchFamily="34" charset="-122"/>
                 <a:cs typeface="Trebuchet MS" pitchFamily="34" charset="-120"/>
               </a:rPr>
-              <a:t>under-</a:t>
+              <a:t>over-</a:t>
             </a:r>
             <a:endParaRPr lang="en-US" sz="1300" dirty="0"/>
           </a:p>
@@ -39236,7 +39281,7 @@
                 <a:ea typeface="Trebuchet MS" pitchFamily="34" charset="-122"/>
                 <a:cs typeface="Trebuchet MS" pitchFamily="34" charset="-120"/>
               </a:rPr>
-              <a:t>--ory</a:t>
+              <a:t>-ory</a:t>
             </a:r>
             <a:endParaRPr lang="en-US" sz="1300" dirty="0"/>
           </a:p>
@@ -39341,7 +39386,7 @@
                 <a:ea typeface="Trebuchet MS" pitchFamily="34" charset="-122"/>
                 <a:cs typeface="Trebuchet MS" pitchFamily="34" charset="-120"/>
               </a:rPr>
-              <a:t>participate</a:t>
+              <a:t>participation</a:t>
             </a:r>
             <a:endParaRPr lang="en-US" sz="1200" dirty="0"/>
           </a:p>
@@ -39407,7 +39452,7 @@
                 <a:ea typeface="Trebuchet MS" pitchFamily="34" charset="-122"/>
                 <a:cs typeface="Trebuchet MS" pitchFamily="34" charset="-120"/>
               </a:rPr>
-              <a:t>participation</a:t>
+              <a:t>participating</a:t>
             </a:r>
             <a:endParaRPr lang="en-US" sz="1200" dirty="0"/>
           </a:p>
@@ -39473,7 +39518,7 @@
                 <a:ea typeface="Trebuchet MS" pitchFamily="34" charset="-122"/>
                 <a:cs typeface="Trebuchet MS" pitchFamily="34" charset="-120"/>
               </a:rPr>
-              <a:t>participating</a:t>
+              <a:t>participated</a:t>
             </a:r>
             <a:endParaRPr lang="en-US" sz="1200" dirty="0"/>
           </a:p>
@@ -39539,7 +39584,7 @@
                 <a:ea typeface="Trebuchet MS" pitchFamily="34" charset="-122"/>
                 <a:cs typeface="Trebuchet MS" pitchFamily="34" charset="-120"/>
               </a:rPr>
-              <a:t>participated</a:t>
+              <a:t>participant</a:t>
             </a:r>
             <a:endParaRPr lang="en-US" sz="1200" dirty="0"/>
           </a:p>
@@ -39605,7 +39650,7 @@
                 <a:ea typeface="Trebuchet MS" pitchFamily="34" charset="-122"/>
                 <a:cs typeface="Trebuchet MS" pitchFamily="34" charset="-120"/>
               </a:rPr>
-              <a:t>participant</a:t>
+              <a:t>participants</a:t>
             </a:r>
             <a:endParaRPr lang="en-US" sz="1200" dirty="0"/>
           </a:p>
@@ -39671,7 +39716,7 @@
                 <a:ea typeface="Trebuchet MS" pitchFamily="34" charset="-122"/>
                 <a:cs typeface="Trebuchet MS" pitchFamily="34" charset="-120"/>
               </a:rPr>
-              <a:t>participants</a:t>
+              <a:t>participatory</a:t>
             </a:r>
             <a:endParaRPr lang="en-US" sz="1200" dirty="0"/>
           </a:p>
@@ -39737,7 +39782,7 @@
                 <a:ea typeface="Trebuchet MS" pitchFamily="34" charset="-122"/>
                 <a:cs typeface="Trebuchet MS" pitchFamily="34" charset="-120"/>
               </a:rPr>
-              <a:t>participatory</a:t>
+              <a:t>nonparticipation</a:t>
             </a:r>
             <a:endParaRPr lang="en-US" sz="1200" dirty="0"/>
           </a:p>
@@ -39803,7 +39848,7 @@
                 <a:ea typeface="Trebuchet MS" pitchFamily="34" charset="-122"/>
                 <a:cs typeface="Trebuchet MS" pitchFamily="34" charset="-120"/>
               </a:rPr>
-              <a:t>non-participant</a:t>
+              <a:t>reparticipate</a:t>
             </a:r>
             <a:endParaRPr lang="en-US" sz="1200" dirty="0"/>
           </a:p>
@@ -40991,7 +41036,7 @@
                 <a:ea typeface="Calibri" pitchFamily="34" charset="-122"/>
                 <a:cs typeface="Calibri" pitchFamily="34" charset="-120"/>
               </a:rPr>
-              <a:t>1.  The root 'participate' comes from the Latin language.</a:t>
+              <a:t>1.  A participant is someone who watches but does not join in.</a:t>
             </a:r>
             <a:endParaRPr lang="en-US" sz="1300" dirty="0"/>
           </a:p>
@@ -41014,11 +41059,11 @@
             </a:avLst>
           </a:prstGeom>
           <a:solidFill>
-            <a:srgbClr val="DCFCE7"/>
-          </a:solidFill>
-          <a:ln w="12700">
-            <a:solidFill>
-              <a:srgbClr val="16A34A"/>
+            <a:srgbClr val="FEE2E2"/>
+          </a:solidFill>
+          <a:ln w="12700">
+            <a:solidFill>
+              <a:srgbClr val="DC2626"/>
             </a:solidFill>
             <a:prstDash val="solid"/>
           </a:ln>
@@ -41051,13 +41096,13 @@
             <a:r>
               <a:rPr lang="en-US" sz="1100" b="1" dirty="0">
                 <a:solidFill>
-                  <a:srgbClr val="16A34A"/>
+                  <a:srgbClr val="DC2626"/>
                 </a:solidFill>
                 <a:latin typeface="Trebuchet MS" pitchFamily="34" charset="0"/>
                 <a:ea typeface="Trebuchet MS" pitchFamily="34" charset="-122"/>
                 <a:cs typeface="Trebuchet MS" pitchFamily="34" charset="-120"/>
               </a:rPr>
-              <a:t>TRUE</a:t>
+              <a:t>FALSE</a:t>
             </a:r>
             <a:endParaRPr lang="en-US" sz="1100" dirty="0"/>
           </a:p>
@@ -41130,7 +41175,7 @@
                 <a:ea typeface="Calibri" pitchFamily="34" charset="-122"/>
                 <a:cs typeface="Calibri" pitchFamily="34" charset="-120"/>
               </a:rPr>
-              <a:t>2.  A participant is someone who watches but never joins in.</a:t>
+              <a:t>2.  The prefix 'non-' in 'nonparticipation' means again.</a:t>
             </a:r>
             <a:endParaRPr lang="en-US" sz="1300" dirty="0"/>
           </a:p>
@@ -41269,7 +41314,7 @@
                 <a:ea typeface="Calibri" pitchFamily="34" charset="-122"/>
                 <a:cs typeface="Calibri" pitchFamily="34" charset="-120"/>
               </a:rPr>
-              <a:t>3.  The word 'participation' contains the root 'participate'.</a:t>
+              <a:t>3.  The word 'participating' contains the root 'participate'.</a:t>
             </a:r>
             <a:endParaRPr lang="en-US" sz="1300" dirty="0"/>
           </a:p>
@@ -41408,7 +41453,7 @@
                 <a:ea typeface="Calibri" pitchFamily="34" charset="-122"/>
                 <a:cs typeface="Calibri" pitchFamily="34" charset="-120"/>
               </a:rPr>
-              <a:t>4.  Participatory activities are ones where people join in and get involved.</a:t>
+              <a:t>4.  Adding '-ion' to 'participate' makes the word 'participation'.</a:t>
             </a:r>
             <a:endParaRPr lang="en-US" sz="1300" dirty="0"/>
           </a:p>
@@ -41547,7 +41592,7 @@
                 <a:ea typeface="Calibri" pitchFamily="34" charset="-122"/>
                 <a:cs typeface="Calibri" pitchFamily="34" charset="-120"/>
               </a:rPr>
-              <a:t>5.  The prefix 'non' means to do something again.</a:t>
+              <a:t>5.  The root 'participate' comes from Latin.</a:t>
             </a:r>
             <a:endParaRPr lang="en-US" sz="1300" dirty="0"/>
           </a:p>
@@ -41570,11 +41615,11 @@
             </a:avLst>
           </a:prstGeom>
           <a:solidFill>
-            <a:srgbClr val="FEE2E2"/>
-          </a:solidFill>
-          <a:ln w="12700">
-            <a:solidFill>
-              <a:srgbClr val="DC2626"/>
+            <a:srgbClr val="DCFCE7"/>
+          </a:solidFill>
+          <a:ln w="12700">
+            <a:solidFill>
+              <a:srgbClr val="16A34A"/>
             </a:solidFill>
             <a:prstDash val="solid"/>
           </a:ln>
@@ -41607,13 +41652,13 @@
             <a:r>
               <a:rPr lang="en-US" sz="1100" b="1" dirty="0">
                 <a:solidFill>
-                  <a:srgbClr val="DC2626"/>
+                  <a:srgbClr val="16A34A"/>
                 </a:solidFill>
                 <a:latin typeface="Trebuchet MS" pitchFamily="34" charset="0"/>
                 <a:ea typeface="Trebuchet MS" pitchFamily="34" charset="-122"/>
                 <a:cs typeface="Trebuchet MS" pitchFamily="34" charset="-120"/>
               </a:rPr>
-              <a:t>FALSE</a:t>
+              <a:t>TRUE</a:t>
             </a:r>
             <a:endParaRPr lang="en-US" sz="1100" dirty="0"/>
           </a:p>
@@ -42186,7 +42231,7 @@
                 <a:ea typeface="Trebuchet MS" pitchFamily="34" charset="-122"/>
                 <a:cs typeface="Trebuchet MS" pitchFamily="34" charset="-120"/>
               </a:rPr>
-              <a:t>participate</a:t>
+              <a:t>participation</a:t>
             </a:r>
             <a:endParaRPr lang="en-US" sz="1300" dirty="0"/>
           </a:p>
@@ -42252,7 +42297,7 @@
                 <a:ea typeface="Trebuchet MS" pitchFamily="34" charset="-122"/>
                 <a:cs typeface="Trebuchet MS" pitchFamily="34" charset="-120"/>
               </a:rPr>
-              <a:t>participation</a:t>
+              <a:t>participating</a:t>
             </a:r>
             <a:endParaRPr lang="en-US" sz="1300" dirty="0"/>
           </a:p>
@@ -42318,7 +42363,7 @@
                 <a:ea typeface="Trebuchet MS" pitchFamily="34" charset="-122"/>
                 <a:cs typeface="Trebuchet MS" pitchFamily="34" charset="-120"/>
               </a:rPr>
-              <a:t>participating</a:t>
+              <a:t>participated</a:t>
             </a:r>
             <a:endParaRPr lang="en-US" sz="1300" dirty="0"/>
           </a:p>
@@ -42384,7 +42429,7 @@
                 <a:ea typeface="Trebuchet MS" pitchFamily="34" charset="-122"/>
                 <a:cs typeface="Trebuchet MS" pitchFamily="34" charset="-120"/>
               </a:rPr>
-              <a:t>participated</a:t>
+              <a:t>participant</a:t>
             </a:r>
             <a:endParaRPr lang="en-US" sz="1300" dirty="0"/>
           </a:p>
@@ -42450,7 +42495,7 @@
                 <a:ea typeface="Trebuchet MS" pitchFamily="34" charset="-122"/>
                 <a:cs typeface="Trebuchet MS" pitchFamily="34" charset="-120"/>
               </a:rPr>
-              <a:t>participant</a:t>
+              <a:t>participants</a:t>
             </a:r>
             <a:endParaRPr lang="en-US" sz="1300" dirty="0"/>
           </a:p>
@@ -42516,7 +42561,7 @@
                 <a:ea typeface="Trebuchet MS" pitchFamily="34" charset="-122"/>
                 <a:cs typeface="Trebuchet MS" pitchFamily="34" charset="-120"/>
               </a:rPr>
-              <a:t>participants</a:t>
+              <a:t>participatory</a:t>
             </a:r>
             <a:endParaRPr lang="en-US" sz="1300" dirty="0"/>
           </a:p>
@@ -42582,7 +42627,7 @@
                 <a:ea typeface="Trebuchet MS" pitchFamily="34" charset="-122"/>
                 <a:cs typeface="Trebuchet MS" pitchFamily="34" charset="-120"/>
               </a:rPr>
-              <a:t>participatory</a:t>
+              <a:t>nonparticipation</a:t>
             </a:r>
             <a:endParaRPr lang="en-US" sz="1300" dirty="0"/>
           </a:p>
@@ -43175,7 +43220,7 @@
                 <a:ea typeface="Trebuchet MS" pitchFamily="34" charset="-122"/>
                 <a:cs typeface="Trebuchet MS" pitchFamily="34" charset="-120"/>
               </a:rPr>
-              <a:t>non-</a:t>
+              <a:t>re-</a:t>
             </a:r>
             <a:endParaRPr lang="en-US" sz="1300" dirty="0"/>
           </a:p>
@@ -43303,7 +43348,7 @@
                 <a:ea typeface="Trebuchet MS" pitchFamily="34" charset="-122"/>
                 <a:cs typeface="Trebuchet MS" pitchFamily="34" charset="-120"/>
               </a:rPr>
-              <a:t>--ion</a:t>
+              <a:t>-ion</a:t>
             </a:r>
             <a:endParaRPr lang="en-US" sz="1300" dirty="0"/>
           </a:p>
@@ -43367,7 +43412,7 @@
                 <a:ea typeface="Trebuchet MS" pitchFamily="34" charset="-122"/>
                 <a:cs typeface="Trebuchet MS" pitchFamily="34" charset="-120"/>
               </a:rPr>
-              <a:t>co-</a:t>
+              <a:t>non-</a:t>
             </a:r>
             <a:endParaRPr lang="en-US" sz="1300" dirty="0"/>
           </a:p>
@@ -43456,7 +43501,7 @@
                 <a:ea typeface="Trebuchet MS" pitchFamily="34" charset="-122"/>
                 <a:cs typeface="Trebuchet MS" pitchFamily="34" charset="-120"/>
               </a:rPr>
-              <a:t>--ing</a:t>
+              <a:t>-ing</a:t>
             </a:r>
             <a:endParaRPr lang="en-US" sz="1300" dirty="0"/>
           </a:p>
@@ -43520,7 +43565,7 @@
                 <a:ea typeface="Trebuchet MS" pitchFamily="34" charset="-122"/>
                 <a:cs typeface="Trebuchet MS" pitchFamily="34" charset="-120"/>
               </a:rPr>
-              <a:t>re-</a:t>
+              <a:t>co-</a:t>
             </a:r>
             <a:endParaRPr lang="en-US" sz="1300" dirty="0"/>
           </a:p>
@@ -43609,7 +43654,7 @@
                 <a:ea typeface="Trebuchet MS" pitchFamily="34" charset="-122"/>
                 <a:cs typeface="Trebuchet MS" pitchFamily="34" charset="-120"/>
               </a:rPr>
-              <a:t>--ed</a:t>
+              <a:t>-ed</a:t>
             </a:r>
             <a:endParaRPr lang="en-US" sz="1300" dirty="0"/>
           </a:p>
@@ -43673,7 +43718,7 @@
                 <a:ea typeface="Trebuchet MS" pitchFamily="34" charset="-122"/>
                 <a:cs typeface="Trebuchet MS" pitchFamily="34" charset="-120"/>
               </a:rPr>
-              <a:t>over-</a:t>
+              <a:t>pre-</a:t>
             </a:r>
             <a:endParaRPr lang="en-US" sz="1300" dirty="0"/>
           </a:p>
@@ -43762,7 +43807,7 @@
                 <a:ea typeface="Trebuchet MS" pitchFamily="34" charset="-122"/>
                 <a:cs typeface="Trebuchet MS" pitchFamily="34" charset="-120"/>
               </a:rPr>
-              <a:t>--ant</a:t>
+              <a:t>-ant</a:t>
             </a:r>
             <a:endParaRPr lang="en-US" sz="1300" dirty="0"/>
           </a:p>
@@ -43826,7 +43871,7 @@
                 <a:ea typeface="Trebuchet MS" pitchFamily="34" charset="-122"/>
                 <a:cs typeface="Trebuchet MS" pitchFamily="34" charset="-120"/>
               </a:rPr>
-              <a:t>under-</a:t>
+              <a:t>over-</a:t>
             </a:r>
             <a:endParaRPr lang="en-US" sz="1300" dirty="0"/>
           </a:p>
@@ -43915,7 +43960,7 @@
                 <a:ea typeface="Trebuchet MS" pitchFamily="34" charset="-122"/>
                 <a:cs typeface="Trebuchet MS" pitchFamily="34" charset="-120"/>
               </a:rPr>
-              <a:t>--ory</a:t>
+              <a:t>-ory</a:t>
             </a:r>
             <a:endParaRPr lang="en-US" sz="1300" dirty="0"/>
           </a:p>
@@ -43969,7 +44014,7 @@
         <p:spPr>
           <a:xfrm>
             <a:off x="1508760" y="4178808"/>
-            <a:ext cx="950976" cy="420624"/>
+            <a:ext cx="822960" cy="420624"/>
           </a:xfrm>
           <a:prstGeom prst="rect">
             <a:avLst>
@@ -44003,7 +44048,7 @@
         <p:spPr>
           <a:xfrm>
             <a:off x="1508760" y="4178808"/>
-            <a:ext cx="950976" cy="420624"/>
+            <a:ext cx="822960" cy="420624"/>
           </a:xfrm>
           <a:prstGeom prst="rect">
             <a:avLst/>
@@ -44027,7 +44072,7 @@
                 <a:ea typeface="Trebuchet MS" pitchFamily="34" charset="-122"/>
                 <a:cs typeface="Trebuchet MS" pitchFamily="34" charset="-120"/>
               </a:rPr>
-              <a:t>non-</a:t>
+              <a:t>re-</a:t>
             </a:r>
             <a:endParaRPr lang="en-US" sz="1300" dirty="0"/>
           </a:p>
@@ -44041,7 +44086,7 @@
         </p:nvSpPr>
         <p:spPr>
           <a:xfrm>
-            <a:off x="2487168" y="4178808"/>
+            <a:off x="2359152" y="4178808"/>
             <a:ext cx="320040" cy="420624"/>
           </a:xfrm>
           <a:prstGeom prst="rect">
@@ -44080,7 +44125,7 @@
         </p:nvSpPr>
         <p:spPr>
           <a:xfrm>
-            <a:off x="2834640" y="4178808"/>
+            <a:off x="2706624" y="4178808"/>
             <a:ext cx="2267712" cy="420624"/>
           </a:xfrm>
           <a:prstGeom prst="rect">
@@ -44114,7 +44159,7 @@
         </p:nvSpPr>
         <p:spPr>
           <a:xfrm>
-            <a:off x="2834640" y="4178808"/>
+            <a:off x="2706624" y="4178808"/>
             <a:ext cx="2267712" cy="420624"/>
           </a:xfrm>
           <a:prstGeom prst="rect">
@@ -44153,7 +44198,7 @@
         </p:nvSpPr>
         <p:spPr>
           <a:xfrm>
-            <a:off x="5129784" y="4178808"/>
+            <a:off x="5001768" y="4178808"/>
             <a:ext cx="320040" cy="420624"/>
           </a:xfrm>
           <a:prstGeom prst="rect">
@@ -44192,8 +44237,8 @@
         </p:nvSpPr>
         <p:spPr>
           <a:xfrm>
-            <a:off x="5477256" y="4178808"/>
-            <a:ext cx="1097280" cy="420624"/>
+            <a:off x="5349240" y="4178808"/>
+            <a:ext cx="950976" cy="420624"/>
           </a:xfrm>
           <a:prstGeom prst="rect">
             <a:avLst>
@@ -44226,8 +44271,8 @@
         </p:nvSpPr>
         <p:spPr>
           <a:xfrm>
-            <a:off x="5477256" y="4178808"/>
-            <a:ext cx="1097280" cy="420624"/>
+            <a:off x="5349240" y="4178808"/>
+            <a:ext cx="950976" cy="420624"/>
           </a:xfrm>
           <a:prstGeom prst="rect">
             <a:avLst/>
@@ -44251,7 +44296,7 @@
                 <a:ea typeface="Trebuchet MS" pitchFamily="34" charset="-122"/>
                 <a:cs typeface="Trebuchet MS" pitchFamily="34" charset="-120"/>
               </a:rPr>
-              <a:t>--ion</a:t>
+              <a:t>-ion</a:t>
             </a:r>
             <a:endParaRPr lang="en-US" sz="1300" dirty="0"/>
           </a:p>
@@ -44265,7 +44310,7 @@
         </p:nvSpPr>
         <p:spPr>
           <a:xfrm>
-            <a:off x="6647688" y="4178808"/>
+            <a:off x="6373368" y="4178808"/>
             <a:ext cx="365760" cy="420624"/>
           </a:xfrm>
           <a:prstGeom prst="rect">
@@ -44304,7 +44349,7 @@
         </p:nvSpPr>
         <p:spPr>
           <a:xfrm>
-            <a:off x="7059168" y="4178808"/>
+            <a:off x="6784848" y="4178808"/>
             <a:ext cx="2194560" cy="420624"/>
           </a:xfrm>
           <a:prstGeom prst="rect">
@@ -44331,7 +44376,7 @@
         </p:nvSpPr>
         <p:spPr>
           <a:xfrm>
-            <a:off x="7059168" y="4178808"/>
+            <a:off x="6784848" y="4178808"/>
             <a:ext cx="2194560" cy="420624"/>
           </a:xfrm>
           <a:prstGeom prst="rect">
@@ -44356,7 +44401,7 @@
                 <a:ea typeface="Trebuchet MS" pitchFamily="34" charset="-122"/>
                 <a:cs typeface="Trebuchet MS" pitchFamily="34" charset="-120"/>
               </a:rPr>
-              <a:t>participate</a:t>
+              <a:t>participation</a:t>
             </a:r>
             <a:endParaRPr lang="en-US" sz="1400" dirty="0"/>
           </a:p>
@@ -44760,7 +44805,7 @@
                 <a:ea typeface="Trebuchet MS" pitchFamily="34" charset="-122"/>
                 <a:cs typeface="Trebuchet MS" pitchFamily="34" charset="-120"/>
               </a:rPr>
-              <a:t>participate</a:t>
+              <a:t>participation</a:t>
             </a:r>
             <a:endParaRPr lang="en-US" sz="1200" dirty="0"/>
           </a:p>
@@ -44826,7 +44871,7 @@
                 <a:ea typeface="Calibri" pitchFamily="34" charset="-122"/>
                 <a:cs typeface="Calibri" pitchFamily="34" charset="-120"/>
               </a:rPr>
-              <a:t>Currently taking part in an activity or event.</a:t>
+              <a:t>Took part in something that already happened in the past.</a:t>
             </a:r>
             <a:endParaRPr lang="en-US" sz="1200" dirty="0"/>
           </a:p>
@@ -44899,7 +44944,7 @@
                 <a:ea typeface="Trebuchet MS" pitchFamily="34" charset="-122"/>
                 <a:cs typeface="Trebuchet MS" pitchFamily="34" charset="-120"/>
               </a:rPr>
-              <a:t>participation</a:t>
+              <a:t>participating</a:t>
             </a:r>
             <a:endParaRPr lang="en-US" sz="1200" dirty="0"/>
           </a:p>
@@ -44965,7 +45010,7 @@
                 <a:ea typeface="Calibri" pitchFamily="34" charset="-122"/>
                 <a:cs typeface="Calibri" pitchFamily="34" charset="-120"/>
               </a:rPr>
-              <a:t>A person who takes part in an activity or event.</a:t>
+              <a:t>More than one person who is taking part in an activity or event.</a:t>
             </a:r>
             <a:endParaRPr lang="en-US" sz="1200" dirty="0"/>
           </a:p>
@@ -45038,7 +45083,7 @@
                 <a:ea typeface="Trebuchet MS" pitchFamily="34" charset="-122"/>
                 <a:cs typeface="Trebuchet MS" pitchFamily="34" charset="-120"/>
               </a:rPr>
-              <a:t>participating</a:t>
+              <a:t>participated</a:t>
             </a:r>
             <a:endParaRPr lang="en-US" sz="1200" dirty="0"/>
           </a:p>
@@ -45104,7 +45149,7 @@
                 <a:ea typeface="Calibri" pitchFamily="34" charset="-122"/>
                 <a:cs typeface="Calibri" pitchFamily="34" charset="-120"/>
               </a:rPr>
-              <a:t>To join in and take part in an activity or event.</a:t>
+              <a:t>The act of joining in or taking part in something, like a game or class activity.</a:t>
             </a:r>
             <a:endParaRPr lang="en-US" sz="1200" dirty="0"/>
           </a:p>
@@ -45177,7 +45222,7 @@
                 <a:ea typeface="Trebuchet MS" pitchFamily="34" charset="-122"/>
                 <a:cs typeface="Trebuchet MS" pitchFamily="34" charset="-120"/>
               </a:rPr>
-              <a:t>participated</a:t>
+              <a:t>participant</a:t>
             </a:r>
             <a:endParaRPr lang="en-US" sz="1200" dirty="0"/>
           </a:p>
@@ -45243,7 +45288,7 @@
                 <a:ea typeface="Calibri" pitchFamily="34" charset="-122"/>
                 <a:cs typeface="Calibri" pitchFamily="34" charset="-120"/>
               </a:rPr>
-              <a:t>More than one person taking part in an activity or event.</a:t>
+              <a:t>Describing something that involves everyone joining in and taking part.</a:t>
             </a:r>
             <a:endParaRPr lang="en-US" sz="1200" dirty="0"/>
           </a:p>
@@ -45316,7 +45361,7 @@
                 <a:ea typeface="Trebuchet MS" pitchFamily="34" charset="-122"/>
                 <a:cs typeface="Trebuchet MS" pitchFamily="34" charset="-120"/>
               </a:rPr>
-              <a:t>participant</a:t>
+              <a:t>participants</a:t>
             </a:r>
             <a:endParaRPr lang="en-US" sz="1200" dirty="0"/>
           </a:p>
@@ -45382,7 +45427,7 @@
                 <a:ea typeface="Calibri" pitchFamily="34" charset="-122"/>
                 <a:cs typeface="Calibri" pitchFamily="34" charset="-120"/>
               </a:rPr>
-              <a:t>Describing something that involves everyone joining in.</a:t>
+              <a:t>Choosing not to join in or take part in something.</a:t>
             </a:r>
             <a:endParaRPr lang="en-US" sz="1200" dirty="0"/>
           </a:p>
@@ -45455,7 +45500,7 @@
                 <a:ea typeface="Trebuchet MS" pitchFamily="34" charset="-122"/>
                 <a:cs typeface="Trebuchet MS" pitchFamily="34" charset="-120"/>
               </a:rPr>
-              <a:t>participants</a:t>
+              <a:t>participatory</a:t>
             </a:r>
             <a:endParaRPr lang="en-US" sz="1200" dirty="0"/>
           </a:p>
@@ -45521,7 +45566,7 @@
                 <a:ea typeface="Calibri" pitchFamily="34" charset="-122"/>
                 <a:cs typeface="Calibri" pitchFamily="34" charset="-120"/>
               </a:rPr>
-              <a:t>Took part in something that happened in the past.</a:t>
+              <a:t>A person who takes part in an activity, event, or competition.</a:t>
             </a:r>
             <a:endParaRPr lang="en-US" sz="1200" dirty="0"/>
           </a:p>
@@ -45594,7 +45639,7 @@
                 <a:ea typeface="Trebuchet MS" pitchFamily="34" charset="-122"/>
                 <a:cs typeface="Trebuchet MS" pitchFamily="34" charset="-120"/>
               </a:rPr>
-              <a:t>participatory</a:t>
+              <a:t>nonparticipation</a:t>
             </a:r>
             <a:endParaRPr lang="en-US" sz="1200" dirty="0"/>
           </a:p>
@@ -45660,7 +45705,7 @@
                 <a:ea typeface="Calibri" pitchFamily="34" charset="-122"/>
                 <a:cs typeface="Calibri" pitchFamily="34" charset="-120"/>
               </a:rPr>
-              <a:t>The act of joining in and being involved in something.</a:t>
+              <a:t>Currently taking part in something that is happening right now.</a:t>
             </a:r>
             <a:endParaRPr lang="en-US" sz="1200" dirty="0"/>
           </a:p>
@@ -46155,7 +46200,7 @@
                 <a:ea typeface="Calibri" pitchFamily="34" charset="-122"/>
                 <a:cs typeface="Calibri" pitchFamily="34" charset="-120"/>
               </a:rPr>
-              <a:t>Every student is encouraged to participate in the school sports carnival this Friday.</a:t>
+              <a:t>Every student was encouraged to join in the participation activities during the school carnival.</a:t>
             </a:r>
             <a:endParaRPr lang="en-US" sz="1500" dirty="0"/>
           </a:p>
@@ -46319,7 +46364,7 @@
                 <a:ea typeface="Calibri" pitchFamily="34" charset="-122"/>
                 <a:cs typeface="Calibri" pitchFamily="34" charset="-120"/>
               </a:rPr>
-              <a:t>The teacher was pleased with the high level of participation during the class discussion.</a:t>
+              <a:t>The participants in the science competition worked very hard on their projects.</a:t>
             </a:r>
             <a:endParaRPr lang="en-US" sz="1500" dirty="0"/>
           </a:p>
@@ -46483,7 +46528,7 @@
                 <a:ea typeface="Calibri" pitchFamily="34" charset="-122"/>
                 <a:cs typeface="Calibri" pitchFamily="34" charset="-120"/>
               </a:rPr>
-              <a:t>Each participant in the science competition received a certificate for their efforts.</a:t>
+              <a:t>Mrs Chen noticed that all the children were actively participating in the group discussion.</a:t>
             </a:r>
             <a:endParaRPr lang="en-US" sz="1500" dirty="0"/>
           </a:p>
